--- a/book/slides/pptx/ch01-adt.pptx
+++ b/book/slides/pptx/ch01-adt.pptx
@@ -5,7 +5,7 @@
     <p:sldMasterId id="2147483648" r:id="rId1"/>
   </p:sldMasterIdLst>
   <p:notesMasterIdLst>
-    <p:notesMasterId r:id="rId30"/>
+    <p:notesMasterId r:id="rId31"/>
   </p:notesMasterIdLst>
   <p:sldIdLst>
     <p:sldId id="256" r:id="rId2"/>
@@ -36,6 +36,7 @@
     <p:sldId id="281" r:id="rId27"/>
     <p:sldId id="282" r:id="rId28"/>
     <p:sldId id="283" r:id="rId29"/>
+    <p:sldId id="284" r:id="rId30"/>
   </p:sldIdLst>
   <p:sldSz cx="12192000" cy="6858000"/>
   <p:notesSz cx="6858000" cy="9144000"/>
@@ -204,7 +205,7 @@
                 <a:ea typeface="Noto Sans CJK SC"/>
                 <a:cs typeface="Segoe UI"/>
               </a:rPr>
-              <a:t>找 52：索引里二分到第 3 列，读出 [2]，直接取第 2 块——只读一块。</a:t>
+              <a:t>索引和散列在第 10、11 章才展开，这里只要学生记住「有四种」。</a:t>
             </a:r>
           </a:p>
           <a:p>
@@ -223,45 +224,7 @@
                 <a:ea typeface="Noto Sans CJK SC"/>
                 <a:cs typeface="Segoe UI"/>
               </a:rPr>
-              <a:t>再看每块的宽度：五块长度各不相同。正因为长度不等，</a:t>
-            </a:r>
-          </a:p>
-          <a:p>
-            <a:pPr marL="0" indent="0" lvl="0">
-              <a:lnSpc>
-                <a:spcPct val="100000"/>
-              </a:lnSpc>
-              <a:buNone/>
-            </a:pPr>
-            <a:r>
-              <a:rPr lang="zh-CN" sz="1200" dirty="0">
-                <a:solidFill>
-                  <a:srgbClr val="1A1A18"/>
-                </a:solidFill>
-                <a:latin typeface="Segoe UI"/>
-                <a:ea typeface="Noto Sans CJK SC"/>
-                <a:cs typeface="Segoe UI"/>
-              </a:rPr>
-              <a:t>「第 k 块在哪」没法用「起始地址 + k × 块长」算出来，只能查表。</a:t>
-            </a:r>
-          </a:p>
-          <a:p>
-            <a:pPr marL="0" indent="0" lvl="0">
-              <a:lnSpc>
-                <a:spcPct val="100000"/>
-              </a:lnSpc>
-              <a:buNone/>
-            </a:pPr>
-            <a:r>
-              <a:rPr lang="zh-CN" sz="1200" dirty="0">
-                <a:solidFill>
-                  <a:srgbClr val="1A1A18"/>
-                </a:solidFill>
-                <a:latin typeface="Segoe UI"/>
-                <a:ea typeface="Noto Sans CJK SC"/>
-                <a:cs typeface="Segoe UI"/>
-              </a:rPr>
-              <a:t>这就是原书说「索引函数并非数组那样的简单线性函数」的意思。</a:t>
+              <a:t>特别提醒：索引表的空间是附加在数据之外的。</a:t>
             </a:r>
           </a:p>
         </p:txBody>
@@ -326,7 +289,7 @@
                 <a:ea typeface="Noto Sans CJK SC"/>
                 <a:cs typeface="Segoe UI"/>
               </a:rPr>
-              <a:t>原书用一个「成员函数非纯虚、析构函数非 virtual」的空基类来表达抽象。</a:t>
+              <a:t>找 52：索引里二分到第 3 列，读出 [2]，直接取第 2 块——只读一块。</a:t>
             </a:r>
           </a:p>
           <a:p>
@@ -345,7 +308,7 @@
                 <a:ea typeface="Noto Sans CJK SC"/>
                 <a:cs typeface="Segoe UI"/>
               </a:rPr>
-              <a:t>那样的基类给不了任何多态，反而埋下「通过基类指针删派生对象」的未定义行为。</a:t>
+              <a:t>再看每块的宽度：五块长度各不相同。正因为长度不等，</a:t>
             </a:r>
           </a:p>
           <a:p>
@@ -364,7 +327,26 @@
                 <a:ea typeface="Noto Sans CJK SC"/>
                 <a:cs typeface="Segoe UI"/>
               </a:rPr>
-              <a:t>在 C++ 里，模板本身就承担了这层抽象——本书各章都不设基类。</a:t>
+              <a:t>「第 k 块在哪」没法用「起始地址 + k × 块长」算出来，只能查表。</a:t>
+            </a:r>
+          </a:p>
+          <a:p>
+            <a:pPr marL="0" indent="0" lvl="0">
+              <a:lnSpc>
+                <a:spcPct val="100000"/>
+              </a:lnSpc>
+              <a:buNone/>
+            </a:pPr>
+            <a:r>
+              <a:rPr lang="zh-CN" sz="1200" dirty="0">
+                <a:solidFill>
+                  <a:srgbClr val="1A1A18"/>
+                </a:solidFill>
+                <a:latin typeface="Segoe UI"/>
+                <a:ea typeface="Noto Sans CJK SC"/>
+                <a:cs typeface="Segoe UI"/>
+              </a:rPr>
+              <a:t>这就是原书说「索引函数并非数组那样的简单线性函数」的意思。</a:t>
             </a:r>
           </a:p>
         </p:txBody>
@@ -429,7 +411,7 @@
                 <a:ea typeface="Noto Sans CJK SC"/>
                 <a:cs typeface="Segoe UI"/>
               </a:rPr>
-              <a:t>「有穷」这一条最容易被当成废话，其实是四条里唯一需要单独证明的。</a:t>
+              <a:t>原书用一个「成员函数非纯虚、析构函数非 virtual」的空基类来表达抽象。</a:t>
             </a:r>
           </a:p>
           <a:p>
@@ -448,7 +430,7 @@
                 <a:ea typeface="Noto Sans CJK SC"/>
                 <a:cs typeface="Segoe UI"/>
               </a:rPr>
-              <a:t>可以让学生看辗转相除：为什么它一定停？因为余数严格递减且非负——</a:t>
+              <a:t>那样的基类给不了任何多态，反而埋下「通过基类指针删派生对象」的未定义行为。</a:t>
             </a:r>
           </a:p>
           <a:p>
@@ -467,7 +449,7 @@
                 <a:ea typeface="Noto Sans CJK SC"/>
                 <a:cs typeface="Segoe UI"/>
               </a:rPr>
-              <a:t>这是一个递减到底的量，后面讲循环不变式和递归深度时会反复用到同一招。</a:t>
+              <a:t>在 C++ 里，模板本身就承担了这层抽象——本书各章都不设基类。</a:t>
             </a:r>
           </a:p>
         </p:txBody>
@@ -477,7 +459,7 @@
 </p:notes>
 </file>
 
-<file path=ppt/notesSlides/notesSlide14.xml><?xml version="1.0" encoding="utf-8"?>
+<file path=ppt/notesSlides/notesSlide13.xml><?xml version="1.0" encoding="utf-8"?>
 <p:notes xmlns:a="http://schemas.openxmlformats.org/drawingml/2006/main" xmlns:r="http://schemas.openxmlformats.org/officeDocument/2006/relationships" xmlns:p="http://schemas.openxmlformats.org/presentationml/2006/main">
   <p:cSld>
     <p:spTree>
@@ -532,7 +514,7 @@
                 <a:ea typeface="Noto Sans CJK SC"/>
                 <a:cs typeface="Segoe UI"/>
               </a:rPr>
-              <a:t>强调一句：常数和低阶项不是不重要，是不能用来区分算法。</a:t>
+              <a:t>「有穷」这一条最容易被当成废话，其实是四条里唯一需要单独证明的。</a:t>
             </a:r>
           </a:p>
           <a:p>
@@ -551,7 +533,26 @@
                 <a:ea typeface="Noto Sans CJK SC"/>
                 <a:cs typeface="Segoe UI"/>
               </a:rPr>
-              <a:t>n 小的时候 O(n^2) 完全可能比 O(n log n) 快，这在第 8 章讲插入排序时会再遇到。</a:t>
+              <a:t>可以让学生看辗转相除：为什么它一定停？因为余数严格递减且非负——</a:t>
+            </a:r>
+          </a:p>
+          <a:p>
+            <a:pPr marL="0" indent="0" lvl="0">
+              <a:lnSpc>
+                <a:spcPct val="100000"/>
+              </a:lnSpc>
+              <a:buNone/>
+            </a:pPr>
+            <a:r>
+              <a:rPr lang="zh-CN" sz="1200" dirty="0">
+                <a:solidFill>
+                  <a:srgbClr val="1A1A18"/>
+                </a:solidFill>
+                <a:latin typeface="Segoe UI"/>
+                <a:ea typeface="Noto Sans CJK SC"/>
+                <a:cs typeface="Segoe UI"/>
+              </a:rPr>
+              <a:t>这是一个递减到底的量，后面讲循环不变式和递归深度时会反复用到同一招。</a:t>
             </a:r>
           </a:p>
         </p:txBody>
@@ -616,7 +617,7 @@
                 <a:ea typeface="Noto Sans CJK SC"/>
                 <a:cs typeface="Segoe UI"/>
               </a:rPr>
-              <a:t>可以举个反例：说「插入排序是 O(n^2)」对，说「插入排序是 Θ(n^2)」就错了——</a:t>
+              <a:t>强调一句：常数和低阶项不是不重要，是不能用来区分算法。</a:t>
             </a:r>
           </a:p>
           <a:p>
@@ -635,7 +636,7 @@
                 <a:ea typeface="Noto Sans CJK SC"/>
                 <a:cs typeface="Segoe UI"/>
               </a:rPr>
-              <a:t>输入已经有序时它是 Θ(n)。所以最好情况/最坏情况必须分开说。</a:t>
+              <a:t>n 小的时候 O(n^2) 完全可能比 O(n log n) 快，这在第 8 章讲插入排序时会再遇到。</a:t>
             </a:r>
           </a:p>
         </p:txBody>
@@ -700,6 +701,90 @@
                 <a:ea typeface="Noto Sans CJK SC"/>
                 <a:cs typeface="Segoe UI"/>
               </a:rPr>
+              <a:t>可以举个反例：说「插入排序是 O(n^2)」对，说「插入排序是 Θ(n^2)」就错了——</a:t>
+            </a:r>
+          </a:p>
+          <a:p>
+            <a:pPr marL="0" indent="0" lvl="0">
+              <a:lnSpc>
+                <a:spcPct val="100000"/>
+              </a:lnSpc>
+              <a:buNone/>
+            </a:pPr>
+            <a:r>
+              <a:rPr lang="zh-CN" sz="1200" dirty="0">
+                <a:solidFill>
+                  <a:srgbClr val="1A1A18"/>
+                </a:solidFill>
+                <a:latin typeface="Segoe UI"/>
+                <a:ea typeface="Noto Sans CJK SC"/>
+                <a:cs typeface="Segoe UI"/>
+              </a:rPr>
+              <a:t>输入已经有序时它是 Θ(n)。所以最好情况/最坏情况必须分开说。</a:t>
+            </a:r>
+          </a:p>
+        </p:txBody>
+      </p:sp>
+    </p:spTree>
+  </p:cSld>
+</p:notes>
+</file>
+
+<file path=ppt/notesSlides/notesSlide17.xml><?xml version="1.0" encoding="utf-8"?>
+<p:notes xmlns:a="http://schemas.openxmlformats.org/drawingml/2006/main" xmlns:r="http://schemas.openxmlformats.org/officeDocument/2006/relationships" xmlns:p="http://schemas.openxmlformats.org/presentationml/2006/main">
+  <p:cSld>
+    <p:spTree>
+      <p:nvGrpSpPr>
+        <p:cNvPr id="1" name=""/>
+        <p:cNvGrpSpPr/>
+        <p:nvPr/>
+      </p:nvGrpSpPr>
+      <p:grpSpPr>
+        <a:xfrm>
+          <a:off x="0" y="0"/>
+          <a:ext cx="0" cy="0"/>
+          <a:chOff x="0" y="0"/>
+          <a:chExt cx="0" cy="0"/>
+        </a:xfrm>
+      </p:grpSpPr>
+      <p:sp>
+        <p:nvSpPr>
+          <p:cNvPr id="2" name="备注"/>
+          <p:cNvSpPr>
+            <a:spLocks noGrp="1"/>
+          </p:cNvSpPr>
+          <p:nvPr>
+            <p:ph type="body" idx="1"/>
+          </p:nvPr>
+        </p:nvSpPr>
+        <p:spPr>
+          <a:xfrm>
+            <a:off x="457200" y="3886200"/>
+            <a:ext cx="5943600" cy="4400550"/>
+          </a:xfrm>
+          <a:prstGeom prst="rect">
+            <a:avLst/>
+          </a:prstGeom>
+        </p:spPr>
+        <p:txBody>
+          <a:bodyPr/>
+          <a:lstStyle/>
+          <a:p>
+            <a:pPr marL="0" indent="0" lvl="0">
+              <a:lnSpc>
+                <a:spcPct val="100000"/>
+              </a:lnSpc>
+              <a:buNone/>
+            </a:pPr>
+            <a:r>
+              <a:rPr lang="zh-CN" sz="1200" dirty="0">
+                <a:solidFill>
+                  <a:srgbClr val="1A1A18"/>
+                </a:solidFill>
+                <a:latin typeface="Segoe UI"/>
+                <a:ea typeface="Noto Sans CJK SC"/>
+                <a:cs typeface="Segoe UI"/>
+              </a:rPr>
               <a:t>可以追问：如果查询集中在前几个元素（比如按热度排序），平均次数会小很多。</a:t>
             </a:r>
           </a:p>
@@ -1009,7 +1094,7 @@
                 <a:ea typeface="Noto Sans CJK SC"/>
                 <a:cs typeface="Segoe UI"/>
               </a:rPr>
-              <a:t>三处值得说：</a:t>
+              <a:t>1. k（这里叫 via）在最外层；</a:t>
             </a:r>
           </a:p>
           <a:p>
@@ -1028,7 +1113,7 @@
                 <a:ea typeface="Noto Sans CJK SC"/>
                 <a:cs typeface="Segoe UI"/>
               </a:rPr>
-              <a:t>1. k（这里叫 via）在最外层；</a:t>
+              <a:t>2. infinity 只表示「没有直接路线」，每段时间都必须小于它；最短时间是若干段之和，</a:t>
             </a:r>
           </a:p>
           <a:p>
@@ -1047,7 +1132,7 @@
                 <a:ea typeface="Noto Sans CJK SC"/>
                 <a:cs typeface="Segoe UI"/>
               </a:rPr>
-              <a:t>2. infinity 取的是 INT_MAX/4 而不是 INT_MAX——两个 infinity 相加会溢出，</a:t>
+              <a:t>用 64 位的 distance_type 存、到不了记 unreachable——总长恰好等于 infinity 的路径</a:t>
             </a:r>
           </a:p>
           <a:p>
@@ -1066,26 +1151,7 @@
                 <a:ea typeface="Noto Sans CJK SC"/>
                 <a:cs typeface="Segoe UI"/>
               </a:rPr>
-              <a:t>而溢出是未定义行为；</a:t>
-            </a:r>
-          </a:p>
-          <a:p>
-            <a:pPr marL="0" indent="0" lvl="0">
-              <a:lnSpc>
-                <a:spcPct val="100000"/>
-              </a:lnSpc>
-              <a:buNone/>
-            </a:pPr>
-            <a:r>
-              <a:rPr lang="zh-CN" sz="1200" dirty="0">
-                <a:solidFill>
-                  <a:srgbClr val="1A1A18"/>
-                </a:solidFill>
-                <a:latin typeface="Segoe UI"/>
-                <a:ea typeface="Noto Sans CJK SC"/>
-                <a:cs typeface="Segoe UI"/>
-              </a:rPr>
-              <a:t>3. 返回 optional：图不连通时没有这样的起点，那不是错误，是可预期状态。</a:t>
+              <a:t>就不会被误读成到不了，更长的也不会溢出（有符号溢出是未定义行为）。</a:t>
             </a:r>
           </a:p>
         </p:txBody>
@@ -1095,7 +1161,7 @@
 </p:notes>
 </file>
 
-<file path=ppt/notesSlides/notesSlide8.xml><?xml version="1.0" encoding="utf-8"?>
+<file path=ppt/notesSlides/notesSlide7.xml><?xml version="1.0" encoding="utf-8"?>
 <p:notes xmlns:a="http://schemas.openxmlformats.org/drawingml/2006/main" xmlns:r="http://schemas.openxmlformats.org/officeDocument/2006/relationships" xmlns:p="http://schemas.openxmlformats.org/presentationml/2006/main">
   <p:cSld>
     <p:spTree>
@@ -1150,26 +1216,7 @@
                 <a:ea typeface="Noto Sans CJK SC"/>
                 <a:cs typeface="Segoe UI"/>
               </a:rPr>
-              <a:t>后面每一章都落在这三类里，可以先把全书地图画出来：</a:t>
-            </a:r>
-          </a:p>
-          <a:p>
-            <a:pPr marL="0" indent="0" lvl="0">
-              <a:lnSpc>
-                <a:spcPct val="100000"/>
-              </a:lnSpc>
-              <a:buNone/>
-            </a:pPr>
-            <a:r>
-              <a:rPr lang="zh-CN" sz="1200" dirty="0">
-                <a:solidFill>
-                  <a:srgbClr val="1A1A18"/>
-                </a:solidFill>
-                <a:latin typeface="Segoe UI"/>
-                <a:ea typeface="Noto Sans CJK SC"/>
-                <a:cs typeface="Segoe UI"/>
-              </a:rPr>
-              <a:t>第 2-4 章线性，第 5-6 章树形，第 7 章图，第 8-12 章是在这些结构上做算法。</a:t>
+              <a:t>返回 optional：图不连通时没有这样的起点，那不是错误，是可预期状态。</a:t>
             </a:r>
           </a:p>
         </p:txBody>
@@ -1234,7 +1281,7 @@
                 <a:ea typeface="Noto Sans CJK SC"/>
                 <a:cs typeface="Segoe UI"/>
               </a:rPr>
-              <a:t>索引和散列在第 10、11 章才展开，这里只要学生记住「有四种」。</a:t>
+              <a:t>后面每一章都落在这三类里，可以先把全书地图画出来：</a:t>
             </a:r>
           </a:p>
           <a:p>
@@ -1253,7 +1300,7 @@
                 <a:ea typeface="Noto Sans CJK SC"/>
                 <a:cs typeface="Segoe UI"/>
               </a:rPr>
-              <a:t>特别提醒：索引表的空间是附加在数据之外的。</a:t>
+              <a:t>第 2-4 章线性，第 5-6 章树形，第 7 章图，第 8-12 章是在这些结构上做算法。</a:t>
             </a:r>
           </a:p>
         </p:txBody>
@@ -1703,7 +1750,7 @@
                 <a:ea typeface="Noto Sans CJK SC"/>
                 <a:cs typeface="Segoe UI"/>
               </a:rPr>
-              <a:t>1 / 28</a:t>
+              <a:t>1 / 29</a:t>
             </a:r>
           </a:p>
         </p:txBody>
@@ -1767,7 +1814,7 @@
                 <a:ea typeface="Noto Sans CJK SC"/>
                 <a:cs typeface="Segoe UI"/>
               </a:rPr>
-              <a:t>索引：逻辑有序，物理无序</a:t>
+              <a:t>四种存储方法</a:t>
             </a:r>
           </a:p>
         </p:txBody>
@@ -1799,257 +1846,823 @@
           <a:p/>
         </p:txBody>
       </p:sp>
-      <p:sp>
-        <p:nvSpPr>
-          <p:cNvPr id="4" name="代码"/>
+      <p:graphicFrame>
+        <p:nvGraphicFramePr>
+          <p:cNvPr id="4" name="表"/>
+          <p:cNvGraphicFramePr>
+            <a:graphicFrameLocks noGrp="1"/>
+          </p:cNvGraphicFramePr>
+          <p:nvPr/>
+        </p:nvGraphicFramePr>
+        <p:xfrm>
+          <a:off x="566928" y="2012188"/>
+          <a:ext cx="11058144" cy="1902520"/>
+        </p:xfrm>
+        <a:graphic>
+          <a:graphicData uri="http://schemas.openxmlformats.org/drawingml/2006/table">
+            <a:tbl>
+              <a:tblPr firstRow="1"/>
+              <a:tblGrid>
+                <a:gridCol w="1361840"/>
+                <a:gridCol w="4085521"/>
+                <a:gridCol w="5610783"/>
+              </a:tblGrid>
+              <a:tr h="380504">
+                <a:tc>
+                  <a:txBody>
+                    <a:bodyPr/>
+                    <a:lstStyle/>
+                    <a:p>
+                      <a:pPr marL="0" indent="0" lvl="0">
+                        <a:lnSpc>
+                          <a:spcPct val="100000"/>
+                        </a:lnSpc>
+                        <a:buNone/>
+                      </a:pPr>
+                      <a:r>
+                        <a:rPr lang="zh-CN" sz="1755" dirty="0" b="1">
+                          <a:solidFill>
+                            <a:srgbClr val="1A1A18"/>
+                          </a:solidFill>
+                          <a:latin typeface="Segoe UI"/>
+                          <a:ea typeface="Noto Sans CJK SC"/>
+                          <a:cs typeface="Segoe UI"/>
+                        </a:rPr>
+                        <a:t>方法</a:t>
+                      </a:r>
+                    </a:p>
+                  </a:txBody>
+                  <a:tcPr marL="45720" marR="45720" marT="27432" marB="27432" anchor="ctr">
+                    <a:lnL w="9525">
+                      <a:solidFill>
+                        <a:srgbClr val="DCDCD6"/>
+                      </a:solidFill>
+                    </a:lnL>
+                    <a:lnR w="9525">
+                      <a:solidFill>
+                        <a:srgbClr val="DCDCD6"/>
+                      </a:solidFill>
+                    </a:lnR>
+                    <a:lnT w="9525">
+                      <a:solidFill>
+                        <a:srgbClr val="DCDCD6"/>
+                      </a:solidFill>
+                    </a:lnT>
+                    <a:lnB w="9525">
+                      <a:solidFill>
+                        <a:srgbClr val="DCDCD6"/>
+                      </a:solidFill>
+                    </a:lnB>
+                    <a:solidFill>
+                      <a:srgbClr val="F5F4F0"/>
+                    </a:solidFill>
+                  </a:tcPr>
+                </a:tc>
+                <a:tc>
+                  <a:txBody>
+                    <a:bodyPr/>
+                    <a:lstStyle/>
+                    <a:p>
+                      <a:pPr marL="0" indent="0" lvl="0">
+                        <a:lnSpc>
+                          <a:spcPct val="100000"/>
+                        </a:lnSpc>
+                        <a:buNone/>
+                      </a:pPr>
+                      <a:r>
+                        <a:rPr lang="zh-CN" sz="1755" dirty="0" b="1">
+                          <a:solidFill>
+                            <a:srgbClr val="1A1A18"/>
+                          </a:solidFill>
+                          <a:latin typeface="Segoe UI"/>
+                          <a:ea typeface="Noto Sans CJK SC"/>
+                          <a:cs typeface="Segoe UI"/>
+                        </a:rPr>
+                        <a:t>怎么表示「相邻」</a:t>
+                      </a:r>
+                    </a:p>
+                  </a:txBody>
+                  <a:tcPr marL="45720" marR="45720" marT="27432" marB="27432" anchor="ctr">
+                    <a:lnL w="9525">
+                      <a:solidFill>
+                        <a:srgbClr val="DCDCD6"/>
+                      </a:solidFill>
+                    </a:lnL>
+                    <a:lnR w="9525">
+                      <a:solidFill>
+                        <a:srgbClr val="DCDCD6"/>
+                      </a:solidFill>
+                    </a:lnR>
+                    <a:lnT w="9525">
+                      <a:solidFill>
+                        <a:srgbClr val="DCDCD6"/>
+                      </a:solidFill>
+                    </a:lnT>
+                    <a:lnB w="9525">
+                      <a:solidFill>
+                        <a:srgbClr val="DCDCD6"/>
+                      </a:solidFill>
+                    </a:lnB>
+                    <a:solidFill>
+                      <a:srgbClr val="F5F4F0"/>
+                    </a:solidFill>
+                  </a:tcPr>
+                </a:tc>
+                <a:tc>
+                  <a:txBody>
+                    <a:bodyPr/>
+                    <a:lstStyle/>
+                    <a:p>
+                      <a:pPr marL="0" indent="0" lvl="0">
+                        <a:lnSpc>
+                          <a:spcPct val="100000"/>
+                        </a:lnSpc>
+                        <a:buNone/>
+                      </a:pPr>
+                      <a:r>
+                        <a:rPr lang="zh-CN" sz="1755" dirty="0" b="1">
+                          <a:solidFill>
+                            <a:srgbClr val="1A1A18"/>
+                          </a:solidFill>
+                          <a:latin typeface="Segoe UI"/>
+                          <a:ea typeface="Noto Sans CJK SC"/>
+                          <a:cs typeface="Segoe UI"/>
+                        </a:rPr>
+                        <a:t>代价</a:t>
+                      </a:r>
+                    </a:p>
+                  </a:txBody>
+                  <a:tcPr marL="45720" marR="45720" marT="27432" marB="27432" anchor="ctr">
+                    <a:lnL w="9525">
+                      <a:solidFill>
+                        <a:srgbClr val="DCDCD6"/>
+                      </a:solidFill>
+                    </a:lnL>
+                    <a:lnR w="9525">
+                      <a:solidFill>
+                        <a:srgbClr val="DCDCD6"/>
+                      </a:solidFill>
+                    </a:lnR>
+                    <a:lnT w="9525">
+                      <a:solidFill>
+                        <a:srgbClr val="DCDCD6"/>
+                      </a:solidFill>
+                    </a:lnT>
+                    <a:lnB w="9525">
+                      <a:solidFill>
+                        <a:srgbClr val="DCDCD6"/>
+                      </a:solidFill>
+                    </a:lnB>
+                    <a:solidFill>
+                      <a:srgbClr val="F5F4F0"/>
+                    </a:solidFill>
+                  </a:tcPr>
+                </a:tc>
+              </a:tr>
+              <a:tr h="380504">
+                <a:tc>
+                  <a:txBody>
+                    <a:bodyPr/>
+                    <a:lstStyle/>
+                    <a:p>
+                      <a:pPr marL="0" indent="0" lvl="0">
+                        <a:lnSpc>
+                          <a:spcPct val="100000"/>
+                        </a:lnSpc>
+                        <a:buNone/>
+                      </a:pPr>
+                      <a:r>
+                        <a:rPr lang="zh-CN" sz="1755" dirty="0" b="1">
+                          <a:solidFill>
+                            <a:srgbClr val="8A4B2A"/>
+                          </a:solidFill>
+                          <a:latin typeface="Segoe UI"/>
+                          <a:ea typeface="Noto Sans CJK SC"/>
+                          <a:cs typeface="Segoe UI"/>
+                        </a:rPr>
+                        <a:t>顺序</a:t>
+                      </a:r>
+                    </a:p>
+                  </a:txBody>
+                  <a:tcPr marL="45720" marR="45720" marT="27432" marB="27432" anchor="ctr">
+                    <a:lnL w="9525">
+                      <a:solidFill>
+                        <a:srgbClr val="DCDCD6"/>
+                      </a:solidFill>
+                    </a:lnL>
+                    <a:lnR w="9525">
+                      <a:solidFill>
+                        <a:srgbClr val="DCDCD6"/>
+                      </a:solidFill>
+                    </a:lnR>
+                    <a:lnT w="9525">
+                      <a:solidFill>
+                        <a:srgbClr val="DCDCD6"/>
+                      </a:solidFill>
+                    </a:lnT>
+                    <a:lnB w="9525">
+                      <a:solidFill>
+                        <a:srgbClr val="DCDCD6"/>
+                      </a:solidFill>
+                    </a:lnB>
+                    <a:solidFill>
+                      <a:srgbClr val="FFFFFF"/>
+                    </a:solidFill>
+                  </a:tcPr>
+                </a:tc>
+                <a:tc>
+                  <a:txBody>
+                    <a:bodyPr/>
+                    <a:lstStyle/>
+                    <a:p>
+                      <a:pPr marL="0" indent="0" lvl="0">
+                        <a:lnSpc>
+                          <a:spcPct val="100000"/>
+                        </a:lnSpc>
+                        <a:buNone/>
+                      </a:pPr>
+                      <a:r>
+                        <a:rPr lang="zh-CN" sz="1755" dirty="0">
+                          <a:solidFill>
+                            <a:srgbClr val="1A1A18"/>
+                          </a:solidFill>
+                          <a:latin typeface="Segoe UI"/>
+                          <a:ea typeface="Noto Sans CJK SC"/>
+                          <a:cs typeface="Segoe UI"/>
+                        </a:rPr>
+                        <a:t>地址相邻</a:t>
+                      </a:r>
+                    </a:p>
+                  </a:txBody>
+                  <a:tcPr marL="45720" marR="45720" marT="27432" marB="27432" anchor="ctr">
+                    <a:lnL w="9525">
+                      <a:solidFill>
+                        <a:srgbClr val="DCDCD6"/>
+                      </a:solidFill>
+                    </a:lnL>
+                    <a:lnR w="9525">
+                      <a:solidFill>
+                        <a:srgbClr val="DCDCD6"/>
+                      </a:solidFill>
+                    </a:lnR>
+                    <a:lnT w="9525">
+                      <a:solidFill>
+                        <a:srgbClr val="DCDCD6"/>
+                      </a:solidFill>
+                    </a:lnT>
+                    <a:lnB w="9525">
+                      <a:solidFill>
+                        <a:srgbClr val="DCDCD6"/>
+                      </a:solidFill>
+                    </a:lnB>
+                    <a:solidFill>
+                      <a:srgbClr val="FFFFFF"/>
+                    </a:solidFill>
+                  </a:tcPr>
+                </a:tc>
+                <a:tc>
+                  <a:txBody>
+                    <a:bodyPr/>
+                    <a:lstStyle/>
+                    <a:p>
+                      <a:pPr marL="0" indent="0" lvl="0">
+                        <a:lnSpc>
+                          <a:spcPct val="100000"/>
+                        </a:lnSpc>
+                        <a:buNone/>
+                      </a:pPr>
+                      <a:r>
+                        <a:rPr lang="zh-CN" sz="1755" dirty="0">
+                          <a:solidFill>
+                            <a:srgbClr val="1A1A18"/>
+                          </a:solidFill>
+                          <a:latin typeface="Segoe UI"/>
+                          <a:ea typeface="Noto Sans CJK SC"/>
+                          <a:cs typeface="Segoe UI"/>
+                        </a:rPr>
+                        <a:t>按下标 O(1)；插删要搬</a:t>
+                      </a:r>
+                    </a:p>
+                  </a:txBody>
+                  <a:tcPr marL="45720" marR="45720" marT="27432" marB="27432" anchor="ctr">
+                    <a:lnL w="9525">
+                      <a:solidFill>
+                        <a:srgbClr val="DCDCD6"/>
+                      </a:solidFill>
+                    </a:lnL>
+                    <a:lnR w="9525">
+                      <a:solidFill>
+                        <a:srgbClr val="DCDCD6"/>
+                      </a:solidFill>
+                    </a:lnR>
+                    <a:lnT w="9525">
+                      <a:solidFill>
+                        <a:srgbClr val="DCDCD6"/>
+                      </a:solidFill>
+                    </a:lnT>
+                    <a:lnB w="9525">
+                      <a:solidFill>
+                        <a:srgbClr val="DCDCD6"/>
+                      </a:solidFill>
+                    </a:lnB>
+                    <a:solidFill>
+                      <a:srgbClr val="FFFFFF"/>
+                    </a:solidFill>
+                  </a:tcPr>
+                </a:tc>
+              </a:tr>
+              <a:tr h="380504">
+                <a:tc>
+                  <a:txBody>
+                    <a:bodyPr/>
+                    <a:lstStyle/>
+                    <a:p>
+                      <a:pPr marL="0" indent="0" lvl="0">
+                        <a:lnSpc>
+                          <a:spcPct val="100000"/>
+                        </a:lnSpc>
+                        <a:buNone/>
+                      </a:pPr>
+                      <a:r>
+                        <a:rPr lang="zh-CN" sz="1755" dirty="0" b="1">
+                          <a:solidFill>
+                            <a:srgbClr val="8A4B2A"/>
+                          </a:solidFill>
+                          <a:latin typeface="Segoe UI"/>
+                          <a:ea typeface="Noto Sans CJK SC"/>
+                          <a:cs typeface="Segoe UI"/>
+                        </a:rPr>
+                        <a:t>链接</a:t>
+                      </a:r>
+                    </a:p>
+                  </a:txBody>
+                  <a:tcPr marL="45720" marR="45720" marT="27432" marB="27432" anchor="ctr">
+                    <a:lnL w="9525">
+                      <a:solidFill>
+                        <a:srgbClr val="DCDCD6"/>
+                      </a:solidFill>
+                    </a:lnL>
+                    <a:lnR w="9525">
+                      <a:solidFill>
+                        <a:srgbClr val="DCDCD6"/>
+                      </a:solidFill>
+                    </a:lnR>
+                    <a:lnT w="9525">
+                      <a:solidFill>
+                        <a:srgbClr val="DCDCD6"/>
+                      </a:solidFill>
+                    </a:lnT>
+                    <a:lnB w="9525">
+                      <a:solidFill>
+                        <a:srgbClr val="DCDCD6"/>
+                      </a:solidFill>
+                    </a:lnB>
+                    <a:solidFill>
+                      <a:srgbClr val="FFFFFF"/>
+                    </a:solidFill>
+                  </a:tcPr>
+                </a:tc>
+                <a:tc>
+                  <a:txBody>
+                    <a:bodyPr/>
+                    <a:lstStyle/>
+                    <a:p>
+                      <a:pPr marL="0" indent="0" lvl="0">
+                        <a:lnSpc>
+                          <a:spcPct val="100000"/>
+                        </a:lnSpc>
+                        <a:buNone/>
+                      </a:pPr>
+                      <a:r>
+                        <a:rPr lang="zh-CN" sz="1755" dirty="0">
+                          <a:solidFill>
+                            <a:srgbClr val="1A1A18"/>
+                          </a:solidFill>
+                          <a:latin typeface="Segoe UI"/>
+                          <a:ea typeface="Noto Sans CJK SC"/>
+                          <a:cs typeface="Segoe UI"/>
+                        </a:rPr>
+                        <a:t>指针相指</a:t>
+                      </a:r>
+                    </a:p>
+                  </a:txBody>
+                  <a:tcPr marL="45720" marR="45720" marT="27432" marB="27432" anchor="ctr">
+                    <a:lnL w="9525">
+                      <a:solidFill>
+                        <a:srgbClr val="DCDCD6"/>
+                      </a:solidFill>
+                    </a:lnL>
+                    <a:lnR w="9525">
+                      <a:solidFill>
+                        <a:srgbClr val="DCDCD6"/>
+                      </a:solidFill>
+                    </a:lnR>
+                    <a:lnT w="9525">
+                      <a:solidFill>
+                        <a:srgbClr val="DCDCD6"/>
+                      </a:solidFill>
+                    </a:lnT>
+                    <a:lnB w="9525">
+                      <a:solidFill>
+                        <a:srgbClr val="DCDCD6"/>
+                      </a:solidFill>
+                    </a:lnB>
+                    <a:solidFill>
+                      <a:srgbClr val="FFFFFF"/>
+                    </a:solidFill>
+                  </a:tcPr>
+                </a:tc>
+                <a:tc>
+                  <a:txBody>
+                    <a:bodyPr/>
+                    <a:lstStyle/>
+                    <a:p>
+                      <a:pPr marL="0" indent="0" lvl="0">
+                        <a:lnSpc>
+                          <a:spcPct val="100000"/>
+                        </a:lnSpc>
+                        <a:buNone/>
+                      </a:pPr>
+                      <a:r>
+                        <a:rPr lang="zh-CN" sz="1755" dirty="0">
+                          <a:solidFill>
+                            <a:srgbClr val="1A1A18"/>
+                          </a:solidFill>
+                          <a:latin typeface="Segoe UI"/>
+                          <a:ea typeface="Noto Sans CJK SC"/>
+                          <a:cs typeface="Segoe UI"/>
+                        </a:rPr>
+                        <a:t>插删只改指针；按位置要走</a:t>
+                      </a:r>
+                    </a:p>
+                  </a:txBody>
+                  <a:tcPr marL="45720" marR="45720" marT="27432" marB="27432" anchor="ctr">
+                    <a:lnL w="9525">
+                      <a:solidFill>
+                        <a:srgbClr val="DCDCD6"/>
+                      </a:solidFill>
+                    </a:lnL>
+                    <a:lnR w="9525">
+                      <a:solidFill>
+                        <a:srgbClr val="DCDCD6"/>
+                      </a:solidFill>
+                    </a:lnR>
+                    <a:lnT w="9525">
+                      <a:solidFill>
+                        <a:srgbClr val="DCDCD6"/>
+                      </a:solidFill>
+                    </a:lnT>
+                    <a:lnB w="9525">
+                      <a:solidFill>
+                        <a:srgbClr val="DCDCD6"/>
+                      </a:solidFill>
+                    </a:lnB>
+                    <a:solidFill>
+                      <a:srgbClr val="FFFFFF"/>
+                    </a:solidFill>
+                  </a:tcPr>
+                </a:tc>
+              </a:tr>
+              <a:tr h="380504">
+                <a:tc>
+                  <a:txBody>
+                    <a:bodyPr/>
+                    <a:lstStyle/>
+                    <a:p>
+                      <a:pPr marL="0" indent="0" lvl="0">
+                        <a:lnSpc>
+                          <a:spcPct val="100000"/>
+                        </a:lnSpc>
+                        <a:buNone/>
+                      </a:pPr>
+                      <a:r>
+                        <a:rPr lang="zh-CN" sz="1755" dirty="0" b="1">
+                          <a:solidFill>
+                            <a:srgbClr val="8A4B2A"/>
+                          </a:solidFill>
+                          <a:latin typeface="Segoe UI"/>
+                          <a:ea typeface="Noto Sans CJK SC"/>
+                          <a:cs typeface="Segoe UI"/>
+                        </a:rPr>
+                        <a:t>索引</a:t>
+                      </a:r>
+                    </a:p>
+                  </a:txBody>
+                  <a:tcPr marL="45720" marR="45720" marT="27432" marB="27432" anchor="ctr">
+                    <a:lnL w="9525">
+                      <a:solidFill>
+                        <a:srgbClr val="DCDCD6"/>
+                      </a:solidFill>
+                    </a:lnL>
+                    <a:lnR w="9525">
+                      <a:solidFill>
+                        <a:srgbClr val="DCDCD6"/>
+                      </a:solidFill>
+                    </a:lnR>
+                    <a:lnT w="9525">
+                      <a:solidFill>
+                        <a:srgbClr val="DCDCD6"/>
+                      </a:solidFill>
+                    </a:lnT>
+                    <a:lnB w="9525">
+                      <a:solidFill>
+                        <a:srgbClr val="DCDCD6"/>
+                      </a:solidFill>
+                    </a:lnB>
+                    <a:solidFill>
+                      <a:srgbClr val="FFFFFF"/>
+                    </a:solidFill>
+                  </a:tcPr>
+                </a:tc>
+                <a:tc>
+                  <a:txBody>
+                    <a:bodyPr/>
+                    <a:lstStyle/>
+                    <a:p>
+                      <a:pPr marL="0" indent="0" lvl="0">
+                        <a:lnSpc>
+                          <a:spcPct val="100000"/>
+                        </a:lnSpc>
+                        <a:buNone/>
+                      </a:pPr>
+                      <a:r>
+                        <a:rPr lang="zh-CN" sz="1755" dirty="0">
+                          <a:solidFill>
+                            <a:srgbClr val="1A1A18"/>
+                          </a:solidFill>
+                          <a:latin typeface="Segoe UI"/>
+                          <a:ea typeface="Noto Sans CJK SC"/>
+                          <a:cs typeface="Segoe UI"/>
+                        </a:rPr>
+                        <a:t>另造一张表，存地址</a:t>
+                      </a:r>
+                    </a:p>
+                  </a:txBody>
+                  <a:tcPr marL="45720" marR="45720" marT="27432" marB="27432" anchor="ctr">
+                    <a:lnL w="9525">
+                      <a:solidFill>
+                        <a:srgbClr val="DCDCD6"/>
+                      </a:solidFill>
+                    </a:lnL>
+                    <a:lnR w="9525">
+                      <a:solidFill>
+                        <a:srgbClr val="DCDCD6"/>
+                      </a:solidFill>
+                    </a:lnR>
+                    <a:lnT w="9525">
+                      <a:solidFill>
+                        <a:srgbClr val="DCDCD6"/>
+                      </a:solidFill>
+                    </a:lnT>
+                    <a:lnB w="9525">
+                      <a:solidFill>
+                        <a:srgbClr val="DCDCD6"/>
+                      </a:solidFill>
+                    </a:lnB>
+                    <a:solidFill>
+                      <a:srgbClr val="FFFFFF"/>
+                    </a:solidFill>
+                  </a:tcPr>
+                </a:tc>
+                <a:tc>
+                  <a:txBody>
+                    <a:bodyPr/>
+                    <a:lstStyle/>
+                    <a:p>
+                      <a:pPr marL="0" indent="0" lvl="0">
+                        <a:lnSpc>
+                          <a:spcPct val="100000"/>
+                        </a:lnSpc>
+                        <a:buNone/>
+                      </a:pPr>
+                      <a:r>
+                        <a:rPr lang="zh-CN" sz="1755" dirty="0">
+                          <a:solidFill>
+                            <a:srgbClr val="1A1A18"/>
+                          </a:solidFill>
+                          <a:latin typeface="Segoe UI"/>
+                          <a:ea typeface="Noto Sans CJK SC"/>
+                          <a:cs typeface="Segoe UI"/>
+                        </a:rPr>
+                        <a:t>多一份空间；换来快速定位</a:t>
+                      </a:r>
+                    </a:p>
+                  </a:txBody>
+                  <a:tcPr marL="45720" marR="45720" marT="27432" marB="27432" anchor="ctr">
+                    <a:lnL w="9525">
+                      <a:solidFill>
+                        <a:srgbClr val="DCDCD6"/>
+                      </a:solidFill>
+                    </a:lnL>
+                    <a:lnR w="9525">
+                      <a:solidFill>
+                        <a:srgbClr val="DCDCD6"/>
+                      </a:solidFill>
+                    </a:lnR>
+                    <a:lnT w="9525">
+                      <a:solidFill>
+                        <a:srgbClr val="DCDCD6"/>
+                      </a:solidFill>
+                    </a:lnT>
+                    <a:lnB w="9525">
+                      <a:solidFill>
+                        <a:srgbClr val="DCDCD6"/>
+                      </a:solidFill>
+                    </a:lnB>
+                    <a:solidFill>
+                      <a:srgbClr val="FFFFFF"/>
+                    </a:solidFill>
+                  </a:tcPr>
+                </a:tc>
+              </a:tr>
+              <a:tr h="380504">
+                <a:tc>
+                  <a:txBody>
+                    <a:bodyPr/>
+                    <a:lstStyle/>
+                    <a:p>
+                      <a:pPr marL="0" indent="0" lvl="0">
+                        <a:lnSpc>
+                          <a:spcPct val="100000"/>
+                        </a:lnSpc>
+                        <a:buNone/>
+                      </a:pPr>
+                      <a:r>
+                        <a:rPr lang="zh-CN" sz="1755" dirty="0" b="1">
+                          <a:solidFill>
+                            <a:srgbClr val="8A4B2A"/>
+                          </a:solidFill>
+                          <a:latin typeface="Segoe UI"/>
+                          <a:ea typeface="Noto Sans CJK SC"/>
+                          <a:cs typeface="Segoe UI"/>
+                        </a:rPr>
+                        <a:t>散列</a:t>
+                      </a:r>
+                    </a:p>
+                  </a:txBody>
+                  <a:tcPr marL="45720" marR="45720" marT="27432" marB="27432" anchor="ctr">
+                    <a:lnL w="9525">
+                      <a:solidFill>
+                        <a:srgbClr val="DCDCD6"/>
+                      </a:solidFill>
+                    </a:lnL>
+                    <a:lnR w="9525">
+                      <a:solidFill>
+                        <a:srgbClr val="DCDCD6"/>
+                      </a:solidFill>
+                    </a:lnR>
+                    <a:lnT w="9525">
+                      <a:solidFill>
+                        <a:srgbClr val="DCDCD6"/>
+                      </a:solidFill>
+                    </a:lnT>
+                    <a:lnB w="9525">
+                      <a:solidFill>
+                        <a:srgbClr val="DCDCD6"/>
+                      </a:solidFill>
+                    </a:lnB>
+                    <a:solidFill>
+                      <a:srgbClr val="FFFFFF"/>
+                    </a:solidFill>
+                  </a:tcPr>
+                </a:tc>
+                <a:tc>
+                  <a:txBody>
+                    <a:bodyPr/>
+                    <a:lstStyle/>
+                    <a:p>
+                      <a:pPr marL="0" indent="0" lvl="0">
+                        <a:lnSpc>
+                          <a:spcPct val="100000"/>
+                        </a:lnSpc>
+                        <a:buNone/>
+                      </a:pPr>
+                      <a:r>
+                        <a:rPr lang="zh-CN" sz="1755" dirty="0">
+                          <a:solidFill>
+                            <a:srgbClr val="1A1A18"/>
+                          </a:solidFill>
+                          <a:latin typeface="Segoe UI"/>
+                          <a:ea typeface="Noto Sans CJK SC"/>
+                          <a:cs typeface="Segoe UI"/>
+                        </a:rPr>
+                        <a:t>由关键码</a:t>
+                      </a:r>
+                      <a:r>
+                        <a:rPr lang="zh-CN" sz="1755" dirty="0" b="1">
+                          <a:solidFill>
+                            <a:srgbClr val="8A4B2A"/>
+                          </a:solidFill>
+                          <a:latin typeface="Segoe UI"/>
+                          <a:ea typeface="Noto Sans CJK SC"/>
+                          <a:cs typeface="Segoe UI"/>
+                        </a:rPr>
+                        <a:t>算</a:t>
+                      </a:r>
+                      <a:r>
+                        <a:rPr lang="zh-CN" sz="1755" dirty="0">
+                          <a:solidFill>
+                            <a:srgbClr val="1A1A18"/>
+                          </a:solidFill>
+                          <a:latin typeface="Segoe UI"/>
+                          <a:ea typeface="Noto Sans CJK SC"/>
+                          <a:cs typeface="Segoe UI"/>
+                        </a:rPr>
+                        <a:t>出地址</a:t>
+                      </a:r>
+                    </a:p>
+                  </a:txBody>
+                  <a:tcPr marL="45720" marR="45720" marT="27432" marB="27432" anchor="ctr">
+                    <a:lnL w="9525">
+                      <a:solidFill>
+                        <a:srgbClr val="DCDCD6"/>
+                      </a:solidFill>
+                    </a:lnL>
+                    <a:lnR w="9525">
+                      <a:solidFill>
+                        <a:srgbClr val="DCDCD6"/>
+                      </a:solidFill>
+                    </a:lnR>
+                    <a:lnT w="9525">
+                      <a:solidFill>
+                        <a:srgbClr val="DCDCD6"/>
+                      </a:solidFill>
+                    </a:lnT>
+                    <a:lnB w="9525">
+                      <a:solidFill>
+                        <a:srgbClr val="DCDCD6"/>
+                      </a:solidFill>
+                    </a:lnB>
+                    <a:solidFill>
+                      <a:srgbClr val="FFFFFF"/>
+                    </a:solidFill>
+                  </a:tcPr>
+                </a:tc>
+                <a:tc>
+                  <a:txBody>
+                    <a:bodyPr/>
+                    <a:lstStyle/>
+                    <a:p>
+                      <a:pPr marL="0" indent="0" lvl="0">
+                        <a:lnSpc>
+                          <a:spcPct val="100000"/>
+                        </a:lnSpc>
+                        <a:buNone/>
+                      </a:pPr>
+                      <a:r>
+                        <a:rPr lang="zh-CN" sz="1755" dirty="0">
+                          <a:solidFill>
+                            <a:srgbClr val="1A1A18"/>
+                          </a:solidFill>
+                          <a:latin typeface="Segoe UI"/>
+                          <a:ea typeface="Noto Sans CJK SC"/>
+                          <a:cs typeface="Segoe UI"/>
+                        </a:rPr>
+                        <a:t>期望 O(1)；不保序，会冲突</a:t>
+                      </a:r>
+                    </a:p>
+                  </a:txBody>
+                  <a:tcPr marL="45720" marR="45720" marT="27432" marB="27432" anchor="ctr">
+                    <a:lnL w="9525">
+                      <a:solidFill>
+                        <a:srgbClr val="DCDCD6"/>
+                      </a:solidFill>
+                    </a:lnL>
+                    <a:lnR w="9525">
+                      <a:solidFill>
+                        <a:srgbClr val="DCDCD6"/>
+                      </a:solidFill>
+                    </a:lnR>
+                    <a:lnT w="9525">
+                      <a:solidFill>
+                        <a:srgbClr val="DCDCD6"/>
+                      </a:solidFill>
+                    </a:lnT>
+                    <a:lnB w="9525">
+                      <a:solidFill>
+                        <a:srgbClr val="DCDCD6"/>
+                      </a:solidFill>
+                    </a:lnB>
+                    <a:solidFill>
+                      <a:srgbClr val="FFFFFF"/>
+                    </a:solidFill>
+                  </a:tcPr>
+                </a:tc>
+              </a:tr>
+            </a:tbl>
+          </a:graphicData>
+        </a:graphic>
+      </p:graphicFrame>
+      <p:sp>
+        <p:nvSpPr>
+          <p:cNvPr id="5" name="页脚"/>
           <p:cNvSpPr txBox="1"/>
           <p:nvPr/>
         </p:nvSpPr>
         <p:spPr>
           <a:xfrm>
-            <a:off x="566928" y="1915338"/>
-            <a:ext cx="11058144" cy="3165043"/>
-          </a:xfrm>
-          <a:prstGeom prst="roundRect">
-            <a:avLst>
-              <a:gd name="adj" fmla="val 6000"/>
-            </a:avLst>
-          </a:prstGeom>
-          <a:solidFill>
-            <a:srgbClr val="F5F4F0"/>
-          </a:solidFill>
-          <a:ln w="9525">
-            <a:solidFill>
-              <a:srgbClr val="DCDCD6"/>
-            </a:solidFill>
-          </a:ln>
-        </p:spPr>
-        <p:txBody>
-          <a:bodyPr wrap="square" lIns="100584" tIns="100584" rIns="100584" bIns="100584">
-            <a:noAutofit/>
-          </a:bodyPr>
-          <a:lstStyle/>
-          <a:p>
-            <a:pPr marL="0" indent="0" lvl="0">
-              <a:lnSpc>
-                <a:spcPct val="104000"/>
-              </a:lnSpc>
-              <a:buNone/>
-            </a:pPr>
-            <a:r>
-              <a:rPr lang="zh-CN" sz="1560" dirty="0">
-                <a:solidFill>
-                  <a:srgbClr val="1A1A18"/>
-                </a:solidFill>
-                <a:latin typeface="Noto Sans Mono CJK SC"/>
-                <a:ea typeface="Noto Sans Mono CJK SC"/>
-                <a:cs typeface="Noto Sans Mono CJK SC"/>
-              </a:rPr>
-              <a:t>存储区的数据 -- 物理无序, 而且每块长度不等</a:t>
-            </a:r>
-          </a:p>
-          <a:p>
-            <a:pPr marL="0" indent="0" lvl="0">
-              <a:lnSpc>
-                <a:spcPct val="104000"/>
-              </a:lnSpc>
-              <a:buNone/>
-            </a:pPr>
-            <a:r>
-              <a:rPr lang="zh-CN" sz="1560" dirty="0">
-                <a:solidFill>
-                  <a:srgbClr val="1A1A18"/>
-                </a:solidFill>
-                <a:latin typeface="Noto Sans Mono CJK SC"/>
-                <a:ea typeface="Noto Sans Mono CJK SC"/>
-                <a:cs typeface="Noto Sans Mono CJK SC"/>
-              </a:rPr>
-              <a:t>+----------------+----------+------------+--------------+--------+</a:t>
-            </a:r>
-          </a:p>
-          <a:p>
-            <a:pPr marL="0" indent="0" lvl="0">
-              <a:lnSpc>
-                <a:spcPct val="104000"/>
-              </a:lnSpc>
-              <a:buNone/>
-            </a:pPr>
-            <a:r>
-              <a:rPr lang="zh-CN" sz="1560" dirty="0">
-                <a:solidFill>
-                  <a:srgbClr val="1A1A18"/>
-                </a:solidFill>
-                <a:latin typeface="Noto Sans Mono CJK SC"/>
-                <a:ea typeface="Noto Sans Mono CJK SC"/>
-                <a:cs typeface="Noto Sans Mono CJK SC"/>
-              </a:rPr>
-              <a:t>| [1] 73         | [2] 52   | [3] 42     | [4] 98       | [5] 37 |</a:t>
-            </a:r>
-          </a:p>
-          <a:p>
-            <a:pPr marL="0" indent="0" lvl="0">
-              <a:lnSpc>
-                <a:spcPct val="104000"/>
-              </a:lnSpc>
-              <a:buNone/>
-            </a:pPr>
-            <a:r>
-              <a:rPr lang="zh-CN" sz="1560" dirty="0">
-                <a:solidFill>
-                  <a:srgbClr val="1A1A18"/>
-                </a:solidFill>
-                <a:latin typeface="Noto Sans Mono CJK SC"/>
-                <a:ea typeface="Noto Sans Mono CJK SC"/>
-                <a:cs typeface="Noto Sans Mono CJK SC"/>
-              </a:rPr>
-              <a:t>+----------------+----------+------------+--------------+--------+</a:t>
-            </a:r>
-          </a:p>
-          <a:p>
-            <a:pPr marL="0" indent="0" lvl="0">
-              <a:lnSpc>
-                <a:spcPct val="104000"/>
-              </a:lnSpc>
-              <a:buNone/>
-            </a:pPr>
-            <a:r>
-              <a:rPr lang="zh-CN" sz="1560" dirty="0">
-                <a:solidFill>
-                  <a:srgbClr val="1A1A18"/>
-                </a:solidFill>
-                <a:latin typeface="Noto Sans Mono CJK SC"/>
-                <a:ea typeface="Noto Sans Mono CJK SC"/>
-                <a:cs typeface="Noto Sans Mono CJK SC"/>
-              </a:rPr>
-              <a:t> </a:t>
-            </a:r>
-          </a:p>
-          <a:p>
-            <a:pPr marL="0" indent="0" lvl="0">
-              <a:lnSpc>
-                <a:spcPct val="104000"/>
-              </a:lnSpc>
-              <a:buNone/>
-            </a:pPr>
-            <a:r>
-              <a:rPr lang="zh-CN" sz="1560" dirty="0">
-                <a:solidFill>
-                  <a:srgbClr val="1A1A18"/>
-                </a:solidFill>
-                <a:latin typeface="Noto Sans Mono CJK SC"/>
-                <a:ea typeface="Noto Sans Mono CJK SC"/>
-                <a:cs typeface="Noto Sans Mono CJK SC"/>
-              </a:rPr>
-              <a:t>线性索引 -- 附加在数据之外的一张小表</a:t>
-            </a:r>
-          </a:p>
-          <a:p>
-            <a:pPr marL="0" indent="0" lvl="0">
-              <a:lnSpc>
-                <a:spcPct val="104000"/>
-              </a:lnSpc>
-              <a:buNone/>
-            </a:pPr>
-            <a:r>
-              <a:rPr lang="zh-CN" sz="1560" dirty="0">
-                <a:solidFill>
-                  <a:srgbClr val="1A1A18"/>
-                </a:solidFill>
-                <a:latin typeface="Noto Sans Mono CJK SC"/>
-                <a:ea typeface="Noto Sans Mono CJK SC"/>
-                <a:cs typeface="Noto Sans Mono CJK SC"/>
-              </a:rPr>
-              <a:t>+------+------+------+------+------+</a:t>
-            </a:r>
-          </a:p>
-          <a:p>
-            <a:pPr marL="0" indent="0" lvl="0">
-              <a:lnSpc>
-                <a:spcPct val="104000"/>
-              </a:lnSpc>
-              <a:buNone/>
-            </a:pPr>
-            <a:r>
-              <a:rPr lang="zh-CN" sz="1560" dirty="0">
-                <a:solidFill>
-                  <a:srgbClr val="1A1A18"/>
-                </a:solidFill>
-                <a:latin typeface="Noto Sans Mono CJK SC"/>
-                <a:ea typeface="Noto Sans Mono CJK SC"/>
-                <a:cs typeface="Noto Sans Mono CJK SC"/>
-              </a:rPr>
-              <a:t>|  37  |  42  |  52  |  73  |  98  |   关键码: 升序</a:t>
-            </a:r>
-          </a:p>
-          <a:p>
-            <a:pPr marL="0" indent="0" lvl="0">
-              <a:lnSpc>
-                <a:spcPct val="104000"/>
-              </a:lnSpc>
-              <a:buNone/>
-            </a:pPr>
-            <a:r>
-              <a:rPr lang="zh-CN" sz="1560" dirty="0">
-                <a:solidFill>
-                  <a:srgbClr val="1A1A18"/>
-                </a:solidFill>
-                <a:latin typeface="Noto Sans Mono CJK SC"/>
-                <a:ea typeface="Noto Sans Mono CJK SC"/>
-                <a:cs typeface="Noto Sans Mono CJK SC"/>
-              </a:rPr>
-              <a:t>+------+------+------+------+------+</a:t>
-            </a:r>
-          </a:p>
-          <a:p>
-            <a:pPr marL="0" indent="0" lvl="0">
-              <a:lnSpc>
-                <a:spcPct val="104000"/>
-              </a:lnSpc>
-              <a:buNone/>
-            </a:pPr>
-            <a:r>
-              <a:rPr lang="zh-CN" sz="1560" dirty="0">
-                <a:solidFill>
-                  <a:srgbClr val="1A1A18"/>
-                </a:solidFill>
-                <a:latin typeface="Noto Sans Mono CJK SC"/>
-                <a:ea typeface="Noto Sans Mono CJK SC"/>
-                <a:cs typeface="Noto Sans Mono CJK SC"/>
-              </a:rPr>
-              <a:t>| [5]  | [3]  | [2]  | [1]  | [4]  |   指向第几块: 乱序</a:t>
-            </a:r>
-          </a:p>
-          <a:p>
-            <a:pPr marL="0" indent="0" lvl="0">
-              <a:lnSpc>
-                <a:spcPct val="104000"/>
-              </a:lnSpc>
-              <a:buNone/>
-            </a:pPr>
-            <a:r>
-              <a:rPr lang="zh-CN" sz="1560" dirty="0">
-                <a:solidFill>
-                  <a:srgbClr val="1A1A18"/>
-                </a:solidFill>
-                <a:latin typeface="Noto Sans Mono CJK SC"/>
-                <a:ea typeface="Noto Sans Mono CJK SC"/>
-                <a:cs typeface="Noto Sans Mono CJK SC"/>
-              </a:rPr>
-              <a:t>+------+------+------+------+------+</a:t>
-            </a:r>
-          </a:p>
-        </p:txBody>
-      </p:sp>
-      <p:sp>
-        <p:nvSpPr>
-          <p:cNvPr id="5" name="正文"/>
-          <p:cNvSpPr txBox="1"/>
-          <p:nvPr/>
-        </p:nvSpPr>
-        <p:spPr>
-          <a:xfrm>
-            <a:off x="566928" y="5146421"/>
-            <a:ext cx="11058144" cy="398221"/>
+            <a:off x="566928" y="6419088"/>
+            <a:ext cx="7740700" cy="274320"/>
           </a:xfrm>
           <a:prstGeom prst="rect">
             <a:avLst/>
@@ -2069,40 +2682,29 @@
               <a:buNone/>
             </a:pPr>
             <a:r>
-              <a:rPr lang="zh-CN" sz="2340" dirty="0" b="1">
-                <a:solidFill>
-                  <a:srgbClr val="8A4B2A"/>
-                </a:solidFill>
-                <a:latin typeface="Segoe UI"/>
-                <a:ea typeface="Noto Sans CJK SC"/>
-                <a:cs typeface="Segoe UI"/>
-              </a:rPr>
-              <a:t>这两行的错位就是索引的全部意义</a:t>
-            </a:r>
-            <a:r>
-              <a:rPr lang="zh-CN" sz="2340" dirty="0">
-                <a:solidFill>
-                  <a:srgbClr val="1A1A18"/>
-                </a:solidFill>
-                <a:latin typeface="Segoe UI"/>
-                <a:ea typeface="Noto Sans CJK SC"/>
-                <a:cs typeface="Segoe UI"/>
-              </a:rPr>
-              <a:t>：上面能二分，下面一块没搬过。</a:t>
-            </a:r>
-          </a:p>
-        </p:txBody>
-      </p:sp>
-      <p:sp>
-        <p:nvSpPr>
-          <p:cNvPr id="6" name="页脚"/>
+              <a:rPr lang="zh-CN" sz="1000" dirty="0">
+                <a:solidFill>
+                  <a:srgbClr val="6B6B66"/>
+                </a:solidFill>
+                <a:latin typeface="Segoe UI"/>
+                <a:ea typeface="Noto Sans CJK SC"/>
+                <a:cs typeface="Segoe UI"/>
+              </a:rPr>
+              <a:t>第1章 概论</a:t>
+            </a:r>
+          </a:p>
+        </p:txBody>
+      </p:sp>
+      <p:sp>
+        <p:nvSpPr>
+          <p:cNvPr id="6" name="页码"/>
           <p:cNvSpPr txBox="1"/>
           <p:nvPr/>
         </p:nvSpPr>
         <p:spPr>
           <a:xfrm>
-            <a:off x="566928" y="6419088"/>
-            <a:ext cx="7740700" cy="274320"/>
+            <a:off x="8307628" y="6419088"/>
+            <a:ext cx="3317443" cy="274320"/>
           </a:xfrm>
           <a:prstGeom prst="rect">
             <a:avLst/>
@@ -2115,7 +2717,7 @@
           </a:bodyPr>
           <a:lstStyle/>
           <a:p>
-            <a:pPr marL="0" indent="0" lvl="0">
+            <a:pPr marL="0" indent="0" lvl="0" algn="r">
               <a:lnSpc>
                 <a:spcPct val="100000"/>
               </a:lnSpc>
@@ -2130,49 +2732,7 @@
                 <a:ea typeface="Noto Sans CJK SC"/>
                 <a:cs typeface="Segoe UI"/>
               </a:rPr>
-              <a:t>第1章 概论</a:t>
-            </a:r>
-          </a:p>
-        </p:txBody>
-      </p:sp>
-      <p:sp>
-        <p:nvSpPr>
-          <p:cNvPr id="7" name="页码"/>
-          <p:cNvSpPr txBox="1"/>
-          <p:nvPr/>
-        </p:nvSpPr>
-        <p:spPr>
-          <a:xfrm>
-            <a:off x="8307628" y="6419088"/>
-            <a:ext cx="3317443" cy="274320"/>
-          </a:xfrm>
-          <a:prstGeom prst="rect">
-            <a:avLst/>
-          </a:prstGeom>
-          <a:noFill/>
-        </p:spPr>
-        <p:txBody>
-          <a:bodyPr wrap="square" lIns="0" tIns="0" rIns="0" bIns="0">
-            <a:noAutofit/>
-          </a:bodyPr>
-          <a:lstStyle/>
-          <a:p>
-            <a:pPr marL="0" indent="0" lvl="0" algn="r">
-              <a:lnSpc>
-                <a:spcPct val="100000"/>
-              </a:lnSpc>
-              <a:buNone/>
-            </a:pPr>
-            <a:r>
-              <a:rPr lang="zh-CN" sz="1000" dirty="0">
-                <a:solidFill>
-                  <a:srgbClr val="6B6B66"/>
-                </a:solidFill>
-                <a:latin typeface="Segoe UI"/>
-                <a:ea typeface="Noto Sans CJK SC"/>
-                <a:cs typeface="Segoe UI"/>
-              </a:rPr>
-              <a:t>10 / 28</a:t>
+              <a:t>10 / 29</a:t>
             </a:r>
           </a:p>
         </p:txBody>
@@ -2236,7 +2796,7 @@
                 <a:ea typeface="Noto Sans CJK SC"/>
                 <a:cs typeface="Segoe UI"/>
               </a:rPr>
-              <a:t>1.2.3 抽象数据类型</a:t>
+              <a:t>索引：逻辑有序，物理无序</a:t>
             </a:r>
           </a:p>
         </p:txBody>
@@ -2270,67 +2830,14 @@
       </p:sp>
       <p:sp>
         <p:nvSpPr>
-          <p:cNvPr id="4" name="正文"/>
+          <p:cNvPr id="4" name="代码"/>
           <p:cNvSpPr txBox="1"/>
           <p:nvPr/>
         </p:nvSpPr>
         <p:spPr>
           <a:xfrm>
-            <a:off x="566928" y="1946148"/>
-            <a:ext cx="11058144" cy="398221"/>
-          </a:xfrm>
-          <a:prstGeom prst="rect">
-            <a:avLst/>
-          </a:prstGeom>
-          <a:noFill/>
-        </p:spPr>
-        <p:txBody>
-          <a:bodyPr wrap="square" lIns="0" tIns="0" rIns="0" bIns="0">
-            <a:noAutofit/>
-          </a:bodyPr>
-          <a:lstStyle/>
-          <a:p>
-            <a:pPr marL="0" indent="0" lvl="0">
-              <a:lnSpc>
-                <a:spcPct val="100000"/>
-              </a:lnSpc>
-              <a:buNone/>
-            </a:pPr>
-            <a:r>
-              <a:rPr lang="zh-CN" sz="2340" dirty="0" b="1">
-                <a:solidFill>
-                  <a:srgbClr val="8A4B2A"/>
-                </a:solidFill>
-                <a:latin typeface="Segoe UI"/>
-                <a:ea typeface="Noto Sans CJK SC"/>
-                <a:cs typeface="Segoe UI"/>
-              </a:rPr>
-              <a:t>ADT = 一组运算 + 它们的约定</a:t>
-            </a:r>
-            <a:r>
-              <a:rPr lang="zh-CN" sz="2340" dirty="0">
-                <a:solidFill>
-                  <a:srgbClr val="1A1A18"/>
-                </a:solidFill>
-                <a:latin typeface="Segoe UI"/>
-                <a:ea typeface="Noto Sans CJK SC"/>
-                <a:cs typeface="Segoe UI"/>
-              </a:rPr>
-              <a:t>，不是一个类，更不是一个基类。</a:t>
-            </a:r>
-          </a:p>
-        </p:txBody>
-      </p:sp>
-      <p:sp>
-        <p:nvSpPr>
-          <p:cNvPr id="5" name="代码"/>
-          <p:cNvSpPr txBox="1"/>
-          <p:nvPr/>
-        </p:nvSpPr>
-        <p:spPr>
-          <a:xfrm>
-            <a:off x="566928" y="2476449"/>
-            <a:ext cx="11058144" cy="1548384"/>
+            <a:off x="566928" y="1915338"/>
+            <a:ext cx="11058144" cy="3165043"/>
           </a:xfrm>
           <a:prstGeom prst="roundRect">
             <a:avLst>
@@ -2367,7 +2874,7 @@
                 <a:ea typeface="Noto Sans Mono CJK SC"/>
                 <a:cs typeface="Noto Sans Mono CJK SC"/>
               </a:rPr>
-              <a:t>ADT 名字 {</a:t>
+              <a:t>存储区的数据 -- 物理无序, 而且每块长度不等</a:t>
             </a:r>
           </a:p>
           <a:p>
@@ -2386,7 +2893,7 @@
                 <a:ea typeface="Noto Sans Mono CJK SC"/>
                 <a:cs typeface="Noto Sans Mono CJK SC"/>
               </a:rPr>
-              <a:t>    数据对象 D: 结点是什么</a:t>
+              <a:t>+----------------+----------+------------+--------------+--------+</a:t>
             </a:r>
           </a:p>
           <a:p>
@@ -2405,7 +2912,7 @@
                 <a:ea typeface="Noto Sans Mono CJK SC"/>
                 <a:cs typeface="Noto Sans Mono CJK SC"/>
               </a:rPr>
-              <a:t>    数据关系 R: 结点之间有什么关系</a:t>
+              <a:t>| [1] 73         | [2] 52   | [3] 42     | [4] 98       | [5] 37 |</a:t>
             </a:r>
           </a:p>
           <a:p>
@@ -2424,7 +2931,7 @@
                 <a:ea typeface="Noto Sans Mono CJK SC"/>
                 <a:cs typeface="Noto Sans Mono CJK SC"/>
               </a:rPr>
-              <a:t>    基本操作 P: 对外提供哪些运算</a:t>
+              <a:t>+----------------+----------+------------+--------------+--------+</a:t>
             </a:r>
           </a:p>
           <a:p>
@@ -2443,21 +2950,135 @@
                 <a:ea typeface="Noto Sans Mono CJK SC"/>
                 <a:cs typeface="Noto Sans Mono CJK SC"/>
               </a:rPr>
-              <a:t>}</a:t>
-            </a:r>
-          </a:p>
-        </p:txBody>
-      </p:sp>
-      <p:sp>
-        <p:nvSpPr>
-          <p:cNvPr id="6" name="正文"/>
+              <a:t> </a:t>
+            </a:r>
+          </a:p>
+          <a:p>
+            <a:pPr marL="0" indent="0" lvl="0">
+              <a:lnSpc>
+                <a:spcPct val="104000"/>
+              </a:lnSpc>
+              <a:buNone/>
+            </a:pPr>
+            <a:r>
+              <a:rPr lang="zh-CN" sz="1560" dirty="0">
+                <a:solidFill>
+                  <a:srgbClr val="1A1A18"/>
+                </a:solidFill>
+                <a:latin typeface="Noto Sans Mono CJK SC"/>
+                <a:ea typeface="Noto Sans Mono CJK SC"/>
+                <a:cs typeface="Noto Sans Mono CJK SC"/>
+              </a:rPr>
+              <a:t>线性索引 -- 附加在数据之外的一张小表</a:t>
+            </a:r>
+          </a:p>
+          <a:p>
+            <a:pPr marL="0" indent="0" lvl="0">
+              <a:lnSpc>
+                <a:spcPct val="104000"/>
+              </a:lnSpc>
+              <a:buNone/>
+            </a:pPr>
+            <a:r>
+              <a:rPr lang="zh-CN" sz="1560" dirty="0">
+                <a:solidFill>
+                  <a:srgbClr val="1A1A18"/>
+                </a:solidFill>
+                <a:latin typeface="Noto Sans Mono CJK SC"/>
+                <a:ea typeface="Noto Sans Mono CJK SC"/>
+                <a:cs typeface="Noto Sans Mono CJK SC"/>
+              </a:rPr>
+              <a:t>+------+------+------+------+------+</a:t>
+            </a:r>
+          </a:p>
+          <a:p>
+            <a:pPr marL="0" indent="0" lvl="0">
+              <a:lnSpc>
+                <a:spcPct val="104000"/>
+              </a:lnSpc>
+              <a:buNone/>
+            </a:pPr>
+            <a:r>
+              <a:rPr lang="zh-CN" sz="1560" dirty="0">
+                <a:solidFill>
+                  <a:srgbClr val="1A1A18"/>
+                </a:solidFill>
+                <a:latin typeface="Noto Sans Mono CJK SC"/>
+                <a:ea typeface="Noto Sans Mono CJK SC"/>
+                <a:cs typeface="Noto Sans Mono CJK SC"/>
+              </a:rPr>
+              <a:t>|  37  |  42  |  52  |  73  |  98  |   关键码: 升序</a:t>
+            </a:r>
+          </a:p>
+          <a:p>
+            <a:pPr marL="0" indent="0" lvl="0">
+              <a:lnSpc>
+                <a:spcPct val="104000"/>
+              </a:lnSpc>
+              <a:buNone/>
+            </a:pPr>
+            <a:r>
+              <a:rPr lang="zh-CN" sz="1560" dirty="0">
+                <a:solidFill>
+                  <a:srgbClr val="1A1A18"/>
+                </a:solidFill>
+                <a:latin typeface="Noto Sans Mono CJK SC"/>
+                <a:ea typeface="Noto Sans Mono CJK SC"/>
+                <a:cs typeface="Noto Sans Mono CJK SC"/>
+              </a:rPr>
+              <a:t>+------+------+------+------+------+</a:t>
+            </a:r>
+          </a:p>
+          <a:p>
+            <a:pPr marL="0" indent="0" lvl="0">
+              <a:lnSpc>
+                <a:spcPct val="104000"/>
+              </a:lnSpc>
+              <a:buNone/>
+            </a:pPr>
+            <a:r>
+              <a:rPr lang="zh-CN" sz="1560" dirty="0">
+                <a:solidFill>
+                  <a:srgbClr val="1A1A18"/>
+                </a:solidFill>
+                <a:latin typeface="Noto Sans Mono CJK SC"/>
+                <a:ea typeface="Noto Sans Mono CJK SC"/>
+                <a:cs typeface="Noto Sans Mono CJK SC"/>
+              </a:rPr>
+              <a:t>| [5]  | [3]  | [2]  | [1]  | [4]  |   指向第几块: 乱序</a:t>
+            </a:r>
+          </a:p>
+          <a:p>
+            <a:pPr marL="0" indent="0" lvl="0">
+              <a:lnSpc>
+                <a:spcPct val="104000"/>
+              </a:lnSpc>
+              <a:buNone/>
+            </a:pPr>
+            <a:r>
+              <a:rPr lang="zh-CN" sz="1560" dirty="0">
+                <a:solidFill>
+                  <a:srgbClr val="1A1A18"/>
+                </a:solidFill>
+                <a:latin typeface="Noto Sans Mono CJK SC"/>
+                <a:ea typeface="Noto Sans Mono CJK SC"/>
+                <a:cs typeface="Noto Sans Mono CJK SC"/>
+              </a:rPr>
+              <a:t>+------+------+------+------+------+</a:t>
+            </a:r>
+          </a:p>
+        </p:txBody>
+      </p:sp>
+      <p:sp>
+        <p:nvSpPr>
+          <p:cNvPr id="5" name="正文"/>
           <p:cNvSpPr txBox="1"/>
           <p:nvPr/>
         </p:nvSpPr>
         <p:spPr>
           <a:xfrm>
-            <a:off x="566928" y="4090873"/>
-            <a:ext cx="11058144" cy="796442"/>
+            <a:off x="566928" y="5146421"/>
+            <a:ext cx="11058144" cy="398221"/>
           </a:xfrm>
           <a:prstGeom prst="rect">
             <a:avLst/>
@@ -2477,6 +3098,17 @@
               <a:buNone/>
             </a:pPr>
             <a:r>
+              <a:rPr lang="zh-CN" sz="2340" dirty="0" b="1">
+                <a:solidFill>
+                  <a:srgbClr val="8A4B2A"/>
+                </a:solidFill>
+                <a:latin typeface="Segoe UI"/>
+                <a:ea typeface="Noto Sans CJK SC"/>
+                <a:cs typeface="Segoe UI"/>
+              </a:rPr>
+              <a:t>这两行的错位就是索引的全部意义</a:t>
+            </a:r>
+            <a:r>
               <a:rPr lang="zh-CN" sz="2340" dirty="0">
                 <a:solidFill>
                   <a:srgbClr val="1A1A18"/>
@@ -2485,36 +3117,14 @@
                 <a:ea typeface="Noto Sans CJK SC"/>
                 <a:cs typeface="Segoe UI"/>
               </a:rPr>
-              <a:t>用它的人只能通过这些运算访问数据，</a:t>
-            </a:r>
-            <a:r>
-              <a:rPr lang="zh-CN" sz="2340" dirty="0" b="1">
-                <a:solidFill>
-                  <a:srgbClr val="8A4B2A"/>
-                </a:solidFill>
-                <a:latin typeface="Segoe UI"/>
-                <a:ea typeface="Noto Sans CJK SC"/>
-                <a:cs typeface="Segoe UI"/>
-              </a:rPr>
-              <a:t>不能去翻内部表示</a:t>
-            </a:r>
-            <a:r>
-              <a:rPr lang="zh-CN" sz="2340" dirty="0">
-                <a:solidFill>
-                  <a:srgbClr val="1A1A18"/>
-                </a:solidFill>
-                <a:latin typeface="Segoe UI"/>
-                <a:ea typeface="Noto Sans CJK SC"/>
-                <a:cs typeface="Segoe UI"/>
-              </a:rPr>
-              <a:t>—— 所以换实现不用改调用方。</a:t>
-            </a:r>
-          </a:p>
-        </p:txBody>
-      </p:sp>
-      <p:sp>
-        <p:nvSpPr>
-          <p:cNvPr id="7" name="页脚"/>
+              <a:t>：上面能二分，下面一块没搬过。</a:t>
+            </a:r>
+          </a:p>
+        </p:txBody>
+      </p:sp>
+      <p:sp>
+        <p:nvSpPr>
+          <p:cNvPr id="6" name="页脚"/>
           <p:cNvSpPr txBox="1"/>
           <p:nvPr/>
         </p:nvSpPr>
@@ -2556,7 +3166,7 @@
       </p:sp>
       <p:sp>
         <p:nvSpPr>
-          <p:cNvPr id="8" name="页码"/>
+          <p:cNvPr id="7" name="页码"/>
           <p:cNvSpPr txBox="1"/>
           <p:nvPr/>
         </p:nvSpPr>
@@ -2591,7 +3201,7 @@
                 <a:ea typeface="Noto Sans CJK SC"/>
                 <a:cs typeface="Segoe UI"/>
               </a:rPr>
-              <a:t>11 / 28</a:t>
+              <a:t>11 / 29</a:t>
             </a:r>
           </a:p>
         </p:txBody>
@@ -2602,6 +3212,425 @@
 </file>
 
 <file path=ppt/slides/slide12.xml><?xml version="1.0" encoding="utf-8"?>
+<p:sld xmlns:a="http://schemas.openxmlformats.org/drawingml/2006/main" xmlns:r="http://schemas.openxmlformats.org/officeDocument/2006/relationships" xmlns:p="http://schemas.openxmlformats.org/presentationml/2006/main">
+  <p:cSld>
+    <p:spTree>
+      <p:nvGrpSpPr>
+        <p:cNvPr id="1" name=""/>
+        <p:cNvGrpSpPr/>
+        <p:nvPr/>
+      </p:nvGrpSpPr>
+      <p:grpSpPr>
+        <a:xfrm>
+          <a:off x="0" y="0"/>
+          <a:ext cx="0" cy="0"/>
+          <a:chOff x="0" y="0"/>
+          <a:chExt cx="0" cy="0"/>
+        </a:xfrm>
+      </p:grpSpPr>
+      <p:sp>
+        <p:nvSpPr>
+          <p:cNvPr id="2" name="标题"/>
+          <p:cNvSpPr txBox="1"/>
+          <p:nvPr/>
+        </p:nvSpPr>
+        <p:spPr>
+          <a:xfrm>
+            <a:off x="566928" y="384048"/>
+            <a:ext cx="11058144" cy="487680"/>
+          </a:xfrm>
+          <a:prstGeom prst="rect">
+            <a:avLst/>
+          </a:prstGeom>
+          <a:noFill/>
+        </p:spPr>
+        <p:txBody>
+          <a:bodyPr wrap="square" lIns="0" tIns="0" rIns="0" bIns="0">
+            <a:noAutofit/>
+          </a:bodyPr>
+          <a:lstStyle/>
+          <a:p>
+            <a:pPr marL="0" indent="0" lvl="0">
+              <a:lnSpc>
+                <a:spcPct val="100000"/>
+              </a:lnSpc>
+              <a:buNone/>
+            </a:pPr>
+            <a:r>
+              <a:rPr lang="zh-CN" sz="3200" dirty="0" b="1">
+                <a:solidFill>
+                  <a:srgbClr val="1A1A18"/>
+                </a:solidFill>
+                <a:latin typeface="Segoe UI"/>
+                <a:ea typeface="Noto Sans CJK SC"/>
+                <a:cs typeface="Segoe UI"/>
+              </a:rPr>
+              <a:t>1.2.3 抽象数据类型</a:t>
+            </a:r>
+          </a:p>
+        </p:txBody>
+      </p:sp>
+      <p:sp>
+        <p:nvSpPr>
+          <p:cNvPr id="3" name="标题线"/>
+          <p:cNvSpPr/>
+          <p:nvPr/>
+        </p:nvSpPr>
+        <p:spPr>
+          <a:xfrm>
+            <a:off x="566928" y="935736"/>
+            <a:ext cx="11058144" cy="32004"/>
+          </a:xfrm>
+          <a:prstGeom prst="rect">
+            <a:avLst/>
+          </a:prstGeom>
+          <a:solidFill>
+            <a:srgbClr val="8A4B2A"/>
+          </a:solidFill>
+          <a:ln>
+            <a:noFill/>
+          </a:ln>
+        </p:spPr>
+        <p:txBody>
+          <a:bodyPr/>
+          <a:lstStyle/>
+          <a:p/>
+        </p:txBody>
+      </p:sp>
+      <p:sp>
+        <p:nvSpPr>
+          <p:cNvPr id="4" name="正文"/>
+          <p:cNvSpPr txBox="1"/>
+          <p:nvPr/>
+        </p:nvSpPr>
+        <p:spPr>
+          <a:xfrm>
+            <a:off x="566928" y="1946148"/>
+            <a:ext cx="11058144" cy="398221"/>
+          </a:xfrm>
+          <a:prstGeom prst="rect">
+            <a:avLst/>
+          </a:prstGeom>
+          <a:noFill/>
+        </p:spPr>
+        <p:txBody>
+          <a:bodyPr wrap="square" lIns="0" tIns="0" rIns="0" bIns="0">
+            <a:noAutofit/>
+          </a:bodyPr>
+          <a:lstStyle/>
+          <a:p>
+            <a:pPr marL="0" indent="0" lvl="0">
+              <a:lnSpc>
+                <a:spcPct val="100000"/>
+              </a:lnSpc>
+              <a:buNone/>
+            </a:pPr>
+            <a:r>
+              <a:rPr lang="zh-CN" sz="2340" dirty="0" b="1">
+                <a:solidFill>
+                  <a:srgbClr val="8A4B2A"/>
+                </a:solidFill>
+                <a:latin typeface="Segoe UI"/>
+                <a:ea typeface="Noto Sans CJK SC"/>
+                <a:cs typeface="Segoe UI"/>
+              </a:rPr>
+              <a:t>ADT = 一组运算 + 它们的约定</a:t>
+            </a:r>
+            <a:r>
+              <a:rPr lang="zh-CN" sz="2340" dirty="0">
+                <a:solidFill>
+                  <a:srgbClr val="1A1A18"/>
+                </a:solidFill>
+                <a:latin typeface="Segoe UI"/>
+                <a:ea typeface="Noto Sans CJK SC"/>
+                <a:cs typeface="Segoe UI"/>
+              </a:rPr>
+              <a:t>，不是一个类，更不是一个基类。</a:t>
+            </a:r>
+          </a:p>
+        </p:txBody>
+      </p:sp>
+      <p:sp>
+        <p:nvSpPr>
+          <p:cNvPr id="5" name="代码"/>
+          <p:cNvSpPr txBox="1"/>
+          <p:nvPr/>
+        </p:nvSpPr>
+        <p:spPr>
+          <a:xfrm>
+            <a:off x="566928" y="2476449"/>
+            <a:ext cx="11058144" cy="1548384"/>
+          </a:xfrm>
+          <a:prstGeom prst="roundRect">
+            <a:avLst>
+              <a:gd name="adj" fmla="val 6000"/>
+            </a:avLst>
+          </a:prstGeom>
+          <a:solidFill>
+            <a:srgbClr val="F5F4F0"/>
+          </a:solidFill>
+          <a:ln w="9525">
+            <a:solidFill>
+              <a:srgbClr val="DCDCD6"/>
+            </a:solidFill>
+          </a:ln>
+        </p:spPr>
+        <p:txBody>
+          <a:bodyPr wrap="square" lIns="100584" tIns="100584" rIns="100584" bIns="100584">
+            <a:noAutofit/>
+          </a:bodyPr>
+          <a:lstStyle/>
+          <a:p>
+            <a:pPr marL="0" indent="0" lvl="0">
+              <a:lnSpc>
+                <a:spcPct val="104000"/>
+              </a:lnSpc>
+              <a:buNone/>
+            </a:pPr>
+            <a:r>
+              <a:rPr lang="zh-CN" sz="1560" dirty="0">
+                <a:solidFill>
+                  <a:srgbClr val="1A1A18"/>
+                </a:solidFill>
+                <a:latin typeface="Noto Sans Mono CJK SC"/>
+                <a:ea typeface="Noto Sans Mono CJK SC"/>
+                <a:cs typeface="Noto Sans Mono CJK SC"/>
+              </a:rPr>
+              <a:t>ADT 名字 {</a:t>
+            </a:r>
+          </a:p>
+          <a:p>
+            <a:pPr marL="0" indent="0" lvl="0">
+              <a:lnSpc>
+                <a:spcPct val="104000"/>
+              </a:lnSpc>
+              <a:buNone/>
+            </a:pPr>
+            <a:r>
+              <a:rPr lang="zh-CN" sz="1560" dirty="0">
+                <a:solidFill>
+                  <a:srgbClr val="1A1A18"/>
+                </a:solidFill>
+                <a:latin typeface="Noto Sans Mono CJK SC"/>
+                <a:ea typeface="Noto Sans Mono CJK SC"/>
+                <a:cs typeface="Noto Sans Mono CJK SC"/>
+              </a:rPr>
+              <a:t>    数据对象 D: 结点是什么</a:t>
+            </a:r>
+          </a:p>
+          <a:p>
+            <a:pPr marL="0" indent="0" lvl="0">
+              <a:lnSpc>
+                <a:spcPct val="104000"/>
+              </a:lnSpc>
+              <a:buNone/>
+            </a:pPr>
+            <a:r>
+              <a:rPr lang="zh-CN" sz="1560" dirty="0">
+                <a:solidFill>
+                  <a:srgbClr val="1A1A18"/>
+                </a:solidFill>
+                <a:latin typeface="Noto Sans Mono CJK SC"/>
+                <a:ea typeface="Noto Sans Mono CJK SC"/>
+                <a:cs typeface="Noto Sans Mono CJK SC"/>
+              </a:rPr>
+              <a:t>    数据关系 R: 结点之间有什么关系</a:t>
+            </a:r>
+          </a:p>
+          <a:p>
+            <a:pPr marL="0" indent="0" lvl="0">
+              <a:lnSpc>
+                <a:spcPct val="104000"/>
+              </a:lnSpc>
+              <a:buNone/>
+            </a:pPr>
+            <a:r>
+              <a:rPr lang="zh-CN" sz="1560" dirty="0">
+                <a:solidFill>
+                  <a:srgbClr val="1A1A18"/>
+                </a:solidFill>
+                <a:latin typeface="Noto Sans Mono CJK SC"/>
+                <a:ea typeface="Noto Sans Mono CJK SC"/>
+                <a:cs typeface="Noto Sans Mono CJK SC"/>
+              </a:rPr>
+              <a:t>    基本操作 P: 对外提供哪些运算</a:t>
+            </a:r>
+          </a:p>
+          <a:p>
+            <a:pPr marL="0" indent="0" lvl="0">
+              <a:lnSpc>
+                <a:spcPct val="104000"/>
+              </a:lnSpc>
+              <a:buNone/>
+            </a:pPr>
+            <a:r>
+              <a:rPr lang="zh-CN" sz="1560" dirty="0">
+                <a:solidFill>
+                  <a:srgbClr val="1A1A18"/>
+                </a:solidFill>
+                <a:latin typeface="Noto Sans Mono CJK SC"/>
+                <a:ea typeface="Noto Sans Mono CJK SC"/>
+                <a:cs typeface="Noto Sans Mono CJK SC"/>
+              </a:rPr>
+              <a:t>}</a:t>
+            </a:r>
+          </a:p>
+        </p:txBody>
+      </p:sp>
+      <p:sp>
+        <p:nvSpPr>
+          <p:cNvPr id="6" name="正文"/>
+          <p:cNvSpPr txBox="1"/>
+          <p:nvPr/>
+        </p:nvSpPr>
+        <p:spPr>
+          <a:xfrm>
+            <a:off x="566928" y="4090873"/>
+            <a:ext cx="11058144" cy="796442"/>
+          </a:xfrm>
+          <a:prstGeom prst="rect">
+            <a:avLst/>
+          </a:prstGeom>
+          <a:noFill/>
+        </p:spPr>
+        <p:txBody>
+          <a:bodyPr wrap="square" lIns="0" tIns="0" rIns="0" bIns="0">
+            <a:noAutofit/>
+          </a:bodyPr>
+          <a:lstStyle/>
+          <a:p>
+            <a:pPr marL="0" indent="0" lvl="0">
+              <a:lnSpc>
+                <a:spcPct val="100000"/>
+              </a:lnSpc>
+              <a:buNone/>
+            </a:pPr>
+            <a:r>
+              <a:rPr lang="zh-CN" sz="2340" dirty="0">
+                <a:solidFill>
+                  <a:srgbClr val="1A1A18"/>
+                </a:solidFill>
+                <a:latin typeface="Segoe UI"/>
+                <a:ea typeface="Noto Sans CJK SC"/>
+                <a:cs typeface="Segoe UI"/>
+              </a:rPr>
+              <a:t>用它的人只能通过这些运算访问数据，</a:t>
+            </a:r>
+            <a:r>
+              <a:rPr lang="zh-CN" sz="2340" dirty="0" b="1">
+                <a:solidFill>
+                  <a:srgbClr val="8A4B2A"/>
+                </a:solidFill>
+                <a:latin typeface="Segoe UI"/>
+                <a:ea typeface="Noto Sans CJK SC"/>
+                <a:cs typeface="Segoe UI"/>
+              </a:rPr>
+              <a:t>不能去翻内部表示</a:t>
+            </a:r>
+            <a:r>
+              <a:rPr lang="zh-CN" sz="2340" dirty="0">
+                <a:solidFill>
+                  <a:srgbClr val="1A1A18"/>
+                </a:solidFill>
+                <a:latin typeface="Segoe UI"/>
+                <a:ea typeface="Noto Sans CJK SC"/>
+                <a:cs typeface="Segoe UI"/>
+              </a:rPr>
+              <a:t>—— 所以换实现不用改调用方。</a:t>
+            </a:r>
+          </a:p>
+        </p:txBody>
+      </p:sp>
+      <p:sp>
+        <p:nvSpPr>
+          <p:cNvPr id="7" name="页脚"/>
+          <p:cNvSpPr txBox="1"/>
+          <p:nvPr/>
+        </p:nvSpPr>
+        <p:spPr>
+          <a:xfrm>
+            <a:off x="566928" y="6419088"/>
+            <a:ext cx="7740700" cy="274320"/>
+          </a:xfrm>
+          <a:prstGeom prst="rect">
+            <a:avLst/>
+          </a:prstGeom>
+          <a:noFill/>
+        </p:spPr>
+        <p:txBody>
+          <a:bodyPr wrap="square" lIns="0" tIns="0" rIns="0" bIns="0">
+            <a:noAutofit/>
+          </a:bodyPr>
+          <a:lstStyle/>
+          <a:p>
+            <a:pPr marL="0" indent="0" lvl="0">
+              <a:lnSpc>
+                <a:spcPct val="100000"/>
+              </a:lnSpc>
+              <a:buNone/>
+            </a:pPr>
+            <a:r>
+              <a:rPr lang="zh-CN" sz="1000" dirty="0">
+                <a:solidFill>
+                  <a:srgbClr val="6B6B66"/>
+                </a:solidFill>
+                <a:latin typeface="Segoe UI"/>
+                <a:ea typeface="Noto Sans CJK SC"/>
+                <a:cs typeface="Segoe UI"/>
+              </a:rPr>
+              <a:t>第1章 概论</a:t>
+            </a:r>
+          </a:p>
+        </p:txBody>
+      </p:sp>
+      <p:sp>
+        <p:nvSpPr>
+          <p:cNvPr id="8" name="页码"/>
+          <p:cNvSpPr txBox="1"/>
+          <p:nvPr/>
+        </p:nvSpPr>
+        <p:spPr>
+          <a:xfrm>
+            <a:off x="8307628" y="6419088"/>
+            <a:ext cx="3317443" cy="274320"/>
+          </a:xfrm>
+          <a:prstGeom prst="rect">
+            <a:avLst/>
+          </a:prstGeom>
+          <a:noFill/>
+        </p:spPr>
+        <p:txBody>
+          <a:bodyPr wrap="square" lIns="0" tIns="0" rIns="0" bIns="0">
+            <a:noAutofit/>
+          </a:bodyPr>
+          <a:lstStyle/>
+          <a:p>
+            <a:pPr marL="0" indent="0" lvl="0" algn="r">
+              <a:lnSpc>
+                <a:spcPct val="100000"/>
+              </a:lnSpc>
+              <a:buNone/>
+            </a:pPr>
+            <a:r>
+              <a:rPr lang="zh-CN" sz="1000" dirty="0">
+                <a:solidFill>
+                  <a:srgbClr val="6B6B66"/>
+                </a:solidFill>
+                <a:latin typeface="Segoe UI"/>
+                <a:ea typeface="Noto Sans CJK SC"/>
+                <a:cs typeface="Segoe UI"/>
+              </a:rPr>
+              <a:t>12 / 29</a:t>
+            </a:r>
+          </a:p>
+        </p:txBody>
+      </p:sp>
+    </p:spTree>
+  </p:cSld>
+</p:sld>
+</file>
+
+<file path=ppt/slides/slide13.xml><?xml version="1.0" encoding="utf-8"?>
 <p:sld xmlns:a="http://schemas.openxmlformats.org/drawingml/2006/main" xmlns:r="http://schemas.openxmlformats.org/officeDocument/2006/relationships" xmlns:p="http://schemas.openxmlformats.org/presentationml/2006/main">
   <p:cSld>
     <p:spTree>
@@ -3721,7 +4750,7 @@
                 <a:ea typeface="Noto Sans CJK SC"/>
                 <a:cs typeface="Segoe UI"/>
               </a:rPr>
-              <a:t>12 / 28</a:t>
+              <a:t>13 / 29</a:t>
             </a:r>
           </a:p>
         </p:txBody>
@@ -3731,7 +4760,7 @@
 </p:sld>
 </file>
 
-<file path=ppt/slides/slide13.xml><?xml version="1.0" encoding="utf-8"?>
+<file path=ppt/slides/slide14.xml><?xml version="1.0" encoding="utf-8"?>
 <p:sld xmlns:a="http://schemas.openxmlformats.org/drawingml/2006/main" xmlns:r="http://schemas.openxmlformats.org/officeDocument/2006/relationships" xmlns:p="http://schemas.openxmlformats.org/presentationml/2006/main">
   <p:cSld>
     <p:spTree>
@@ -5146,7 +6175,7 @@
                 <a:ea typeface="Noto Sans CJK SC"/>
                 <a:cs typeface="Segoe UI"/>
               </a:rPr>
-              <a:t>13 / 28</a:t>
+              <a:t>14 / 29</a:t>
             </a:r>
           </a:p>
         </p:txBody>
@@ -5156,7 +6185,7 @@
 </p:sld>
 </file>
 
-<file path=ppt/slides/slide14.xml><?xml version="1.0" encoding="utf-8"?>
+<file path=ppt/slides/slide15.xml><?xml version="1.0" encoding="utf-8"?>
 <p:sld xmlns:a="http://schemas.openxmlformats.org/drawingml/2006/main" xmlns:r="http://schemas.openxmlformats.org/officeDocument/2006/relationships" xmlns:p="http://schemas.openxmlformats.org/presentationml/2006/main">
   <p:cSld>
     <p:spTree>
@@ -5473,7 +6502,7 @@
                 <a:ea typeface="Noto Sans CJK SC"/>
                 <a:cs typeface="Segoe UI"/>
               </a:rPr>
-              <a:t>14 / 28</a:t>
+              <a:t>15 / 29</a:t>
             </a:r>
           </a:p>
         </p:txBody>
@@ -5483,7 +6512,7 @@
 </p:sld>
 </file>
 
-<file path=ppt/slides/slide15.xml><?xml version="1.0" encoding="utf-8"?>
+<file path=ppt/slides/slide16.xml><?xml version="1.0" encoding="utf-8"?>
 <p:sld xmlns:a="http://schemas.openxmlformats.org/drawingml/2006/main" xmlns:r="http://schemas.openxmlformats.org/officeDocument/2006/relationships" xmlns:p="http://schemas.openxmlformats.org/presentationml/2006/main">
   <p:cSld>
     <p:spTree>
@@ -6477,7 +7506,7 @@
                 <a:ea typeface="Noto Sans CJK SC"/>
                 <a:cs typeface="Segoe UI"/>
               </a:rPr>
-              <a:t>15 / 28</a:t>
+              <a:t>16 / 29</a:t>
             </a:r>
           </a:p>
         </p:txBody>
@@ -6487,7 +7516,7 @@
 </p:sld>
 </file>
 
-<file path=ppt/slides/slide16.xml><?xml version="1.0" encoding="utf-8"?>
+<file path=ppt/slides/slide17.xml><?xml version="1.0" encoding="utf-8"?>
 <p:sld xmlns:a="http://schemas.openxmlformats.org/drawingml/2006/main" xmlns:r="http://schemas.openxmlformats.org/officeDocument/2006/relationships" xmlns:p="http://schemas.openxmlformats.org/presentationml/2006/main">
   <p:cSld>
     <p:spTree>
@@ -7212,7 +8241,7 @@
                 <a:ea typeface="Noto Sans CJK SC"/>
                 <a:cs typeface="Segoe UI"/>
               </a:rPr>
-              <a:t>16 / 28</a:t>
+              <a:t>17 / 29</a:t>
             </a:r>
           </a:p>
         </p:txBody>
@@ -7222,7 +8251,7 @@
 </p:sld>
 </file>
 
-<file path=ppt/slides/slide17.xml><?xml version="1.0" encoding="utf-8"?>
+<file path=ppt/slides/slide18.xml><?xml version="1.0" encoding="utf-8"?>
 <p:sld xmlns:a="http://schemas.openxmlformats.org/drawingml/2006/main" xmlns:r="http://schemas.openxmlformats.org/officeDocument/2006/relationships" xmlns:p="http://schemas.openxmlformats.org/presentationml/2006/main">
   <p:cSld>
     <p:spTree>
@@ -8049,656 +9078,7 @@
                 <a:ea typeface="Noto Sans CJK SC"/>
                 <a:cs typeface="Segoe UI"/>
               </a:rPr>
-              <a:t>17 / 28</a:t>
-            </a:r>
-          </a:p>
-        </p:txBody>
-      </p:sp>
-    </p:spTree>
-  </p:cSld>
-</p:sld>
-</file>
-
-<file path=ppt/slides/slide18.xml><?xml version="1.0" encoding="utf-8"?>
-<p:sld xmlns:a="http://schemas.openxmlformats.org/drawingml/2006/main" xmlns:r="http://schemas.openxmlformats.org/officeDocument/2006/relationships" xmlns:p="http://schemas.openxmlformats.org/presentationml/2006/main">
-  <p:cSld>
-    <p:spTree>
-      <p:nvGrpSpPr>
-        <p:cNvPr id="1" name=""/>
-        <p:cNvGrpSpPr/>
-        <p:nvPr/>
-      </p:nvGrpSpPr>
-      <p:grpSpPr>
-        <a:xfrm>
-          <a:off x="0" y="0"/>
-          <a:ext cx="0" cy="0"/>
-          <a:chOff x="0" y="0"/>
-          <a:chExt cx="0" cy="0"/>
-        </a:xfrm>
-      </p:grpSpPr>
-      <p:sp>
-        <p:nvSpPr>
-          <p:cNvPr id="2" name="标题"/>
-          <p:cNvSpPr txBox="1"/>
-          <p:nvPr/>
-        </p:nvSpPr>
-        <p:spPr>
-          <a:xfrm>
-            <a:off x="566928" y="384048"/>
-            <a:ext cx="11058144" cy="487680"/>
-          </a:xfrm>
-          <a:prstGeom prst="rect">
-            <a:avLst/>
-          </a:prstGeom>
-          <a:noFill/>
-        </p:spPr>
-        <p:txBody>
-          <a:bodyPr wrap="square" lIns="0" tIns="0" rIns="0" bIns="0">
-            <a:noAutofit/>
-          </a:bodyPr>
-          <a:lstStyle/>
-          <a:p>
-            <a:pPr marL="0" indent="0" lvl="0">
-              <a:lnSpc>
-                <a:spcPct val="100000"/>
-              </a:lnSpc>
-              <a:buNone/>
-            </a:pPr>
-            <a:r>
-              <a:rPr lang="zh-CN" sz="3200" dirty="0" b="1">
-                <a:solidFill>
-                  <a:srgbClr val="1A1A18"/>
-                </a:solidFill>
-                <a:latin typeface="Segoe UI"/>
-                <a:ea typeface="Noto Sans CJK SC"/>
-                <a:cs typeface="Segoe UI"/>
-              </a:rPr>
-              <a:t>1.4.4 怎么挑结构：先问运算，再问规模</a:t>
-            </a:r>
-          </a:p>
-        </p:txBody>
-      </p:sp>
-      <p:sp>
-        <p:nvSpPr>
-          <p:cNvPr id="3" name="标题线"/>
-          <p:cNvSpPr/>
-          <p:nvPr/>
-        </p:nvSpPr>
-        <p:spPr>
-          <a:xfrm>
-            <a:off x="566928" y="935736"/>
-            <a:ext cx="11058144" cy="32004"/>
-          </a:xfrm>
-          <a:prstGeom prst="rect">
-            <a:avLst/>
-          </a:prstGeom>
-          <a:solidFill>
-            <a:srgbClr val="8A4B2A"/>
-          </a:solidFill>
-          <a:ln>
-            <a:noFill/>
-          </a:ln>
-        </p:spPr>
-        <p:txBody>
-          <a:bodyPr/>
-          <a:lstStyle/>
-          <a:p/>
-        </p:txBody>
-      </p:sp>
-      <p:sp>
-        <p:nvSpPr>
-          <p:cNvPr id="4" name="正文"/>
-          <p:cNvSpPr txBox="1"/>
-          <p:nvPr/>
-        </p:nvSpPr>
-        <p:spPr>
-          <a:xfrm>
-            <a:off x="566928" y="1317267"/>
-            <a:ext cx="11058144" cy="373715"/>
-          </a:xfrm>
-          <a:prstGeom prst="rect">
-            <a:avLst/>
-          </a:prstGeom>
-          <a:noFill/>
-        </p:spPr>
-        <p:txBody>
-          <a:bodyPr wrap="square" lIns="0" tIns="0" rIns="0" bIns="0">
-            <a:noAutofit/>
-          </a:bodyPr>
-          <a:lstStyle/>
-          <a:p>
-            <a:pPr marL="0" indent="0" lvl="0">
-              <a:lnSpc>
-                <a:spcPct val="100000"/>
-              </a:lnSpc>
-              <a:buNone/>
-            </a:pPr>
-            <a:r>
-              <a:rPr lang="zh-CN" sz="2196" dirty="0" b="1">
-                <a:solidFill>
-                  <a:srgbClr val="8A4B2A"/>
-                </a:solidFill>
-                <a:latin typeface="Segoe UI"/>
-                <a:ea typeface="Noto Sans CJK SC"/>
-                <a:cs typeface="Segoe UI"/>
-              </a:rPr>
-              <a:t>第一问：这份数据上要做哪些运算？</a:t>
-            </a:r>
-          </a:p>
-        </p:txBody>
-      </p:sp>
-      <p:sp>
-        <p:nvSpPr>
-          <p:cNvPr id="5" name="要点"/>
-          <p:cNvSpPr txBox="1"/>
-          <p:nvPr/>
-        </p:nvSpPr>
-        <p:spPr>
-          <a:xfrm>
-            <a:off x="566928" y="1799440"/>
-            <a:ext cx="11058144" cy="1355412"/>
-          </a:xfrm>
-          <a:prstGeom prst="rect">
-            <a:avLst/>
-          </a:prstGeom>
-          <a:noFill/>
-        </p:spPr>
-        <p:txBody>
-          <a:bodyPr wrap="square" lIns="0" tIns="0" rIns="0" bIns="0">
-            <a:noAutofit/>
-          </a:bodyPr>
-          <a:lstStyle/>
-          <a:p>
-            <a:pPr marL="270000" indent="-230000" lvl="0">
-              <a:lnSpc>
-                <a:spcPct val="100000"/>
-              </a:lnSpc>
-              <a:spcBef>
-                <a:spcPts val="614"/>
-              </a:spcBef>
-              <a:buClr>
-                <a:srgbClr val="8A4B2A"/>
-              </a:buClr>
-              <a:buFont typeface="Arial"/>
-              <a:buChar char="●"/>
-            </a:pPr>
-            <a:r>
-              <a:rPr lang="zh-CN" sz="2196" dirty="0">
-                <a:solidFill>
-                  <a:srgbClr val="1A1A18"/>
-                </a:solidFill>
-                <a:latin typeface="Segoe UI"/>
-                <a:ea typeface="Noto Sans CJK SC"/>
-                <a:cs typeface="Segoe UI"/>
-              </a:rPr>
-              <a:t>要不要按下标随机访问</a:t>
-            </a:r>
-          </a:p>
-          <a:p>
-            <a:pPr marL="270000" indent="-230000" lvl="0">
-              <a:lnSpc>
-                <a:spcPct val="100000"/>
-              </a:lnSpc>
-              <a:spcBef>
-                <a:spcPts val="614"/>
-              </a:spcBef>
-              <a:buClr>
-                <a:srgbClr val="8A4B2A"/>
-              </a:buClr>
-              <a:buFont typeface="Arial"/>
-              <a:buChar char="●"/>
-            </a:pPr>
-            <a:r>
-              <a:rPr lang="zh-CN" sz="2196" dirty="0">
-                <a:solidFill>
-                  <a:srgbClr val="1A1A18"/>
-                </a:solidFill>
-                <a:latin typeface="Segoe UI"/>
-                <a:ea typeface="Noto Sans CJK SC"/>
-                <a:cs typeface="Segoe UI"/>
-              </a:rPr>
-              <a:t>会不会在中间频繁插入、删除</a:t>
-            </a:r>
-          </a:p>
-          <a:p>
-            <a:pPr marL="270000" indent="-230000" lvl="0">
-              <a:lnSpc>
-                <a:spcPct val="100000"/>
-              </a:lnSpc>
-              <a:spcBef>
-                <a:spcPts val="614"/>
-              </a:spcBef>
-              <a:buClr>
-                <a:srgbClr val="8A4B2A"/>
-              </a:buClr>
-              <a:buFont typeface="Arial"/>
-              <a:buChar char="●"/>
-            </a:pPr>
-            <a:r>
-              <a:rPr lang="zh-CN" sz="2196" dirty="0">
-                <a:solidFill>
-                  <a:srgbClr val="1A1A18"/>
-                </a:solidFill>
-                <a:latin typeface="Segoe UI"/>
-                <a:ea typeface="Noto Sans CJK SC"/>
-                <a:cs typeface="Segoe UI"/>
-              </a:rPr>
-              <a:t>要不要按关键码直接找到某条记录</a:t>
-            </a:r>
-          </a:p>
-        </p:txBody>
-      </p:sp>
-      <p:sp>
-        <p:nvSpPr>
-          <p:cNvPr id="6" name="正文"/>
-          <p:cNvSpPr txBox="1"/>
-          <p:nvPr/>
-        </p:nvSpPr>
-        <p:spPr>
-          <a:xfrm>
-            <a:off x="566928" y="3216828"/>
-            <a:ext cx="11058144" cy="373715"/>
-          </a:xfrm>
-          <a:prstGeom prst="rect">
-            <a:avLst/>
-          </a:prstGeom>
-          <a:noFill/>
-        </p:spPr>
-        <p:txBody>
-          <a:bodyPr wrap="square" lIns="0" tIns="0" rIns="0" bIns="0">
-            <a:noAutofit/>
-          </a:bodyPr>
-          <a:lstStyle/>
-          <a:p>
-            <a:pPr marL="0" indent="0" lvl="0">
-              <a:lnSpc>
-                <a:spcPct val="100000"/>
-              </a:lnSpc>
-              <a:buNone/>
-            </a:pPr>
-            <a:r>
-              <a:rPr lang="zh-CN" sz="2196" dirty="0" b="1">
-                <a:solidFill>
-                  <a:srgbClr val="8A4B2A"/>
-                </a:solidFill>
-                <a:latin typeface="Segoe UI"/>
-                <a:ea typeface="Noto Sans CJK SC"/>
-                <a:cs typeface="Segoe UI"/>
-              </a:rPr>
-              <a:t>第二问：规模多大、数据在哪一层存储？</a:t>
-            </a:r>
-          </a:p>
-        </p:txBody>
-      </p:sp>
-      <p:sp>
-        <p:nvSpPr>
-          <p:cNvPr id="7" name="正文"/>
-          <p:cNvSpPr txBox="1"/>
-          <p:nvPr/>
-        </p:nvSpPr>
-        <p:spPr>
-          <a:xfrm>
-            <a:off x="566928" y="3652519"/>
-            <a:ext cx="11058144" cy="747430"/>
-          </a:xfrm>
-          <a:prstGeom prst="rect">
-            <a:avLst/>
-          </a:prstGeom>
-          <a:noFill/>
-        </p:spPr>
-        <p:txBody>
-          <a:bodyPr wrap="square" lIns="0" tIns="0" rIns="0" bIns="0">
-            <a:noAutofit/>
-          </a:bodyPr>
-          <a:lstStyle/>
-          <a:p>
-            <a:pPr marL="0" indent="0" lvl="0">
-              <a:lnSpc>
-                <a:spcPct val="100000"/>
-              </a:lnSpc>
-              <a:buNone/>
-            </a:pPr>
-            <a:r>
-              <a:rPr lang="zh-CN" sz="2196" dirty="0">
-                <a:solidFill>
-                  <a:srgbClr val="1A1A18"/>
-                </a:solidFill>
-                <a:latin typeface="Segoe UI"/>
-                <a:ea typeface="Noto Sans CJK SC"/>
-                <a:cs typeface="Segoe UI"/>
-              </a:rPr>
-              <a:t>一次磁盘 I/O 往往比一次内存比较贵</a:t>
-            </a:r>
-            <a:r>
-              <a:rPr lang="zh-CN" sz="2196" dirty="0" b="1">
-                <a:solidFill>
-                  <a:srgbClr val="8A4B2A"/>
-                </a:solidFill>
-                <a:latin typeface="Segoe UI"/>
-                <a:ea typeface="Noto Sans CJK SC"/>
-                <a:cs typeface="Segoe UI"/>
-              </a:rPr>
-              <a:t>几个数量级</a:t>
-            </a:r>
-            <a:r>
-              <a:rPr lang="zh-CN" sz="2196" dirty="0">
-                <a:solidFill>
-                  <a:srgbClr val="1A1A18"/>
-                </a:solidFill>
-                <a:latin typeface="Segoe UI"/>
-                <a:ea typeface="Noto Sans CJK SC"/>
-                <a:cs typeface="Segoe UI"/>
-              </a:rPr>
-              <a:t>—— 所以第 9、11 章数的是</a:t>
-            </a:r>
-            <a:r>
-              <a:rPr lang="zh-CN" sz="2196" dirty="0" b="1">
-                <a:solidFill>
-                  <a:srgbClr val="8A4B2A"/>
-                </a:solidFill>
-                <a:latin typeface="Segoe UI"/>
-                <a:ea typeface="Noto Sans CJK SC"/>
-                <a:cs typeface="Segoe UI"/>
-              </a:rPr>
-              <a:t>访外页数</a:t>
-            </a:r>
-            <a:r>
-              <a:rPr lang="zh-CN" sz="2196" dirty="0">
-                <a:solidFill>
-                  <a:srgbClr val="1A1A18"/>
-                </a:solidFill>
-                <a:latin typeface="Segoe UI"/>
-                <a:ea typeface="Noto Sans CJK SC"/>
-                <a:cs typeface="Segoe UI"/>
-              </a:rPr>
-              <a:t>，不是比较次数。</a:t>
-            </a:r>
-          </a:p>
-        </p:txBody>
-      </p:sp>
-      <p:sp>
-        <p:nvSpPr>
-          <p:cNvPr id="8" name="正文"/>
-          <p:cNvSpPr txBox="1"/>
-          <p:nvPr/>
-        </p:nvSpPr>
-        <p:spPr>
-          <a:xfrm>
-            <a:off x="566928" y="4461925"/>
-            <a:ext cx="11058144" cy="747430"/>
-          </a:xfrm>
-          <a:prstGeom prst="rect">
-            <a:avLst/>
-          </a:prstGeom>
-          <a:noFill/>
-        </p:spPr>
-        <p:txBody>
-          <a:bodyPr wrap="square" lIns="0" tIns="0" rIns="0" bIns="0">
-            <a:noAutofit/>
-          </a:bodyPr>
-          <a:lstStyle/>
-          <a:p>
-            <a:pPr marL="0" indent="0" lvl="0">
-              <a:lnSpc>
-                <a:spcPct val="100000"/>
-              </a:lnSpc>
-              <a:buNone/>
-            </a:pPr>
-            <a:r>
-              <a:rPr lang="zh-CN" sz="2196" dirty="0">
-                <a:solidFill>
-                  <a:srgbClr val="1A1A18"/>
-                </a:solidFill>
-                <a:latin typeface="Segoe UI"/>
-                <a:ea typeface="Noto Sans CJK SC"/>
-                <a:cs typeface="Segoe UI"/>
-              </a:rPr>
-              <a:t>回到 1.1 节：只有五个经纪人、要任意两点最短路 → </a:t>
-            </a:r>
-            <a:r>
-              <a:rPr lang="zh-CN" sz="2196" dirty="0" b="1">
-                <a:solidFill>
-                  <a:srgbClr val="8A4B2A"/>
-                </a:solidFill>
-                <a:latin typeface="Segoe UI"/>
-                <a:ea typeface="Noto Sans CJK SC"/>
-                <a:cs typeface="Segoe UI"/>
-              </a:rPr>
-              <a:t>相邻矩阵 + Floyd</a:t>
-            </a:r>
-            <a:r>
-              <a:rPr lang="zh-CN" sz="2196" dirty="0">
-                <a:solidFill>
-                  <a:srgbClr val="1A1A18"/>
-                </a:solidFill>
-                <a:latin typeface="Segoe UI"/>
-                <a:ea typeface="Noto Sans CJK SC"/>
-                <a:cs typeface="Segoe UI"/>
-              </a:rPr>
-              <a:t>，实现简单，</a:t>
-            </a:r>
-            <a:r>
-              <a:rPr lang="zh-CN" sz="2196" dirty="0" i="1">
-                <a:solidFill>
-                  <a:srgbClr val="1A1A18"/>
-                </a:solidFill>
-                <a:latin typeface="Segoe UI"/>
-                <a:ea typeface="Noto Sans CJK SC"/>
-                <a:cs typeface="Segoe UI"/>
-              </a:rPr>
-              <a:t>n = 5</a:t>
-            </a:r>
-            <a:r>
-              <a:rPr lang="zh-CN" sz="2196" dirty="0">
-                <a:solidFill>
-                  <a:srgbClr val="1A1A18"/>
-                </a:solidFill>
-                <a:latin typeface="Segoe UI"/>
-                <a:ea typeface="Noto Sans CJK SC"/>
-                <a:cs typeface="Segoe UI"/>
-              </a:rPr>
-              <a:t> 时三重循环可以忽略。</a:t>
-            </a:r>
-          </a:p>
-        </p:txBody>
-      </p:sp>
-      <p:sp>
-        <p:nvSpPr>
-          <p:cNvPr id="9" name="正文"/>
-          <p:cNvSpPr txBox="1"/>
-          <p:nvPr/>
-        </p:nvSpPr>
-        <p:spPr>
-          <a:xfrm>
-            <a:off x="566928" y="5271331"/>
-            <a:ext cx="11058144" cy="373715"/>
-          </a:xfrm>
-          <a:prstGeom prst="rect">
-            <a:avLst/>
-          </a:prstGeom>
-          <a:noFill/>
-        </p:spPr>
-        <p:txBody>
-          <a:bodyPr wrap="square" lIns="0" tIns="0" rIns="0" bIns="0">
-            <a:noAutofit/>
-          </a:bodyPr>
-          <a:lstStyle/>
-          <a:p>
-            <a:pPr marL="0" indent="0" lvl="0">
-              <a:lnSpc>
-                <a:spcPct val="100000"/>
-              </a:lnSpc>
-              <a:buNone/>
-            </a:pPr>
-            <a:r>
-              <a:rPr lang="zh-CN" sz="2196" dirty="0">
-                <a:solidFill>
-                  <a:srgbClr val="1A1A18"/>
-                </a:solidFill>
-                <a:latin typeface="Segoe UI"/>
-                <a:ea typeface="Noto Sans CJK SC"/>
-                <a:cs typeface="Segoe UI"/>
-              </a:rPr>
-              <a:t>换成顶点很多、边很少、只问单源 → 就该是</a:t>
-            </a:r>
-            <a:r>
-              <a:rPr lang="zh-CN" sz="2196" dirty="0" b="1">
-                <a:solidFill>
-                  <a:srgbClr val="8A4B2A"/>
-                </a:solidFill>
-                <a:latin typeface="Segoe UI"/>
-                <a:ea typeface="Noto Sans CJK SC"/>
-                <a:cs typeface="Segoe UI"/>
-              </a:rPr>
-              <a:t>邻接表 + Dijkstra</a:t>
-            </a:r>
-            <a:r>
-              <a:rPr lang="zh-CN" sz="2196" dirty="0">
-                <a:solidFill>
-                  <a:srgbClr val="1A1A18"/>
-                </a:solidFill>
-                <a:latin typeface="Segoe UI"/>
-                <a:ea typeface="Noto Sans CJK SC"/>
-                <a:cs typeface="Segoe UI"/>
-              </a:rPr>
-              <a:t>。</a:t>
-            </a:r>
-          </a:p>
-        </p:txBody>
-      </p:sp>
-      <p:sp>
-        <p:nvSpPr>
-          <p:cNvPr id="10" name="正文"/>
-          <p:cNvSpPr txBox="1"/>
-          <p:nvPr/>
-        </p:nvSpPr>
-        <p:spPr>
-          <a:xfrm>
-            <a:off x="566928" y="5707022"/>
-            <a:ext cx="11058144" cy="373715"/>
-          </a:xfrm>
-          <a:prstGeom prst="rect">
-            <a:avLst/>
-          </a:prstGeom>
-          <a:noFill/>
-        </p:spPr>
-        <p:txBody>
-          <a:bodyPr wrap="square" lIns="0" tIns="0" rIns="0" bIns="0">
-            <a:noAutofit/>
-          </a:bodyPr>
-          <a:lstStyle/>
-          <a:p>
-            <a:pPr marL="0" indent="0" lvl="0">
-              <a:lnSpc>
-                <a:spcPct val="100000"/>
-              </a:lnSpc>
-              <a:buNone/>
-            </a:pPr>
-            <a:r>
-              <a:rPr lang="zh-CN" sz="2196" dirty="0" b="1">
-                <a:solidFill>
-                  <a:srgbClr val="8A4B2A"/>
-                </a:solidFill>
-                <a:latin typeface="Segoe UI"/>
-                <a:ea typeface="Noto Sans CJK SC"/>
-                <a:cs typeface="Segoe UI"/>
-              </a:rPr>
-              <a:t>同一个问题，规模一变，答案就变。</a:t>
-            </a:r>
-            <a:r>
-              <a:rPr lang="zh-CN" sz="2196" dirty="0">
-                <a:solidFill>
-                  <a:srgbClr val="1A1A18"/>
-                </a:solidFill>
-                <a:latin typeface="Segoe UI"/>
-                <a:ea typeface="Noto Sans CJK SC"/>
-                <a:cs typeface="Segoe UI"/>
-              </a:rPr>
-              <a:t> 后面每一章都会再做一次这样的取舍。</a:t>
-            </a:r>
-          </a:p>
-        </p:txBody>
-      </p:sp>
-      <p:sp>
-        <p:nvSpPr>
-          <p:cNvPr id="11" name="页脚"/>
-          <p:cNvSpPr txBox="1"/>
-          <p:nvPr/>
-        </p:nvSpPr>
-        <p:spPr>
-          <a:xfrm>
-            <a:off x="566928" y="6419088"/>
-            <a:ext cx="7740700" cy="274320"/>
-          </a:xfrm>
-          <a:prstGeom prst="rect">
-            <a:avLst/>
-          </a:prstGeom>
-          <a:noFill/>
-        </p:spPr>
-        <p:txBody>
-          <a:bodyPr wrap="square" lIns="0" tIns="0" rIns="0" bIns="0">
-            <a:noAutofit/>
-          </a:bodyPr>
-          <a:lstStyle/>
-          <a:p>
-            <a:pPr marL="0" indent="0" lvl="0">
-              <a:lnSpc>
-                <a:spcPct val="100000"/>
-              </a:lnSpc>
-              <a:buNone/>
-            </a:pPr>
-            <a:r>
-              <a:rPr lang="zh-CN" sz="1000" dirty="0">
-                <a:solidFill>
-                  <a:srgbClr val="6B6B66"/>
-                </a:solidFill>
-                <a:latin typeface="Segoe UI"/>
-                <a:ea typeface="Noto Sans CJK SC"/>
-                <a:cs typeface="Segoe UI"/>
-              </a:rPr>
-              <a:t>第1章 概论</a:t>
-            </a:r>
-          </a:p>
-        </p:txBody>
-      </p:sp>
-      <p:sp>
-        <p:nvSpPr>
-          <p:cNvPr id="12" name="页码"/>
-          <p:cNvSpPr txBox="1"/>
-          <p:nvPr/>
-        </p:nvSpPr>
-        <p:spPr>
-          <a:xfrm>
-            <a:off x="8307628" y="6419088"/>
-            <a:ext cx="3317443" cy="274320"/>
-          </a:xfrm>
-          <a:prstGeom prst="rect">
-            <a:avLst/>
-          </a:prstGeom>
-          <a:noFill/>
-        </p:spPr>
-        <p:txBody>
-          <a:bodyPr wrap="square" lIns="0" tIns="0" rIns="0" bIns="0">
-            <a:noAutofit/>
-          </a:bodyPr>
-          <a:lstStyle/>
-          <a:p>
-            <a:pPr marL="0" indent="0" lvl="0" algn="r">
-              <a:lnSpc>
-                <a:spcPct val="100000"/>
-              </a:lnSpc>
-              <a:buNone/>
-            </a:pPr>
-            <a:r>
-              <a:rPr lang="zh-CN" sz="1000" dirty="0">
-                <a:solidFill>
-                  <a:srgbClr val="6B6B66"/>
-                </a:solidFill>
-                <a:latin typeface="Segoe UI"/>
-                <a:ea typeface="Noto Sans CJK SC"/>
-                <a:cs typeface="Segoe UI"/>
-              </a:rPr>
-              <a:t>18 / 28</a:t>
+              <a:t>18 / 29</a:t>
             </a:r>
           </a:p>
         </p:txBody>
@@ -8762,7 +9142,7 @@
                 <a:ea typeface="Noto Sans CJK SC"/>
                 <a:cs typeface="Segoe UI"/>
               </a:rPr>
-              <a:t>课堂讲解卡：从问题到算法</a:t>
+              <a:t>1.4.4 怎么挑结构：先问运算，再问规模</a:t>
             </a:r>
           </a:p>
         </p:txBody>
@@ -8802,8 +9182,8 @@
         </p:nvSpPr>
         <p:spPr>
           <a:xfrm>
-            <a:off x="566928" y="1946148"/>
-            <a:ext cx="11058144" cy="796442"/>
+            <a:off x="566928" y="1317267"/>
+            <a:ext cx="11058144" cy="373715"/>
           </a:xfrm>
           <a:prstGeom prst="rect">
             <a:avLst/>
@@ -8823,80 +9203,29 @@
               <a:buNone/>
             </a:pPr>
             <a:r>
-              <a:rPr lang="zh-CN" sz="2340" dirty="0">
-                <a:solidFill>
-                  <a:srgbClr val="1A1A18"/>
-                </a:solidFill>
-                <a:latin typeface="Segoe UI"/>
-                <a:ea typeface="Noto Sans CJK SC"/>
-                <a:cs typeface="Segoe UI"/>
-              </a:rPr>
-              <a:t>先写清楚三件事：输入是什么、输出是什么、允许哪些操作。再选能让主要操作便宜的数据结构，最后才写循环。</a:t>
-            </a:r>
-          </a:p>
-        </p:txBody>
-      </p:sp>
-      <p:sp>
-        <p:nvSpPr>
-          <p:cNvPr id="5" name="代码"/>
+              <a:rPr lang="zh-CN" sz="2196" dirty="0" b="1">
+                <a:solidFill>
+                  <a:srgbClr val="8A4B2A"/>
+                </a:solidFill>
+                <a:latin typeface="Segoe UI"/>
+                <a:ea typeface="Noto Sans CJK SC"/>
+                <a:cs typeface="Segoe UI"/>
+              </a:rPr>
+              <a:t>第一问：这份数据上要做哪些运算？</a:t>
+            </a:r>
+          </a:p>
+        </p:txBody>
+      </p:sp>
+      <p:sp>
+        <p:nvSpPr>
+          <p:cNvPr id="5" name="要点"/>
           <p:cNvSpPr txBox="1"/>
           <p:nvPr/>
         </p:nvSpPr>
         <p:spPr>
           <a:xfrm>
-            <a:off x="566928" y="2874670"/>
-            <a:ext cx="11058144" cy="470611"/>
-          </a:xfrm>
-          <a:prstGeom prst="roundRect">
-            <a:avLst>
-              <a:gd name="adj" fmla="val 6000"/>
-            </a:avLst>
-          </a:prstGeom>
-          <a:solidFill>
-            <a:srgbClr val="F5F4F0"/>
-          </a:solidFill>
-          <a:ln w="9525">
-            <a:solidFill>
-              <a:srgbClr val="DCDCD6"/>
-            </a:solidFill>
-          </a:ln>
-        </p:spPr>
-        <p:txBody>
-          <a:bodyPr wrap="square" lIns="100584" tIns="100584" rIns="100584" bIns="100584">
-            <a:noAutofit/>
-          </a:bodyPr>
-          <a:lstStyle/>
-          <a:p>
-            <a:pPr marL="0" indent="0" lvl="0">
-              <a:lnSpc>
-                <a:spcPct val="104000"/>
-              </a:lnSpc>
-              <a:buNone/>
-            </a:pPr>
-            <a:r>
-              <a:rPr lang="zh-CN" sz="1560" dirty="0">
-                <a:solidFill>
-                  <a:srgbClr val="1A1A18"/>
-                </a:solidFill>
-                <a:latin typeface="Noto Sans Mono CJK SC"/>
-                <a:ea typeface="Noto Sans Mono CJK SC"/>
-                <a:cs typeface="Noto Sans Mono CJK SC"/>
-              </a:rPr>
-              <a:t>需求 -&gt; 抽象数据类型 -&gt; 存储结构 -&gt; 算法 -&gt; 复杂度 -&gt; 测试</a:t>
-            </a:r>
-          </a:p>
-        </p:txBody>
-      </p:sp>
-      <p:sp>
-        <p:nvSpPr>
-          <p:cNvPr id="6" name="页脚"/>
-          <p:cNvSpPr txBox="1"/>
-          <p:nvPr/>
-        </p:nvSpPr>
-        <p:spPr>
-          <a:xfrm>
-            <a:off x="566928" y="6419088"/>
-            <a:ext cx="7740700" cy="274320"/>
+            <a:off x="566928" y="1799440"/>
+            <a:ext cx="11058144" cy="1355412"/>
           </a:xfrm>
           <a:prstGeom prst="rect">
             <a:avLst/>
@@ -8909,36 +9238,95 @@
           </a:bodyPr>
           <a:lstStyle/>
           <a:p>
-            <a:pPr marL="0" indent="0" lvl="0">
-              <a:lnSpc>
-                <a:spcPct val="100000"/>
-              </a:lnSpc>
-              <a:buNone/>
-            </a:pPr>
-            <a:r>
-              <a:rPr lang="zh-CN" sz="1000" dirty="0">
-                <a:solidFill>
-                  <a:srgbClr val="6B6B66"/>
-                </a:solidFill>
-                <a:latin typeface="Segoe UI"/>
-                <a:ea typeface="Noto Sans CJK SC"/>
-                <a:cs typeface="Segoe UI"/>
-              </a:rPr>
-              <a:t>第1章 概论</a:t>
-            </a:r>
-          </a:p>
-        </p:txBody>
-      </p:sp>
-      <p:sp>
-        <p:nvSpPr>
-          <p:cNvPr id="7" name="页码"/>
+            <a:pPr marL="270000" indent="-230000" lvl="0">
+              <a:lnSpc>
+                <a:spcPct val="100000"/>
+              </a:lnSpc>
+              <a:spcBef>
+                <a:spcPts val="614"/>
+              </a:spcBef>
+              <a:buClr>
+                <a:srgbClr val="8A4B2A"/>
+              </a:buClr>
+              <a:buFont typeface="Arial"/>
+              <a:buChar char="●"/>
+            </a:pPr>
+            <a:r>
+              <a:rPr lang="zh-CN" sz="2196" dirty="0">
+                <a:solidFill>
+                  <a:srgbClr val="1A1A18"/>
+                </a:solidFill>
+                <a:latin typeface="Segoe UI"/>
+                <a:ea typeface="Noto Sans CJK SC"/>
+                <a:cs typeface="Segoe UI"/>
+              </a:rPr>
+              <a:t>要不要按下标随机访问</a:t>
+            </a:r>
+          </a:p>
+          <a:p>
+            <a:pPr marL="270000" indent="-230000" lvl="0">
+              <a:lnSpc>
+                <a:spcPct val="100000"/>
+              </a:lnSpc>
+              <a:spcBef>
+                <a:spcPts val="614"/>
+              </a:spcBef>
+              <a:buClr>
+                <a:srgbClr val="8A4B2A"/>
+              </a:buClr>
+              <a:buFont typeface="Arial"/>
+              <a:buChar char="●"/>
+            </a:pPr>
+            <a:r>
+              <a:rPr lang="zh-CN" sz="2196" dirty="0">
+                <a:solidFill>
+                  <a:srgbClr val="1A1A18"/>
+                </a:solidFill>
+                <a:latin typeface="Segoe UI"/>
+                <a:ea typeface="Noto Sans CJK SC"/>
+                <a:cs typeface="Segoe UI"/>
+              </a:rPr>
+              <a:t>会不会在中间频繁插入、删除</a:t>
+            </a:r>
+          </a:p>
+          <a:p>
+            <a:pPr marL="270000" indent="-230000" lvl="0">
+              <a:lnSpc>
+                <a:spcPct val="100000"/>
+              </a:lnSpc>
+              <a:spcBef>
+                <a:spcPts val="614"/>
+              </a:spcBef>
+              <a:buClr>
+                <a:srgbClr val="8A4B2A"/>
+              </a:buClr>
+              <a:buFont typeface="Arial"/>
+              <a:buChar char="●"/>
+            </a:pPr>
+            <a:r>
+              <a:rPr lang="zh-CN" sz="2196" dirty="0">
+                <a:solidFill>
+                  <a:srgbClr val="1A1A18"/>
+                </a:solidFill>
+                <a:latin typeface="Segoe UI"/>
+                <a:ea typeface="Noto Sans CJK SC"/>
+                <a:cs typeface="Segoe UI"/>
+              </a:rPr>
+              <a:t>要不要按关键码直接找到某条记录</a:t>
+            </a:r>
+          </a:p>
+        </p:txBody>
+      </p:sp>
+      <p:sp>
+        <p:nvSpPr>
+          <p:cNvPr id="6" name="正文"/>
           <p:cNvSpPr txBox="1"/>
           <p:nvPr/>
         </p:nvSpPr>
         <p:spPr>
           <a:xfrm>
-            <a:off x="8307628" y="6419088"/>
-            <a:ext cx="3317443" cy="274320"/>
+            <a:off x="566928" y="3216828"/>
+            <a:ext cx="11058144" cy="373715"/>
           </a:xfrm>
           <a:prstGeom prst="rect">
             <a:avLst/>
@@ -8951,6 +9339,379 @@
           </a:bodyPr>
           <a:lstStyle/>
           <a:p>
+            <a:pPr marL="0" indent="0" lvl="0">
+              <a:lnSpc>
+                <a:spcPct val="100000"/>
+              </a:lnSpc>
+              <a:buNone/>
+            </a:pPr>
+            <a:r>
+              <a:rPr lang="zh-CN" sz="2196" dirty="0" b="1">
+                <a:solidFill>
+                  <a:srgbClr val="8A4B2A"/>
+                </a:solidFill>
+                <a:latin typeface="Segoe UI"/>
+                <a:ea typeface="Noto Sans CJK SC"/>
+                <a:cs typeface="Segoe UI"/>
+              </a:rPr>
+              <a:t>第二问：规模多大、数据在哪一层存储？</a:t>
+            </a:r>
+          </a:p>
+        </p:txBody>
+      </p:sp>
+      <p:sp>
+        <p:nvSpPr>
+          <p:cNvPr id="7" name="正文"/>
+          <p:cNvSpPr txBox="1"/>
+          <p:nvPr/>
+        </p:nvSpPr>
+        <p:spPr>
+          <a:xfrm>
+            <a:off x="566928" y="3652519"/>
+            <a:ext cx="11058144" cy="747430"/>
+          </a:xfrm>
+          <a:prstGeom prst="rect">
+            <a:avLst/>
+          </a:prstGeom>
+          <a:noFill/>
+        </p:spPr>
+        <p:txBody>
+          <a:bodyPr wrap="square" lIns="0" tIns="0" rIns="0" bIns="0">
+            <a:noAutofit/>
+          </a:bodyPr>
+          <a:lstStyle/>
+          <a:p>
+            <a:pPr marL="0" indent="0" lvl="0">
+              <a:lnSpc>
+                <a:spcPct val="100000"/>
+              </a:lnSpc>
+              <a:buNone/>
+            </a:pPr>
+            <a:r>
+              <a:rPr lang="zh-CN" sz="2196" dirty="0">
+                <a:solidFill>
+                  <a:srgbClr val="1A1A18"/>
+                </a:solidFill>
+                <a:latin typeface="Segoe UI"/>
+                <a:ea typeface="Noto Sans CJK SC"/>
+                <a:cs typeface="Segoe UI"/>
+              </a:rPr>
+              <a:t>一次磁盘 I/O 往往比一次内存比较贵</a:t>
+            </a:r>
+            <a:r>
+              <a:rPr lang="zh-CN" sz="2196" dirty="0" b="1">
+                <a:solidFill>
+                  <a:srgbClr val="8A4B2A"/>
+                </a:solidFill>
+                <a:latin typeface="Segoe UI"/>
+                <a:ea typeface="Noto Sans CJK SC"/>
+                <a:cs typeface="Segoe UI"/>
+              </a:rPr>
+              <a:t>几个数量级</a:t>
+            </a:r>
+            <a:r>
+              <a:rPr lang="zh-CN" sz="2196" dirty="0">
+                <a:solidFill>
+                  <a:srgbClr val="1A1A18"/>
+                </a:solidFill>
+                <a:latin typeface="Segoe UI"/>
+                <a:ea typeface="Noto Sans CJK SC"/>
+                <a:cs typeface="Segoe UI"/>
+              </a:rPr>
+              <a:t>—— 所以第 9、11 章数的是</a:t>
+            </a:r>
+            <a:r>
+              <a:rPr lang="zh-CN" sz="2196" dirty="0" b="1">
+                <a:solidFill>
+                  <a:srgbClr val="8A4B2A"/>
+                </a:solidFill>
+                <a:latin typeface="Segoe UI"/>
+                <a:ea typeface="Noto Sans CJK SC"/>
+                <a:cs typeface="Segoe UI"/>
+              </a:rPr>
+              <a:t>访外页数</a:t>
+            </a:r>
+            <a:r>
+              <a:rPr lang="zh-CN" sz="2196" dirty="0">
+                <a:solidFill>
+                  <a:srgbClr val="1A1A18"/>
+                </a:solidFill>
+                <a:latin typeface="Segoe UI"/>
+                <a:ea typeface="Noto Sans CJK SC"/>
+                <a:cs typeface="Segoe UI"/>
+              </a:rPr>
+              <a:t>，不是比较次数。</a:t>
+            </a:r>
+          </a:p>
+        </p:txBody>
+      </p:sp>
+      <p:sp>
+        <p:nvSpPr>
+          <p:cNvPr id="8" name="正文"/>
+          <p:cNvSpPr txBox="1"/>
+          <p:nvPr/>
+        </p:nvSpPr>
+        <p:spPr>
+          <a:xfrm>
+            <a:off x="566928" y="4461925"/>
+            <a:ext cx="11058144" cy="747430"/>
+          </a:xfrm>
+          <a:prstGeom prst="rect">
+            <a:avLst/>
+          </a:prstGeom>
+          <a:noFill/>
+        </p:spPr>
+        <p:txBody>
+          <a:bodyPr wrap="square" lIns="0" tIns="0" rIns="0" bIns="0">
+            <a:noAutofit/>
+          </a:bodyPr>
+          <a:lstStyle/>
+          <a:p>
+            <a:pPr marL="0" indent="0" lvl="0">
+              <a:lnSpc>
+                <a:spcPct val="100000"/>
+              </a:lnSpc>
+              <a:buNone/>
+            </a:pPr>
+            <a:r>
+              <a:rPr lang="zh-CN" sz="2196" dirty="0">
+                <a:solidFill>
+                  <a:srgbClr val="1A1A18"/>
+                </a:solidFill>
+                <a:latin typeface="Segoe UI"/>
+                <a:ea typeface="Noto Sans CJK SC"/>
+                <a:cs typeface="Segoe UI"/>
+              </a:rPr>
+              <a:t>回到 1.1 节：只有五个经纪人、要任意两点最短路 → </a:t>
+            </a:r>
+            <a:r>
+              <a:rPr lang="zh-CN" sz="2196" dirty="0" b="1">
+                <a:solidFill>
+                  <a:srgbClr val="8A4B2A"/>
+                </a:solidFill>
+                <a:latin typeface="Segoe UI"/>
+                <a:ea typeface="Noto Sans CJK SC"/>
+                <a:cs typeface="Segoe UI"/>
+              </a:rPr>
+              <a:t>相邻矩阵 + Floyd</a:t>
+            </a:r>
+            <a:r>
+              <a:rPr lang="zh-CN" sz="2196" dirty="0">
+                <a:solidFill>
+                  <a:srgbClr val="1A1A18"/>
+                </a:solidFill>
+                <a:latin typeface="Segoe UI"/>
+                <a:ea typeface="Noto Sans CJK SC"/>
+                <a:cs typeface="Segoe UI"/>
+              </a:rPr>
+              <a:t>，实现简单，</a:t>
+            </a:r>
+            <a:r>
+              <a:rPr lang="zh-CN" sz="2196" dirty="0" i="1">
+                <a:solidFill>
+                  <a:srgbClr val="1A1A18"/>
+                </a:solidFill>
+                <a:latin typeface="Segoe UI"/>
+                <a:ea typeface="Noto Sans CJK SC"/>
+                <a:cs typeface="Segoe UI"/>
+              </a:rPr>
+              <a:t>n = 5</a:t>
+            </a:r>
+            <a:r>
+              <a:rPr lang="zh-CN" sz="2196" dirty="0">
+                <a:solidFill>
+                  <a:srgbClr val="1A1A18"/>
+                </a:solidFill>
+                <a:latin typeface="Segoe UI"/>
+                <a:ea typeface="Noto Sans CJK SC"/>
+                <a:cs typeface="Segoe UI"/>
+              </a:rPr>
+              <a:t> 时三重循环可以忽略。</a:t>
+            </a:r>
+          </a:p>
+        </p:txBody>
+      </p:sp>
+      <p:sp>
+        <p:nvSpPr>
+          <p:cNvPr id="9" name="正文"/>
+          <p:cNvSpPr txBox="1"/>
+          <p:nvPr/>
+        </p:nvSpPr>
+        <p:spPr>
+          <a:xfrm>
+            <a:off x="566928" y="5271331"/>
+            <a:ext cx="11058144" cy="373715"/>
+          </a:xfrm>
+          <a:prstGeom prst="rect">
+            <a:avLst/>
+          </a:prstGeom>
+          <a:noFill/>
+        </p:spPr>
+        <p:txBody>
+          <a:bodyPr wrap="square" lIns="0" tIns="0" rIns="0" bIns="0">
+            <a:noAutofit/>
+          </a:bodyPr>
+          <a:lstStyle/>
+          <a:p>
+            <a:pPr marL="0" indent="0" lvl="0">
+              <a:lnSpc>
+                <a:spcPct val="100000"/>
+              </a:lnSpc>
+              <a:buNone/>
+            </a:pPr>
+            <a:r>
+              <a:rPr lang="zh-CN" sz="2196" dirty="0">
+                <a:solidFill>
+                  <a:srgbClr val="1A1A18"/>
+                </a:solidFill>
+                <a:latin typeface="Segoe UI"/>
+                <a:ea typeface="Noto Sans CJK SC"/>
+                <a:cs typeface="Segoe UI"/>
+              </a:rPr>
+              <a:t>换成顶点很多、边很少、只问单源 → 就该是</a:t>
+            </a:r>
+            <a:r>
+              <a:rPr lang="zh-CN" sz="2196" dirty="0" b="1">
+                <a:solidFill>
+                  <a:srgbClr val="8A4B2A"/>
+                </a:solidFill>
+                <a:latin typeface="Segoe UI"/>
+                <a:ea typeface="Noto Sans CJK SC"/>
+                <a:cs typeface="Segoe UI"/>
+              </a:rPr>
+              <a:t>邻接表 + Dijkstra</a:t>
+            </a:r>
+            <a:r>
+              <a:rPr lang="zh-CN" sz="2196" dirty="0">
+                <a:solidFill>
+                  <a:srgbClr val="1A1A18"/>
+                </a:solidFill>
+                <a:latin typeface="Segoe UI"/>
+                <a:ea typeface="Noto Sans CJK SC"/>
+                <a:cs typeface="Segoe UI"/>
+              </a:rPr>
+              <a:t>。</a:t>
+            </a:r>
+          </a:p>
+        </p:txBody>
+      </p:sp>
+      <p:sp>
+        <p:nvSpPr>
+          <p:cNvPr id="10" name="正文"/>
+          <p:cNvSpPr txBox="1"/>
+          <p:nvPr/>
+        </p:nvSpPr>
+        <p:spPr>
+          <a:xfrm>
+            <a:off x="566928" y="5707022"/>
+            <a:ext cx="11058144" cy="373715"/>
+          </a:xfrm>
+          <a:prstGeom prst="rect">
+            <a:avLst/>
+          </a:prstGeom>
+          <a:noFill/>
+        </p:spPr>
+        <p:txBody>
+          <a:bodyPr wrap="square" lIns="0" tIns="0" rIns="0" bIns="0">
+            <a:noAutofit/>
+          </a:bodyPr>
+          <a:lstStyle/>
+          <a:p>
+            <a:pPr marL="0" indent="0" lvl="0">
+              <a:lnSpc>
+                <a:spcPct val="100000"/>
+              </a:lnSpc>
+              <a:buNone/>
+            </a:pPr>
+            <a:r>
+              <a:rPr lang="zh-CN" sz="2196" dirty="0" b="1">
+                <a:solidFill>
+                  <a:srgbClr val="8A4B2A"/>
+                </a:solidFill>
+                <a:latin typeface="Segoe UI"/>
+                <a:ea typeface="Noto Sans CJK SC"/>
+                <a:cs typeface="Segoe UI"/>
+              </a:rPr>
+              <a:t>同一个问题，规模一变，答案就变。</a:t>
+            </a:r>
+            <a:r>
+              <a:rPr lang="zh-CN" sz="2196" dirty="0">
+                <a:solidFill>
+                  <a:srgbClr val="1A1A18"/>
+                </a:solidFill>
+                <a:latin typeface="Segoe UI"/>
+                <a:ea typeface="Noto Sans CJK SC"/>
+                <a:cs typeface="Segoe UI"/>
+              </a:rPr>
+              <a:t> 后面每一章都会再做一次这样的取舍。</a:t>
+            </a:r>
+          </a:p>
+        </p:txBody>
+      </p:sp>
+      <p:sp>
+        <p:nvSpPr>
+          <p:cNvPr id="11" name="页脚"/>
+          <p:cNvSpPr txBox="1"/>
+          <p:nvPr/>
+        </p:nvSpPr>
+        <p:spPr>
+          <a:xfrm>
+            <a:off x="566928" y="6419088"/>
+            <a:ext cx="7740700" cy="274320"/>
+          </a:xfrm>
+          <a:prstGeom prst="rect">
+            <a:avLst/>
+          </a:prstGeom>
+          <a:noFill/>
+        </p:spPr>
+        <p:txBody>
+          <a:bodyPr wrap="square" lIns="0" tIns="0" rIns="0" bIns="0">
+            <a:noAutofit/>
+          </a:bodyPr>
+          <a:lstStyle/>
+          <a:p>
+            <a:pPr marL="0" indent="0" lvl="0">
+              <a:lnSpc>
+                <a:spcPct val="100000"/>
+              </a:lnSpc>
+              <a:buNone/>
+            </a:pPr>
+            <a:r>
+              <a:rPr lang="zh-CN" sz="1000" dirty="0">
+                <a:solidFill>
+                  <a:srgbClr val="6B6B66"/>
+                </a:solidFill>
+                <a:latin typeface="Segoe UI"/>
+                <a:ea typeface="Noto Sans CJK SC"/>
+                <a:cs typeface="Segoe UI"/>
+              </a:rPr>
+              <a:t>第1章 概论</a:t>
+            </a:r>
+          </a:p>
+        </p:txBody>
+      </p:sp>
+      <p:sp>
+        <p:nvSpPr>
+          <p:cNvPr id="12" name="页码"/>
+          <p:cNvSpPr txBox="1"/>
+          <p:nvPr/>
+        </p:nvSpPr>
+        <p:spPr>
+          <a:xfrm>
+            <a:off x="8307628" y="6419088"/>
+            <a:ext cx="3317443" cy="274320"/>
+          </a:xfrm>
+          <a:prstGeom prst="rect">
+            <a:avLst/>
+          </a:prstGeom>
+          <a:noFill/>
+        </p:spPr>
+        <p:txBody>
+          <a:bodyPr wrap="square" lIns="0" tIns="0" rIns="0" bIns="0">
+            <a:noAutofit/>
+          </a:bodyPr>
+          <a:lstStyle/>
+          <a:p>
             <a:pPr marL="0" indent="0" lvl="0" algn="r">
               <a:lnSpc>
                 <a:spcPct val="100000"/>
@@ -8966,7 +9727,7 @@
                 <a:ea typeface="Noto Sans CJK SC"/>
                 <a:cs typeface="Segoe UI"/>
               </a:rPr>
-              <a:t>19 / 28</a:t>
+              <a:t>19 / 29</a:t>
             </a:r>
           </a:p>
         </p:txBody>
@@ -9410,7 +10171,7 @@
                 <a:ea typeface="Noto Sans CJK SC"/>
                 <a:cs typeface="Segoe UI"/>
               </a:rPr>
-              <a:t>2 / 28</a:t>
+              <a:t>2 / 29</a:t>
             </a:r>
           </a:p>
         </p:txBody>
@@ -9474,7 +10235,7 @@
                 <a:ea typeface="Noto Sans CJK SC"/>
                 <a:cs typeface="Segoe UI"/>
               </a:rPr>
-              <a:t>课堂例题：五个城市的最短路</a:t>
+              <a:t>课堂讲解卡：从问题到算法</a:t>
             </a:r>
           </a:p>
         </p:txBody>
@@ -9515,7 +10276,7 @@
         <p:spPr>
           <a:xfrm>
             <a:off x="566928" y="1946148"/>
-            <a:ext cx="11058144" cy="398221"/>
+            <a:ext cx="11058144" cy="796442"/>
           </a:xfrm>
           <a:prstGeom prst="rect">
             <a:avLst/>
@@ -9543,7 +10304,7 @@
                 <a:ea typeface="Noto Sans CJK SC"/>
                 <a:cs typeface="Segoe UI"/>
               </a:rPr>
-              <a:t>把城市当顶点、道路当带权边；邻接矩阵负责存图，Floyd 负责逐步允许中间顶点。</a:t>
+              <a:t>先写清楚三件事：输入是什么、输出是什么、允许哪些操作。再选能让主要操作便宜的数据结构，最后才写循环。</a:t>
             </a:r>
           </a:p>
         </p:txBody>
@@ -9556,8 +10317,8 @@
         </p:nvSpPr>
         <p:spPr>
           <a:xfrm>
-            <a:off x="566928" y="2476449"/>
-            <a:ext cx="11058144" cy="740054"/>
+            <a:off x="566928" y="2874670"/>
+            <a:ext cx="11058144" cy="470611"/>
           </a:xfrm>
           <a:prstGeom prst="roundRect">
             <a:avLst>
@@ -9594,40 +10355,21 @@
                 <a:ea typeface="Noto Sans Mono CJK SC"/>
                 <a:cs typeface="Noto Sans Mono CJK SC"/>
               </a:rPr>
-              <a:t>D^(k)[i][j] = min(D^(k-1)[i][j],</a:t>
-            </a:r>
-          </a:p>
-          <a:p>
-            <a:pPr marL="0" indent="0" lvl="0">
-              <a:lnSpc>
-                <a:spcPct val="104000"/>
-              </a:lnSpc>
-              <a:buNone/>
-            </a:pPr>
-            <a:r>
-              <a:rPr lang="zh-CN" sz="1560" dirty="0">
-                <a:solidFill>
-                  <a:srgbClr val="1A1A18"/>
-                </a:solidFill>
-                <a:latin typeface="Noto Sans Mono CJK SC"/>
-                <a:ea typeface="Noto Sans Mono CJK SC"/>
-                <a:cs typeface="Noto Sans Mono CJK SC"/>
-              </a:rPr>
-              <a:t>                   D^(k-1)[i][k] + D^(k-1)[k][j])</a:t>
-            </a:r>
-          </a:p>
-        </p:txBody>
-      </p:sp>
-      <p:sp>
-        <p:nvSpPr>
-          <p:cNvPr id="6" name="正文"/>
+              <a:t>需求 -&gt; 抽象数据类型 -&gt; 存储结构 -&gt; 算法 -&gt; 复杂度 -&gt; 测试</a:t>
+            </a:r>
+          </a:p>
+        </p:txBody>
+      </p:sp>
+      <p:sp>
+        <p:nvSpPr>
+          <p:cNvPr id="6" name="页脚"/>
           <p:cNvSpPr txBox="1"/>
           <p:nvPr/>
         </p:nvSpPr>
         <p:spPr>
           <a:xfrm>
-            <a:off x="566928" y="3282543"/>
-            <a:ext cx="11058144" cy="398221"/>
+            <a:off x="566928" y="6419088"/>
+            <a:ext cx="7740700" cy="274320"/>
           </a:xfrm>
           <a:prstGeom prst="rect">
             <a:avLst/>
@@ -9647,29 +10389,29 @@
               <a:buNone/>
             </a:pPr>
             <a:r>
-              <a:rPr lang="zh-CN" sz="2340" dirty="0">
-                <a:solidFill>
-                  <a:srgbClr val="1A1A18"/>
-                </a:solidFill>
-                <a:latin typeface="Segoe UI"/>
-                <a:ea typeface="Noto Sans CJK SC"/>
-                <a:cs typeface="Segoe UI"/>
-              </a:rPr>
-              <a:t>课堂上让学生先猜“只允许经过 1 个中间点”时哪些距离会改变，再运行实现核对。</a:t>
-            </a:r>
-          </a:p>
-        </p:txBody>
-      </p:sp>
-      <p:sp>
-        <p:nvSpPr>
-          <p:cNvPr id="7" name="页脚"/>
+              <a:rPr lang="zh-CN" sz="1000" dirty="0">
+                <a:solidFill>
+                  <a:srgbClr val="6B6B66"/>
+                </a:solidFill>
+                <a:latin typeface="Segoe UI"/>
+                <a:ea typeface="Noto Sans CJK SC"/>
+                <a:cs typeface="Segoe UI"/>
+              </a:rPr>
+              <a:t>第1章 概论</a:t>
+            </a:r>
+          </a:p>
+        </p:txBody>
+      </p:sp>
+      <p:sp>
+        <p:nvSpPr>
+          <p:cNvPr id="7" name="页码"/>
           <p:cNvSpPr txBox="1"/>
           <p:nvPr/>
         </p:nvSpPr>
         <p:spPr>
           <a:xfrm>
-            <a:off x="566928" y="6419088"/>
-            <a:ext cx="7740700" cy="274320"/>
+            <a:off x="8307628" y="6419088"/>
+            <a:ext cx="3317443" cy="274320"/>
           </a:xfrm>
           <a:prstGeom prst="rect">
             <a:avLst/>
@@ -9682,7 +10424,7 @@
           </a:bodyPr>
           <a:lstStyle/>
           <a:p>
-            <a:pPr marL="0" indent="0" lvl="0">
+            <a:pPr marL="0" indent="0" lvl="0" algn="r">
               <a:lnSpc>
                 <a:spcPct val="100000"/>
               </a:lnSpc>
@@ -9697,49 +10439,7 @@
                 <a:ea typeface="Noto Sans CJK SC"/>
                 <a:cs typeface="Segoe UI"/>
               </a:rPr>
-              <a:t>第1章 概论</a:t>
-            </a:r>
-          </a:p>
-        </p:txBody>
-      </p:sp>
-      <p:sp>
-        <p:nvSpPr>
-          <p:cNvPr id="8" name="页码"/>
-          <p:cNvSpPr txBox="1"/>
-          <p:nvPr/>
-        </p:nvSpPr>
-        <p:spPr>
-          <a:xfrm>
-            <a:off x="8307628" y="6419088"/>
-            <a:ext cx="3317443" cy="274320"/>
-          </a:xfrm>
-          <a:prstGeom prst="rect">
-            <a:avLst/>
-          </a:prstGeom>
-          <a:noFill/>
-        </p:spPr>
-        <p:txBody>
-          <a:bodyPr wrap="square" lIns="0" tIns="0" rIns="0" bIns="0">
-            <a:noAutofit/>
-          </a:bodyPr>
-          <a:lstStyle/>
-          <a:p>
-            <a:pPr marL="0" indent="0" lvl="0" algn="r">
-              <a:lnSpc>
-                <a:spcPct val="100000"/>
-              </a:lnSpc>
-              <a:buNone/>
-            </a:pPr>
-            <a:r>
-              <a:rPr lang="zh-CN" sz="1000" dirty="0">
-                <a:solidFill>
-                  <a:srgbClr val="6B6B66"/>
-                </a:solidFill>
-                <a:latin typeface="Segoe UI"/>
-                <a:ea typeface="Noto Sans CJK SC"/>
-                <a:cs typeface="Segoe UI"/>
-              </a:rPr>
-              <a:t>20 / 28</a:t>
+              <a:t>20 / 29</a:t>
             </a:r>
           </a:p>
         </p:txBody>
@@ -9803,7 +10503,7 @@
                 <a:ea typeface="Noto Sans CJK SC"/>
                 <a:cs typeface="Segoe UI"/>
               </a:rPr>
-              <a:t>课堂例题答案：Floyd 的三轮更新</a:t>
+              <a:t>课堂例题：五个城市的最短路</a:t>
             </a:r>
           </a:p>
         </p:txBody>
@@ -9837,14 +10537,14 @@
       </p:sp>
       <p:sp>
         <p:nvSpPr>
-          <p:cNvPr id="4" name="要点"/>
+          <p:cNvPr id="4" name="正文"/>
           <p:cNvSpPr txBox="1"/>
           <p:nvPr/>
         </p:nvSpPr>
         <p:spPr>
           <a:xfrm>
-            <a:off x="566928" y="1995678"/>
-            <a:ext cx="11058144" cy="1925724"/>
+            <a:off x="566928" y="1946148"/>
+            <a:ext cx="11058144" cy="398221"/>
           </a:xfrm>
           <a:prstGeom prst="rect">
             <a:avLst/>
@@ -9861,156 +10561,102 @@
               <a:lnSpc>
                 <a:spcPct val="100000"/>
               </a:lnSpc>
-              <a:spcBef>
-                <a:spcPts val="655"/>
-              </a:spcBef>
-              <a:buNone/>
-            </a:pPr>
-            <a:r>
-              <a:rPr lang="zh-CN" sz="2340" dirty="0" b="1">
-                <a:solidFill>
-                  <a:srgbClr val="8A4B2A"/>
-                </a:solidFill>
-                <a:latin typeface="Segoe UI"/>
-                <a:ea typeface="Noto Sans CJK SC"/>
-                <a:cs typeface="Segoe UI"/>
-              </a:rPr>
-              <a:t>1. </a:t>
-            </a:r>
+              <a:buNone/>
+            </a:pPr>
             <a:r>
               <a:rPr lang="zh-CN" sz="2340" dirty="0">
                 <a:solidFill>
-                  <a:srgbClr val="2C6B57"/>
+                  <a:srgbClr val="1A1A18"/>
+                </a:solidFill>
+                <a:latin typeface="Segoe UI"/>
+                <a:ea typeface="Noto Sans CJK SC"/>
+                <a:cs typeface="Segoe UI"/>
+              </a:rPr>
+              <a:t>把城市当顶点、道路当带权边；邻接矩阵负责存图，Floyd 负责逐步允许中间顶点。</a:t>
+            </a:r>
+          </a:p>
+        </p:txBody>
+      </p:sp>
+      <p:sp>
+        <p:nvSpPr>
+          <p:cNvPr id="5" name="代码"/>
+          <p:cNvSpPr txBox="1"/>
+          <p:nvPr/>
+        </p:nvSpPr>
+        <p:spPr>
+          <a:xfrm>
+            <a:off x="566928" y="2476449"/>
+            <a:ext cx="11058144" cy="740054"/>
+          </a:xfrm>
+          <a:prstGeom prst="roundRect">
+            <a:avLst>
+              <a:gd name="adj" fmla="val 6000"/>
+            </a:avLst>
+          </a:prstGeom>
+          <a:solidFill>
+            <a:srgbClr val="F5F4F0"/>
+          </a:solidFill>
+          <a:ln w="9525">
+            <a:solidFill>
+              <a:srgbClr val="DCDCD6"/>
+            </a:solidFill>
+          </a:ln>
+        </p:spPr>
+        <p:txBody>
+          <a:bodyPr wrap="square" lIns="100584" tIns="100584" rIns="100584" bIns="100584">
+            <a:noAutofit/>
+          </a:bodyPr>
+          <a:lstStyle/>
+          <a:p>
+            <a:pPr marL="0" indent="0" lvl="0">
+              <a:lnSpc>
+                <a:spcPct val="104000"/>
+              </a:lnSpc>
+              <a:buNone/>
+            </a:pPr>
+            <a:r>
+              <a:rPr lang="zh-CN" sz="1560" dirty="0">
+                <a:solidFill>
+                  <a:srgbClr val="1A1A18"/>
                 </a:solidFill>
                 <a:latin typeface="Noto Sans Mono CJK SC"/>
                 <a:ea typeface="Noto Sans Mono CJK SC"/>
                 <a:cs typeface="Noto Sans Mono CJK SC"/>
               </a:rPr>
-              <a:t>D^(0)</a:t>
-            </a:r>
-            <a:r>
-              <a:rPr lang="zh-CN" sz="2340" dirty="0">
-                <a:solidFill>
-                  <a:srgbClr val="1A1A18"/>
-                </a:solidFill>
-                <a:latin typeface="Segoe UI"/>
-                <a:ea typeface="Noto Sans CJK SC"/>
-                <a:cs typeface="Segoe UI"/>
-              </a:rPr>
-              <a:t> 只含直达边和 0。</a:t>
-            </a:r>
-          </a:p>
-          <a:p>
-            <a:pPr marL="0" indent="0" lvl="0">
-              <a:lnSpc>
-                <a:spcPct val="100000"/>
-              </a:lnSpc>
-              <a:spcBef>
-                <a:spcPts val="655"/>
-              </a:spcBef>
-              <a:buNone/>
-            </a:pPr>
-            <a:r>
-              <a:rPr lang="zh-CN" sz="2340" dirty="0" b="1">
-                <a:solidFill>
-                  <a:srgbClr val="8A4B2A"/>
-                </a:solidFill>
-                <a:latin typeface="Segoe UI"/>
-                <a:ea typeface="Noto Sans CJK SC"/>
-                <a:cs typeface="Segoe UI"/>
-              </a:rPr>
-              <a:t>2. </a:t>
-            </a:r>
-            <a:r>
-              <a:rPr lang="zh-CN" sz="2340" dirty="0">
-                <a:solidFill>
-                  <a:srgbClr val="1A1A18"/>
-                </a:solidFill>
-                <a:latin typeface="Segoe UI"/>
-                <a:ea typeface="Noto Sans CJK SC"/>
-                <a:cs typeface="Segoe UI"/>
-              </a:rPr>
-              <a:t>依次放开顶点 1、2、3、4，检查经过该顶点是否更短。</a:t>
-            </a:r>
-          </a:p>
-          <a:p>
-            <a:pPr marL="0" indent="0" lvl="0">
-              <a:lnSpc>
-                <a:spcPct val="100000"/>
-              </a:lnSpc>
-              <a:spcBef>
-                <a:spcPts val="655"/>
-              </a:spcBef>
-              <a:buNone/>
-            </a:pPr>
-            <a:r>
-              <a:rPr lang="zh-CN" sz="2340" dirty="0" b="1">
-                <a:solidFill>
-                  <a:srgbClr val="8A4B2A"/>
-                </a:solidFill>
-                <a:latin typeface="Segoe UI"/>
-                <a:ea typeface="Noto Sans CJK SC"/>
-                <a:cs typeface="Segoe UI"/>
-              </a:rPr>
-              <a:t>3. </a:t>
-            </a:r>
-            <a:r>
-              <a:rPr lang="zh-CN" sz="2340" dirty="0">
-                <a:solidFill>
-                  <a:srgbClr val="1A1A18"/>
-                </a:solidFill>
-                <a:latin typeface="Segoe UI"/>
-                <a:ea typeface="Noto Sans CJK SC"/>
-                <a:cs typeface="Segoe UI"/>
-              </a:rPr>
-              <a:t>每轮保持“只允许前 k 个中间点”的不变量。</a:t>
-            </a:r>
-          </a:p>
-          <a:p>
-            <a:pPr marL="0" indent="0" lvl="0">
-              <a:lnSpc>
-                <a:spcPct val="100000"/>
-              </a:lnSpc>
-              <a:spcBef>
-                <a:spcPts val="655"/>
-              </a:spcBef>
-              <a:buNone/>
-            </a:pPr>
-            <a:r>
-              <a:rPr lang="zh-CN" sz="2340" dirty="0" b="1">
-                <a:solidFill>
-                  <a:srgbClr val="8A4B2A"/>
-                </a:solidFill>
-                <a:latin typeface="Segoe UI"/>
-                <a:ea typeface="Noto Sans CJK SC"/>
-                <a:cs typeface="Segoe UI"/>
-              </a:rPr>
-              <a:t>4. </a:t>
-            </a:r>
-            <a:r>
-              <a:rPr lang="zh-CN" sz="2340" dirty="0">
-                <a:solidFill>
-                  <a:srgbClr val="1A1A18"/>
-                </a:solidFill>
-                <a:latin typeface="Segoe UI"/>
-                <a:ea typeface="Noto Sans CJK SC"/>
-                <a:cs typeface="Segoe UI"/>
-              </a:rPr>
-              <a:t>最终矩阵就是所有中间点都允许时的最短距离。</a:t>
-            </a:r>
-          </a:p>
-        </p:txBody>
-      </p:sp>
-      <p:sp>
-        <p:nvSpPr>
-          <p:cNvPr id="5" name="页脚"/>
+              <a:t>D^(k)[i][j] = min(D^(k-1)[i][j],</a:t>
+            </a:r>
+          </a:p>
+          <a:p>
+            <a:pPr marL="0" indent="0" lvl="0">
+              <a:lnSpc>
+                <a:spcPct val="104000"/>
+              </a:lnSpc>
+              <a:buNone/>
+            </a:pPr>
+            <a:r>
+              <a:rPr lang="zh-CN" sz="1560" dirty="0">
+                <a:solidFill>
+                  <a:srgbClr val="1A1A18"/>
+                </a:solidFill>
+                <a:latin typeface="Noto Sans Mono CJK SC"/>
+                <a:ea typeface="Noto Sans Mono CJK SC"/>
+                <a:cs typeface="Noto Sans Mono CJK SC"/>
+              </a:rPr>
+              <a:t>                   D^(k-1)[i][k] + D^(k-1)[k][j])</a:t>
+            </a:r>
+          </a:p>
+        </p:txBody>
+      </p:sp>
+      <p:sp>
+        <p:nvSpPr>
+          <p:cNvPr id="6" name="正文"/>
           <p:cNvSpPr txBox="1"/>
           <p:nvPr/>
         </p:nvSpPr>
         <p:spPr>
           <a:xfrm>
-            <a:off x="566928" y="6419088"/>
-            <a:ext cx="7740700" cy="274320"/>
+            <a:off x="566928" y="3282543"/>
+            <a:ext cx="11058144" cy="398221"/>
           </a:xfrm>
           <a:prstGeom prst="rect">
             <a:avLst/>
@@ -10030,29 +10676,29 @@
               <a:buNone/>
             </a:pPr>
             <a:r>
-              <a:rPr lang="zh-CN" sz="1000" dirty="0">
-                <a:solidFill>
-                  <a:srgbClr val="6B6B66"/>
-                </a:solidFill>
-                <a:latin typeface="Segoe UI"/>
-                <a:ea typeface="Noto Sans CJK SC"/>
-                <a:cs typeface="Segoe UI"/>
-              </a:rPr>
-              <a:t>第1章 概论</a:t>
-            </a:r>
-          </a:p>
-        </p:txBody>
-      </p:sp>
-      <p:sp>
-        <p:nvSpPr>
-          <p:cNvPr id="6" name="页码"/>
+              <a:rPr lang="zh-CN" sz="2340" dirty="0">
+                <a:solidFill>
+                  <a:srgbClr val="1A1A18"/>
+                </a:solidFill>
+                <a:latin typeface="Segoe UI"/>
+                <a:ea typeface="Noto Sans CJK SC"/>
+                <a:cs typeface="Segoe UI"/>
+              </a:rPr>
+              <a:t>课堂上让学生先猜“只允许经过 1 个中间点”时哪些距离会改变，再运行实现核对。</a:t>
+            </a:r>
+          </a:p>
+        </p:txBody>
+      </p:sp>
+      <p:sp>
+        <p:nvSpPr>
+          <p:cNvPr id="7" name="页脚"/>
           <p:cNvSpPr txBox="1"/>
           <p:nvPr/>
         </p:nvSpPr>
         <p:spPr>
           <a:xfrm>
-            <a:off x="8307628" y="6419088"/>
-            <a:ext cx="3317443" cy="274320"/>
+            <a:off x="566928" y="6419088"/>
+            <a:ext cx="7740700" cy="274320"/>
           </a:xfrm>
           <a:prstGeom prst="rect">
             <a:avLst/>
@@ -10065,6 +10711,48 @@
           </a:bodyPr>
           <a:lstStyle/>
           <a:p>
+            <a:pPr marL="0" indent="0" lvl="0">
+              <a:lnSpc>
+                <a:spcPct val="100000"/>
+              </a:lnSpc>
+              <a:buNone/>
+            </a:pPr>
+            <a:r>
+              <a:rPr lang="zh-CN" sz="1000" dirty="0">
+                <a:solidFill>
+                  <a:srgbClr val="6B6B66"/>
+                </a:solidFill>
+                <a:latin typeface="Segoe UI"/>
+                <a:ea typeface="Noto Sans CJK SC"/>
+                <a:cs typeface="Segoe UI"/>
+              </a:rPr>
+              <a:t>第1章 概论</a:t>
+            </a:r>
+          </a:p>
+        </p:txBody>
+      </p:sp>
+      <p:sp>
+        <p:nvSpPr>
+          <p:cNvPr id="8" name="页码"/>
+          <p:cNvSpPr txBox="1"/>
+          <p:nvPr/>
+        </p:nvSpPr>
+        <p:spPr>
+          <a:xfrm>
+            <a:off x="8307628" y="6419088"/>
+            <a:ext cx="3317443" cy="274320"/>
+          </a:xfrm>
+          <a:prstGeom prst="rect">
+            <a:avLst/>
+          </a:prstGeom>
+          <a:noFill/>
+        </p:spPr>
+        <p:txBody>
+          <a:bodyPr wrap="square" lIns="0" tIns="0" rIns="0" bIns="0">
+            <a:noAutofit/>
+          </a:bodyPr>
+          <a:lstStyle/>
+          <a:p>
             <a:pPr marL="0" indent="0" lvl="0" algn="r">
               <a:lnSpc>
                 <a:spcPct val="100000"/>
@@ -10080,7 +10768,7 @@
                 <a:ea typeface="Noto Sans CJK SC"/>
                 <a:cs typeface="Segoe UI"/>
               </a:rPr>
-              <a:t>21 / 28</a:t>
+              <a:t>21 / 29</a:t>
             </a:r>
           </a:p>
         </p:txBody>
@@ -10144,7 +10832,7 @@
                 <a:ea typeface="Noto Sans CJK SC"/>
                 <a:cs typeface="Segoe UI"/>
               </a:rPr>
-              <a:t>课末自检</a:t>
+              <a:t>课堂例题答案：Floyd 的三轮更新</a:t>
             </a:r>
           </a:p>
         </p:txBody>
@@ -10198,45 +10886,70 @@
           </a:bodyPr>
           <a:lstStyle/>
           <a:p>
-            <a:pPr marL="270000" indent="-230000" lvl="0">
+            <a:pPr marL="0" indent="0" lvl="0">
               <a:lnSpc>
                 <a:spcPct val="100000"/>
               </a:lnSpc>
               <a:spcBef>
                 <a:spcPts val="655"/>
               </a:spcBef>
-              <a:buClr>
-                <a:srgbClr val="8A4B2A"/>
-              </a:buClr>
-              <a:buFont typeface="Arial"/>
-              <a:buChar char="●"/>
-            </a:pPr>
+              <a:buNone/>
+            </a:pPr>
+            <a:r>
+              <a:rPr lang="zh-CN" sz="2340" dirty="0" b="1">
+                <a:solidFill>
+                  <a:srgbClr val="8A4B2A"/>
+                </a:solidFill>
+                <a:latin typeface="Segoe UI"/>
+                <a:ea typeface="Noto Sans CJK SC"/>
+                <a:cs typeface="Segoe UI"/>
+              </a:rPr>
+              <a:t>1. </a:t>
+            </a:r>
             <a:r>
               <a:rPr lang="zh-CN" sz="2340" dirty="0">
                 <a:solidFill>
-                  <a:srgbClr val="1A1A18"/>
-                </a:solidFill>
-                <a:latin typeface="Segoe UI"/>
-                <a:ea typeface="Noto Sans CJK SC"/>
-                <a:cs typeface="Segoe UI"/>
-              </a:rPr>
-              <a:t>能否区分逻辑结构、存储结构和算法？</a:t>
-            </a:r>
-          </a:p>
-          <a:p>
-            <a:pPr marL="270000" indent="-230000" lvl="0">
+                  <a:srgbClr val="2C6B57"/>
+                </a:solidFill>
+                <a:latin typeface="Noto Sans Mono CJK SC"/>
+                <a:ea typeface="Noto Sans Mono CJK SC"/>
+                <a:cs typeface="Noto Sans Mono CJK SC"/>
+              </a:rPr>
+              <a:t>D^(0)</a:t>
+            </a:r>
+            <a:r>
+              <a:rPr lang="zh-CN" sz="2340" dirty="0">
+                <a:solidFill>
+                  <a:srgbClr val="1A1A18"/>
+                </a:solidFill>
+                <a:latin typeface="Segoe UI"/>
+                <a:ea typeface="Noto Sans CJK SC"/>
+                <a:cs typeface="Segoe UI"/>
+              </a:rPr>
+              <a:t> 只含直达边和 0。</a:t>
+            </a:r>
+          </a:p>
+          <a:p>
+            <a:pPr marL="0" indent="0" lvl="0">
               <a:lnSpc>
                 <a:spcPct val="100000"/>
               </a:lnSpc>
               <a:spcBef>
                 <a:spcPts val="655"/>
               </a:spcBef>
-              <a:buClr>
-                <a:srgbClr val="8A4B2A"/>
-              </a:buClr>
-              <a:buFont typeface="Arial"/>
-              <a:buChar char="●"/>
-            </a:pPr>
+              <a:buNone/>
+            </a:pPr>
+            <a:r>
+              <a:rPr lang="zh-CN" sz="2340" dirty="0" b="1">
+                <a:solidFill>
+                  <a:srgbClr val="8A4B2A"/>
+                </a:solidFill>
+                <a:latin typeface="Segoe UI"/>
+                <a:ea typeface="Noto Sans CJK SC"/>
+                <a:cs typeface="Segoe UI"/>
+              </a:rPr>
+              <a:t>2. </a:t>
+            </a:r>
             <a:r>
               <a:rPr lang="zh-CN" sz="2340" dirty="0">
                 <a:solidFill>
@@ -10246,23 +10959,30 @@
                 <a:ea typeface="Noto Sans CJK SC"/>
                 <a:cs typeface="Segoe UI"/>
               </a:rPr>
-              <a:t>能否解释为什么同一 ADT 可以有多种实现？</a:t>
-            </a:r>
-          </a:p>
-          <a:p>
-            <a:pPr marL="270000" indent="-230000" lvl="0">
+              <a:t>依次放开顶点 1、2、3、4，检查经过该顶点是否更短。</a:t>
+            </a:r>
+          </a:p>
+          <a:p>
+            <a:pPr marL="0" indent="0" lvl="0">
               <a:lnSpc>
                 <a:spcPct val="100000"/>
               </a:lnSpc>
               <a:spcBef>
                 <a:spcPts val="655"/>
               </a:spcBef>
-              <a:buClr>
-                <a:srgbClr val="8A4B2A"/>
-              </a:buClr>
-              <a:buFont typeface="Arial"/>
-              <a:buChar char="●"/>
-            </a:pPr>
+              <a:buNone/>
+            </a:pPr>
+            <a:r>
+              <a:rPr lang="zh-CN" sz="2340" dirty="0" b="1">
+                <a:solidFill>
+                  <a:srgbClr val="8A4B2A"/>
+                </a:solidFill>
+                <a:latin typeface="Segoe UI"/>
+                <a:ea typeface="Noto Sans CJK SC"/>
+                <a:cs typeface="Segoe UI"/>
+              </a:rPr>
+              <a:t>3. </a:t>
+            </a:r>
             <a:r>
               <a:rPr lang="zh-CN" sz="2340" dirty="0">
                 <a:solidFill>
@@ -10272,23 +10992,30 @@
                 <a:ea typeface="Noto Sans CJK SC"/>
                 <a:cs typeface="Segoe UI"/>
               </a:rPr>
-              <a:t>能否用大 O 比较两种方案，而不是只报一次运行时间？</a:t>
-            </a:r>
-          </a:p>
-          <a:p>
-            <a:pPr marL="270000" indent="-230000" lvl="0">
+              <a:t>每轮保持“只允许前 k 个中间点”的不变量。</a:t>
+            </a:r>
+          </a:p>
+          <a:p>
+            <a:pPr marL="0" indent="0" lvl="0">
               <a:lnSpc>
                 <a:spcPct val="100000"/>
               </a:lnSpc>
               <a:spcBef>
                 <a:spcPts val="655"/>
               </a:spcBef>
-              <a:buClr>
-                <a:srgbClr val="8A4B2A"/>
-              </a:buClr>
-              <a:buFont typeface="Arial"/>
-              <a:buChar char="●"/>
-            </a:pPr>
+              <a:buNone/>
+            </a:pPr>
+            <a:r>
+              <a:rPr lang="zh-CN" sz="2340" dirty="0" b="1">
+                <a:solidFill>
+                  <a:srgbClr val="8A4B2A"/>
+                </a:solidFill>
+                <a:latin typeface="Segoe UI"/>
+                <a:ea typeface="Noto Sans CJK SC"/>
+                <a:cs typeface="Segoe UI"/>
+              </a:rPr>
+              <a:t>4. </a:t>
+            </a:r>
             <a:r>
               <a:rPr lang="zh-CN" sz="2340" dirty="0">
                 <a:solidFill>
@@ -10298,7 +11025,7 @@
                 <a:ea typeface="Noto Sans CJK SC"/>
                 <a:cs typeface="Segoe UI"/>
               </a:rPr>
-              <a:t>能否给每个结论写一个最小反例？</a:t>
+              <a:t>最终矩阵就是所有中间点都允许时的最短距离。</a:t>
             </a:r>
           </a:p>
         </p:txBody>
@@ -10382,7 +11109,7 @@
                 <a:ea typeface="Noto Sans CJK SC"/>
                 <a:cs typeface="Segoe UI"/>
               </a:rPr>
-              <a:t>22 / 28</a:t>
+              <a:t>22 / 29</a:t>
             </a:r>
           </a:p>
         </p:txBody>
@@ -10446,7 +11173,7 @@
                 <a:ea typeface="Noto Sans CJK SC"/>
                 <a:cs typeface="Segoe UI"/>
               </a:rPr>
-              <a:t>课末自检参考答案</a:t>
+              <a:t>课末自检</a:t>
             </a:r>
           </a:p>
         </p:txBody>
@@ -10522,7 +11249,7 @@
                 <a:ea typeface="Noto Sans CJK SC"/>
                 <a:cs typeface="Segoe UI"/>
               </a:rPr>
-              <a:t>逻辑结构描述关系，存储结构描述布局，算法描述操作步骤。</a:t>
+              <a:t>能否区分逻辑结构、存储结构和算法？</a:t>
             </a:r>
           </a:p>
           <a:p>
@@ -10548,7 +11275,7 @@
                 <a:ea typeface="Noto Sans CJK SC"/>
                 <a:cs typeface="Segoe UI"/>
               </a:rPr>
-              <a:t>同一 ADT 可有数组、链表或索引等不同实现。</a:t>
+              <a:t>能否解释为什么同一 ADT 可以有多种实现？</a:t>
             </a:r>
           </a:p>
           <a:p>
@@ -10574,7 +11301,7 @@
                 <a:ea typeface="Noto Sans CJK SC"/>
                 <a:cs typeface="Segoe UI"/>
               </a:rPr>
-              <a:t>大 O 比较规模增长趋势，不能只看一次小输入的计时。</a:t>
+              <a:t>能否用大 O 比较两种方案，而不是只报一次运行时间？</a:t>
             </a:r>
           </a:p>
           <a:p>
@@ -10600,7 +11327,7 @@
                 <a:ea typeface="Noto Sans CJK SC"/>
                 <a:cs typeface="Segoe UI"/>
               </a:rPr>
-              <a:t>反例应针对结论边界，例如稠密图不适合邻接表的空间优势。</a:t>
+              <a:t>能否给每个结论写一个最小反例？</a:t>
             </a:r>
           </a:p>
         </p:txBody>
@@ -10684,7 +11411,7 @@
                 <a:ea typeface="Noto Sans CJK SC"/>
                 <a:cs typeface="Segoe UI"/>
               </a:rPr>
-              <a:t>23 / 28</a:t>
+              <a:t>23 / 29</a:t>
             </a:r>
           </a:p>
         </p:txBody>
@@ -10748,7 +11475,7 @@
                 <a:ea typeface="Noto Sans CJK SC"/>
                 <a:cs typeface="Segoe UI"/>
               </a:rPr>
-              <a:t>板书演算：Floyd 一次更新</a:t>
+              <a:t>课末自检参考答案</a:t>
             </a:r>
           </a:p>
         </p:txBody>
@@ -10782,14 +11509,14 @@
       </p:sp>
       <p:sp>
         <p:nvSpPr>
-          <p:cNvPr id="4" name="正文"/>
+          <p:cNvPr id="4" name="要点"/>
           <p:cNvSpPr txBox="1"/>
           <p:nvPr/>
         </p:nvSpPr>
         <p:spPr>
           <a:xfrm>
-            <a:off x="566928" y="1946148"/>
-            <a:ext cx="11058144" cy="796442"/>
+            <a:off x="566928" y="1995678"/>
+            <a:ext cx="11058144" cy="1925724"/>
           </a:xfrm>
           <a:prstGeom prst="rect">
             <a:avLst/>
@@ -10802,11 +11529,18 @@
           </a:bodyPr>
           <a:lstStyle/>
           <a:p>
-            <a:pPr marL="0" indent="0" lvl="0">
-              <a:lnSpc>
-                <a:spcPct val="100000"/>
-              </a:lnSpc>
-              <a:buNone/>
+            <a:pPr marL="270000" indent="-230000" lvl="0">
+              <a:lnSpc>
+                <a:spcPct val="100000"/>
+              </a:lnSpc>
+              <a:spcBef>
+                <a:spcPts val="655"/>
+              </a:spcBef>
+              <a:buClr>
+                <a:srgbClr val="8A4B2A"/>
+              </a:buClr>
+              <a:buFont typeface="Arial"/>
+              <a:buChar char="●"/>
             </a:pPr>
             <a:r>
               <a:rPr lang="zh-CN" sz="2340" dirty="0">
@@ -10817,19 +11551,49 @@
                 <a:ea typeface="Noto Sans CJK SC"/>
                 <a:cs typeface="Segoe UI"/>
               </a:rPr>
-              <a:t>取 </a:t>
-            </a:r>
+              <a:t>逻辑结构描述关系，存储结构描述布局，算法描述操作步骤。</a:t>
+            </a:r>
+          </a:p>
+          <a:p>
+            <a:pPr marL="270000" indent="-230000" lvl="0">
+              <a:lnSpc>
+                <a:spcPct val="100000"/>
+              </a:lnSpc>
+              <a:spcBef>
+                <a:spcPts val="655"/>
+              </a:spcBef>
+              <a:buClr>
+                <a:srgbClr val="8A4B2A"/>
+              </a:buClr>
+              <a:buFont typeface="Arial"/>
+              <a:buChar char="●"/>
+            </a:pPr>
             <a:r>
               <a:rPr lang="zh-CN" sz="2340" dirty="0">
                 <a:solidFill>
-                  <a:srgbClr val="2C6B57"/>
-                </a:solidFill>
-                <a:latin typeface="Noto Sans Mono CJK SC"/>
-                <a:ea typeface="Noto Sans Mono CJK SC"/>
-                <a:cs typeface="Noto Sans Mono CJK SC"/>
-              </a:rPr>
-              <a:t>D[0][2]=9</a:t>
-            </a:r>
+                  <a:srgbClr val="1A1A18"/>
+                </a:solidFill>
+                <a:latin typeface="Segoe UI"/>
+                <a:ea typeface="Noto Sans CJK SC"/>
+                <a:cs typeface="Segoe UI"/>
+              </a:rPr>
+              <a:t>同一 ADT 可有数组、链表或索引等不同实现。</a:t>
+            </a:r>
+          </a:p>
+          <a:p>
+            <a:pPr marL="270000" indent="-230000" lvl="0">
+              <a:lnSpc>
+                <a:spcPct val="100000"/>
+              </a:lnSpc>
+              <a:spcBef>
+                <a:spcPts val="655"/>
+              </a:spcBef>
+              <a:buClr>
+                <a:srgbClr val="8A4B2A"/>
+              </a:buClr>
+              <a:buFont typeface="Arial"/>
+              <a:buChar char="●"/>
+            </a:pPr>
             <a:r>
               <a:rPr lang="zh-CN" sz="2340" dirty="0">
                 <a:solidFill>
@@ -10839,73 +11603,33 @@
                 <a:ea typeface="Noto Sans CJK SC"/>
                 <a:cs typeface="Segoe UI"/>
               </a:rPr>
-              <a:t>、</a:t>
-            </a:r>
+              <a:t>大 O 比较规模增长趋势，不能只看一次小输入的计时。</a:t>
+            </a:r>
+          </a:p>
+          <a:p>
+            <a:pPr marL="270000" indent="-230000" lvl="0">
+              <a:lnSpc>
+                <a:spcPct val="100000"/>
+              </a:lnSpc>
+              <a:spcBef>
+                <a:spcPts val="655"/>
+              </a:spcBef>
+              <a:buClr>
+                <a:srgbClr val="8A4B2A"/>
+              </a:buClr>
+              <a:buFont typeface="Arial"/>
+              <a:buChar char="●"/>
+            </a:pPr>
             <a:r>
               <a:rPr lang="zh-CN" sz="2340" dirty="0">
                 <a:solidFill>
-                  <a:srgbClr val="2C6B57"/>
-                </a:solidFill>
-                <a:latin typeface="Noto Sans Mono CJK SC"/>
-                <a:ea typeface="Noto Sans Mono CJK SC"/>
-                <a:cs typeface="Noto Sans Mono CJK SC"/>
-              </a:rPr>
-              <a:t>D[0][1]=3</a:t>
-            </a:r>
-            <a:r>
-              <a:rPr lang="zh-CN" sz="2340" dirty="0">
-                <a:solidFill>
-                  <a:srgbClr val="1A1A18"/>
-                </a:solidFill>
-                <a:latin typeface="Segoe UI"/>
-                <a:ea typeface="Noto Sans CJK SC"/>
-                <a:cs typeface="Segoe UI"/>
-              </a:rPr>
-              <a:t>、</a:t>
-            </a:r>
-            <a:r>
-              <a:rPr lang="zh-CN" sz="2340" dirty="0">
-                <a:solidFill>
-                  <a:srgbClr val="2C6B57"/>
-                </a:solidFill>
-                <a:latin typeface="Noto Sans Mono CJK SC"/>
-                <a:ea typeface="Noto Sans Mono CJK SC"/>
-                <a:cs typeface="Noto Sans Mono CJK SC"/>
-              </a:rPr>
-              <a:t>D[1][2]=4</a:t>
-            </a:r>
-            <a:r>
-              <a:rPr lang="zh-CN" sz="2340" dirty="0">
-                <a:solidFill>
-                  <a:srgbClr val="1A1A18"/>
-                </a:solidFill>
-                <a:latin typeface="Segoe UI"/>
-                <a:ea typeface="Noto Sans CJK SC"/>
-                <a:cs typeface="Segoe UI"/>
-              </a:rPr>
-              <a:t>：经过顶点 1 后候选值为 </a:t>
-            </a:r>
-            <a:r>
-              <a:rPr lang="zh-CN" sz="2340" dirty="0">
-                <a:solidFill>
-                  <a:srgbClr val="2C6B57"/>
-                </a:solidFill>
-                <a:latin typeface="Noto Sans Mono CJK SC"/>
-                <a:ea typeface="Noto Sans Mono CJK SC"/>
-                <a:cs typeface="Noto Sans Mono CJK SC"/>
-              </a:rPr>
-              <a:t>3+4=7</a:t>
-            </a:r>
-            <a:r>
-              <a:rPr lang="zh-CN" sz="2340" dirty="0">
-                <a:solidFill>
-                  <a:srgbClr val="1A1A18"/>
-                </a:solidFill>
-                <a:latin typeface="Segoe UI"/>
-                <a:ea typeface="Noto Sans CJK SC"/>
-                <a:cs typeface="Segoe UI"/>
-              </a:rPr>
-              <a:t>，所以把 9 更新成 7。每次更新只比较旧值和候选值。</a:t>
+                  <a:srgbClr val="1A1A18"/>
+                </a:solidFill>
+                <a:latin typeface="Segoe UI"/>
+                <a:ea typeface="Noto Sans CJK SC"/>
+                <a:cs typeface="Segoe UI"/>
+              </a:rPr>
+              <a:t>反例应针对结论边界，例如稠密图不适合邻接表的空间优势。</a:t>
             </a:r>
           </a:p>
         </p:txBody>
@@ -10989,7 +11713,7 @@
                 <a:ea typeface="Noto Sans CJK SC"/>
                 <a:cs typeface="Segoe UI"/>
               </a:rPr>
-              <a:t>24 / 28</a:t>
+              <a:t>24 / 29</a:t>
             </a:r>
           </a:p>
         </p:txBody>
@@ -11053,7 +11777,7 @@
                 <a:ea typeface="Noto Sans CJK SC"/>
                 <a:cs typeface="Segoe UI"/>
               </a:rPr>
-              <a:t>反例：只看直达边</a:t>
+              <a:t>板书演算：Floyd 一次更新</a:t>
             </a:r>
           </a:p>
         </p:txBody>
@@ -11094,7 +11818,7 @@
         <p:spPr>
           <a:xfrm>
             <a:off x="566928" y="1946148"/>
-            <a:ext cx="11058144" cy="398221"/>
+            <a:ext cx="11058144" cy="796442"/>
           </a:xfrm>
           <a:prstGeom prst="rect">
             <a:avLst/>
@@ -11122,7 +11846,7 @@
                 <a:ea typeface="Noto Sans CJK SC"/>
                 <a:cs typeface="Segoe UI"/>
               </a:rPr>
-              <a:t>图中 </a:t>
+              <a:t>取 </a:t>
             </a:r>
             <a:r>
               <a:rPr lang="zh-CN" sz="2340" dirty="0">
@@ -11133,7 +11857,7 @@
                 <a:ea typeface="Noto Sans Mono CJK SC"/>
                 <a:cs typeface="Noto Sans Mono CJK SC"/>
               </a:rPr>
-              <a:t>0→2=9</a:t>
+              <a:t>D[0][2]=9</a:t>
             </a:r>
             <a:r>
               <a:rPr lang="zh-CN" sz="2340" dirty="0">
@@ -11144,7 +11868,7 @@
                 <a:ea typeface="Noto Sans CJK SC"/>
                 <a:cs typeface="Segoe UI"/>
               </a:rPr>
-              <a:t>，但 </a:t>
+              <a:t>、</a:t>
             </a:r>
             <a:r>
               <a:rPr lang="zh-CN" sz="2340" dirty="0">
@@ -11155,7 +11879,7 @@
                 <a:ea typeface="Noto Sans Mono CJK SC"/>
                 <a:cs typeface="Noto Sans Mono CJK SC"/>
               </a:rPr>
-              <a:t>0→1=3→2=4</a:t>
+              <a:t>D[0][1]=3</a:t>
             </a:r>
             <a:r>
               <a:rPr lang="zh-CN" sz="2340" dirty="0">
@@ -11166,7 +11890,51 @@
                 <a:ea typeface="Noto Sans CJK SC"/>
                 <a:cs typeface="Segoe UI"/>
               </a:rPr>
-              <a:t>。若只读邻接矩阵中的直达边，会错过真正最短路。</a:t>
+              <a:t>、</a:t>
+            </a:r>
+            <a:r>
+              <a:rPr lang="zh-CN" sz="2340" dirty="0">
+                <a:solidFill>
+                  <a:srgbClr val="2C6B57"/>
+                </a:solidFill>
+                <a:latin typeface="Noto Sans Mono CJK SC"/>
+                <a:ea typeface="Noto Sans Mono CJK SC"/>
+                <a:cs typeface="Noto Sans Mono CJK SC"/>
+              </a:rPr>
+              <a:t>D[1][2]=4</a:t>
+            </a:r>
+            <a:r>
+              <a:rPr lang="zh-CN" sz="2340" dirty="0">
+                <a:solidFill>
+                  <a:srgbClr val="1A1A18"/>
+                </a:solidFill>
+                <a:latin typeface="Segoe UI"/>
+                <a:ea typeface="Noto Sans CJK SC"/>
+                <a:cs typeface="Segoe UI"/>
+              </a:rPr>
+              <a:t>：经过顶点 1 后候选值为 </a:t>
+            </a:r>
+            <a:r>
+              <a:rPr lang="zh-CN" sz="2340" dirty="0">
+                <a:solidFill>
+                  <a:srgbClr val="2C6B57"/>
+                </a:solidFill>
+                <a:latin typeface="Noto Sans Mono CJK SC"/>
+                <a:ea typeface="Noto Sans Mono CJK SC"/>
+                <a:cs typeface="Noto Sans Mono CJK SC"/>
+              </a:rPr>
+              <a:t>3+4=7</a:t>
+            </a:r>
+            <a:r>
+              <a:rPr lang="zh-CN" sz="2340" dirty="0">
+                <a:solidFill>
+                  <a:srgbClr val="1A1A18"/>
+                </a:solidFill>
+                <a:latin typeface="Segoe UI"/>
+                <a:ea typeface="Noto Sans CJK SC"/>
+                <a:cs typeface="Segoe UI"/>
+              </a:rPr>
+              <a:t>，所以把 9 更新成 7。每次更新只比较旧值和候选值。</a:t>
             </a:r>
           </a:p>
         </p:txBody>
@@ -11250,7 +12018,7 @@
                 <a:ea typeface="Noto Sans CJK SC"/>
                 <a:cs typeface="Segoe UI"/>
               </a:rPr>
-              <a:t>25 / 28</a:t>
+              <a:t>25 / 29</a:t>
             </a:r>
           </a:p>
         </p:txBody>
@@ -11314,7 +12082,7 @@
                 <a:ea typeface="Noto Sans CJK SC"/>
                 <a:cs typeface="Segoe UI"/>
               </a:rPr>
-              <a:t>课堂练习与答案</a:t>
+              <a:t>反例：只看直达边</a:t>
             </a:r>
           </a:p>
         </p:txBody>
@@ -11355,7 +12123,7 @@
         <p:spPr>
           <a:xfrm>
             <a:off x="566928" y="1946148"/>
-            <a:ext cx="11058144" cy="796442"/>
+            <a:ext cx="11058144" cy="398221"/>
           </a:xfrm>
           <a:prstGeom prst="rect">
             <a:avLst/>
@@ -11383,7 +12151,7 @@
                 <a:ea typeface="Noto Sans CJK SC"/>
                 <a:cs typeface="Segoe UI"/>
               </a:rPr>
-              <a:t>课堂练习：设计一个三点图，要求直达边不是最短路；写出 Floyd 更新前后的矩阵。答案：任取 </a:t>
+              <a:t>图中 </a:t>
             </a:r>
             <a:r>
               <a:rPr lang="zh-CN" sz="2340" dirty="0">
@@ -11394,7 +12162,7 @@
                 <a:ea typeface="Noto Sans Mono CJK SC"/>
                 <a:cs typeface="Noto Sans Mono CJK SC"/>
               </a:rPr>
-              <a:t>0→2=10,0→1=3,1→2=4</a:t>
+              <a:t>0→2=9</a:t>
             </a:r>
             <a:r>
               <a:rPr lang="zh-CN" sz="2340" dirty="0">
@@ -11405,7 +12173,7 @@
                 <a:ea typeface="Noto Sans CJK SC"/>
                 <a:cs typeface="Segoe UI"/>
               </a:rPr>
-              <a:t>，最终 </a:t>
+              <a:t>，但 </a:t>
             </a:r>
             <a:r>
               <a:rPr lang="zh-CN" sz="2340" dirty="0">
@@ -11416,7 +12184,7 @@
                 <a:ea typeface="Noto Sans Mono CJK SC"/>
                 <a:cs typeface="Noto Sans Mono CJK SC"/>
               </a:rPr>
-              <a:t>D[0][2]=7</a:t>
+              <a:t>0→1=3→2=4</a:t>
             </a:r>
             <a:r>
               <a:rPr lang="zh-CN" sz="2340" dirty="0">
@@ -11427,7 +12195,7 @@
                 <a:ea typeface="Noto Sans CJK SC"/>
                 <a:cs typeface="Segoe UI"/>
               </a:rPr>
-              <a:t>。</a:t>
+              <a:t>。若只读邻接矩阵中的直达边，会错过真正最短路。</a:t>
             </a:r>
           </a:p>
         </p:txBody>
@@ -11511,7 +12279,7 @@
                 <a:ea typeface="Noto Sans CJK SC"/>
                 <a:cs typeface="Segoe UI"/>
               </a:rPr>
-              <a:t>26 / 28</a:t>
+              <a:t>26 / 29</a:t>
             </a:r>
           </a:p>
         </p:txBody>
@@ -11575,7 +12343,7 @@
                 <a:ea typeface="Noto Sans CJK SC"/>
                 <a:cs typeface="Segoe UI"/>
               </a:rPr>
-              <a:t>本章小结</a:t>
+              <a:t>课堂练习与答案</a:t>
             </a:r>
           </a:p>
         </p:txBody>
@@ -11609,14 +12377,14 @@
       </p:sp>
       <p:sp>
         <p:nvSpPr>
-          <p:cNvPr id="4" name="要点"/>
+          <p:cNvPr id="4" name="正文"/>
           <p:cNvSpPr txBox="1"/>
           <p:nvPr/>
         </p:nvSpPr>
         <p:spPr>
           <a:xfrm>
-            <a:off x="566928" y="1995678"/>
-            <a:ext cx="11058144" cy="2888586"/>
+            <a:off x="566928" y="1946148"/>
+            <a:ext cx="11058144" cy="796442"/>
           </a:xfrm>
           <a:prstGeom prst="rect">
             <a:avLst/>
@@ -11629,18 +12397,11 @@
           </a:bodyPr>
           <a:lstStyle/>
           <a:p>
-            <a:pPr marL="270000" indent="-230000" lvl="0">
-              <a:lnSpc>
-                <a:spcPct val="100000"/>
-              </a:lnSpc>
-              <a:spcBef>
-                <a:spcPts val="655"/>
-              </a:spcBef>
-              <a:buClr>
-                <a:srgbClr val="8A4B2A"/>
-              </a:buClr>
-              <a:buFont typeface="Arial"/>
-              <a:buChar char="●"/>
+            <a:pPr marL="0" indent="0" lvl="0">
+              <a:lnSpc>
+                <a:spcPct val="100000"/>
+              </a:lnSpc>
+              <a:buNone/>
             </a:pPr>
             <a:r>
               <a:rPr lang="zh-CN" sz="2340" dirty="0">
@@ -11651,45 +12412,19 @@
                 <a:ea typeface="Noto Sans CJK SC"/>
                 <a:cs typeface="Segoe UI"/>
               </a:rPr>
-              <a:t>问题求解的第一步是</a:t>
-            </a:r>
-            <a:r>
-              <a:rPr lang="zh-CN" sz="2340" dirty="0" b="1">
-                <a:solidFill>
-                  <a:srgbClr val="8A4B2A"/>
-                </a:solidFill>
-                <a:latin typeface="Segoe UI"/>
-                <a:ea typeface="Noto Sans CJK SC"/>
-                <a:cs typeface="Segoe UI"/>
-              </a:rPr>
-              <a:t>抽象</a:t>
+              <a:t>课堂练习：设计一个三点图，要求直达边不是最短路；写出 Floyd 更新前后的矩阵。答案：任取 </a:t>
             </a:r>
             <a:r>
               <a:rPr lang="zh-CN" sz="2340" dirty="0">
                 <a:solidFill>
-                  <a:srgbClr val="1A1A18"/>
-                </a:solidFill>
-                <a:latin typeface="Segoe UI"/>
-                <a:ea typeface="Noto Sans CJK SC"/>
-                <a:cs typeface="Segoe UI"/>
-              </a:rPr>
-              <a:t>：把应用语言翻译成结构语言</a:t>
-            </a:r>
-          </a:p>
-          <a:p>
-            <a:pPr marL="270000" indent="-230000" lvl="0">
-              <a:lnSpc>
-                <a:spcPct val="100000"/>
-              </a:lnSpc>
-              <a:spcBef>
-                <a:spcPts val="655"/>
-              </a:spcBef>
-              <a:buClr>
-                <a:srgbClr val="8A4B2A"/>
-              </a:buClr>
-              <a:buFont typeface="Arial"/>
-              <a:buChar char="●"/>
-            </a:pPr>
+                  <a:srgbClr val="2C6B57"/>
+                </a:solidFill>
+                <a:latin typeface="Noto Sans Mono CJK SC"/>
+                <a:ea typeface="Noto Sans Mono CJK SC"/>
+                <a:cs typeface="Noto Sans Mono CJK SC"/>
+              </a:rPr>
+              <a:t>0→2=10,0→1=3,1→2=4</a:t>
+            </a:r>
             <a:r>
               <a:rPr lang="zh-CN" sz="2340" dirty="0">
                 <a:solidFill>
@@ -11699,71 +12434,19 @@
                 <a:ea typeface="Noto Sans CJK SC"/>
                 <a:cs typeface="Segoe UI"/>
               </a:rPr>
-              <a:t>数据结构分三层：</a:t>
-            </a:r>
-            <a:r>
-              <a:rPr lang="zh-CN" sz="2340" dirty="0" b="1">
-                <a:solidFill>
-                  <a:srgbClr val="8A4B2A"/>
-                </a:solidFill>
-                <a:latin typeface="Segoe UI"/>
-                <a:ea typeface="Noto Sans CJK SC"/>
-                <a:cs typeface="Segoe UI"/>
-              </a:rPr>
-              <a:t>逻辑结构、存储结构、运算</a:t>
-            </a:r>
-          </a:p>
-          <a:p>
-            <a:pPr marL="270000" indent="-230000" lvl="0">
-              <a:lnSpc>
-                <a:spcPct val="100000"/>
-              </a:lnSpc>
-              <a:spcBef>
-                <a:spcPts val="655"/>
-              </a:spcBef>
-              <a:buClr>
-                <a:srgbClr val="8A4B2A"/>
-              </a:buClr>
-              <a:buFont typeface="Arial"/>
-              <a:buChar char="●"/>
-            </a:pPr>
+              <a:t>，最终 </a:t>
+            </a:r>
             <a:r>
               <a:rPr lang="zh-CN" sz="2340" dirty="0">
                 <a:solidFill>
-                  <a:srgbClr val="1A1A18"/>
-                </a:solidFill>
-                <a:latin typeface="Segoe UI"/>
-                <a:ea typeface="Noto Sans CJK SC"/>
-                <a:cs typeface="Segoe UI"/>
-              </a:rPr>
-              <a:t>同一逻辑结构可以有多种存储；选哪种要看</a:t>
-            </a:r>
-            <a:r>
-              <a:rPr lang="zh-CN" sz="2340" dirty="0" b="1">
-                <a:solidFill>
-                  <a:srgbClr val="8A4B2A"/>
-                </a:solidFill>
-                <a:latin typeface="Segoe UI"/>
-                <a:ea typeface="Noto Sans CJK SC"/>
-                <a:cs typeface="Segoe UI"/>
-              </a:rPr>
-              <a:t>在它上面做什么运算</a:t>
-            </a:r>
-          </a:p>
-          <a:p>
-            <a:pPr marL="270000" indent="-230000" lvl="0">
-              <a:lnSpc>
-                <a:spcPct val="100000"/>
-              </a:lnSpc>
-              <a:spcBef>
-                <a:spcPts val="655"/>
-              </a:spcBef>
-              <a:buClr>
-                <a:srgbClr val="8A4B2A"/>
-              </a:buClr>
-              <a:buFont typeface="Arial"/>
-              <a:buChar char="●"/>
-            </a:pPr>
+                  <a:srgbClr val="2C6B57"/>
+                </a:solidFill>
+                <a:latin typeface="Noto Sans Mono CJK SC"/>
+                <a:ea typeface="Noto Sans Mono CJK SC"/>
+                <a:cs typeface="Noto Sans Mono CJK SC"/>
+              </a:rPr>
+              <a:t>D[0][2]=7</a:t>
+            </a:r>
             <a:r>
               <a:rPr lang="zh-CN" sz="2340" dirty="0">
                 <a:solidFill>
@@ -11773,81 +12456,7 @@
                 <a:ea typeface="Noto Sans CJK SC"/>
                 <a:cs typeface="Segoe UI"/>
               </a:rPr>
-              <a:t>ADT 是一组运算，不是一个基类</a:t>
-            </a:r>
-          </a:p>
-          <a:p>
-            <a:pPr marL="270000" indent="-230000" lvl="0">
-              <a:lnSpc>
-                <a:spcPct val="100000"/>
-              </a:lnSpc>
-              <a:spcBef>
-                <a:spcPts val="655"/>
-              </a:spcBef>
-              <a:buClr>
-                <a:srgbClr val="8A4B2A"/>
-              </a:buClr>
-              <a:buFont typeface="Arial"/>
-              <a:buChar char="●"/>
-            </a:pPr>
-            <a:r>
-              <a:rPr lang="zh-CN" sz="2340" dirty="0">
-                <a:solidFill>
-                  <a:srgbClr val="1A1A18"/>
-                </a:solidFill>
-                <a:latin typeface="Segoe UI"/>
-                <a:ea typeface="Noto Sans CJK SC"/>
-                <a:cs typeface="Segoe UI"/>
-              </a:rPr>
-              <a:t>算法分析看</a:t>
-            </a:r>
-            <a:r>
-              <a:rPr lang="zh-CN" sz="2340" dirty="0" b="1">
-                <a:solidFill>
-                  <a:srgbClr val="8A4B2A"/>
-                </a:solidFill>
-                <a:latin typeface="Segoe UI"/>
-                <a:ea typeface="Noto Sans CJK SC"/>
-                <a:cs typeface="Segoe UI"/>
-              </a:rPr>
-              <a:t>增长趋势</a:t>
-            </a:r>
-            <a:r>
-              <a:rPr lang="zh-CN" sz="2340" dirty="0">
-                <a:solidFill>
-                  <a:srgbClr val="1A1A18"/>
-                </a:solidFill>
-                <a:latin typeface="Segoe UI"/>
-                <a:ea typeface="Noto Sans CJK SC"/>
-                <a:cs typeface="Segoe UI"/>
-              </a:rPr>
-              <a:t>；最好/最坏/平均必须分开说</a:t>
-            </a:r>
-          </a:p>
-          <a:p>
-            <a:pPr marL="270000" indent="-230000" lvl="0">
-              <a:lnSpc>
-                <a:spcPct val="100000"/>
-              </a:lnSpc>
-              <a:spcBef>
-                <a:spcPts val="655"/>
-              </a:spcBef>
-              <a:buClr>
-                <a:srgbClr val="8A4B2A"/>
-              </a:buClr>
-              <a:buFont typeface="Arial"/>
-              <a:buChar char="●"/>
-            </a:pPr>
-            <a:r>
-              <a:rPr lang="zh-CN" sz="2340" dirty="0">
-                <a:solidFill>
-                  <a:srgbClr val="1A1A18"/>
-                </a:solidFill>
-                <a:latin typeface="Segoe UI"/>
-                <a:ea typeface="Noto Sans CJK SC"/>
-                <a:cs typeface="Segoe UI"/>
-              </a:rPr>
-              <a:t>时间和空间是可以互换的，没有免费的午餐</a:t>
+              <a:t>。</a:t>
             </a:r>
           </a:p>
         </p:txBody>
@@ -11931,7 +12540,7 @@
                 <a:ea typeface="Noto Sans CJK SC"/>
                 <a:cs typeface="Segoe UI"/>
               </a:rPr>
-              <a:t>27 / 28</a:t>
+              <a:t>27 / 29</a:t>
             </a:r>
           </a:p>
         </p:txBody>
@@ -11995,6 +12604,426 @@
                 <a:ea typeface="Noto Sans CJK SC"/>
                 <a:cs typeface="Segoe UI"/>
               </a:rPr>
+              <a:t>本章小结</a:t>
+            </a:r>
+          </a:p>
+        </p:txBody>
+      </p:sp>
+      <p:sp>
+        <p:nvSpPr>
+          <p:cNvPr id="3" name="标题线"/>
+          <p:cNvSpPr/>
+          <p:nvPr/>
+        </p:nvSpPr>
+        <p:spPr>
+          <a:xfrm>
+            <a:off x="566928" y="935736"/>
+            <a:ext cx="11058144" cy="32004"/>
+          </a:xfrm>
+          <a:prstGeom prst="rect">
+            <a:avLst/>
+          </a:prstGeom>
+          <a:solidFill>
+            <a:srgbClr val="8A4B2A"/>
+          </a:solidFill>
+          <a:ln>
+            <a:noFill/>
+          </a:ln>
+        </p:spPr>
+        <p:txBody>
+          <a:bodyPr/>
+          <a:lstStyle/>
+          <a:p/>
+        </p:txBody>
+      </p:sp>
+      <p:sp>
+        <p:nvSpPr>
+          <p:cNvPr id="4" name="要点"/>
+          <p:cNvSpPr txBox="1"/>
+          <p:nvPr/>
+        </p:nvSpPr>
+        <p:spPr>
+          <a:xfrm>
+            <a:off x="566928" y="1995678"/>
+            <a:ext cx="11058144" cy="2888586"/>
+          </a:xfrm>
+          <a:prstGeom prst="rect">
+            <a:avLst/>
+          </a:prstGeom>
+          <a:noFill/>
+        </p:spPr>
+        <p:txBody>
+          <a:bodyPr wrap="square" lIns="0" tIns="0" rIns="0" bIns="0">
+            <a:noAutofit/>
+          </a:bodyPr>
+          <a:lstStyle/>
+          <a:p>
+            <a:pPr marL="270000" indent="-230000" lvl="0">
+              <a:lnSpc>
+                <a:spcPct val="100000"/>
+              </a:lnSpc>
+              <a:spcBef>
+                <a:spcPts val="655"/>
+              </a:spcBef>
+              <a:buClr>
+                <a:srgbClr val="8A4B2A"/>
+              </a:buClr>
+              <a:buFont typeface="Arial"/>
+              <a:buChar char="●"/>
+            </a:pPr>
+            <a:r>
+              <a:rPr lang="zh-CN" sz="2340" dirty="0">
+                <a:solidFill>
+                  <a:srgbClr val="1A1A18"/>
+                </a:solidFill>
+                <a:latin typeface="Segoe UI"/>
+                <a:ea typeface="Noto Sans CJK SC"/>
+                <a:cs typeface="Segoe UI"/>
+              </a:rPr>
+              <a:t>问题求解的第一步是</a:t>
+            </a:r>
+            <a:r>
+              <a:rPr lang="zh-CN" sz="2340" dirty="0" b="1">
+                <a:solidFill>
+                  <a:srgbClr val="8A4B2A"/>
+                </a:solidFill>
+                <a:latin typeface="Segoe UI"/>
+                <a:ea typeface="Noto Sans CJK SC"/>
+                <a:cs typeface="Segoe UI"/>
+              </a:rPr>
+              <a:t>抽象</a:t>
+            </a:r>
+            <a:r>
+              <a:rPr lang="zh-CN" sz="2340" dirty="0">
+                <a:solidFill>
+                  <a:srgbClr val="1A1A18"/>
+                </a:solidFill>
+                <a:latin typeface="Segoe UI"/>
+                <a:ea typeface="Noto Sans CJK SC"/>
+                <a:cs typeface="Segoe UI"/>
+              </a:rPr>
+              <a:t>：把应用语言翻译成结构语言</a:t>
+            </a:r>
+          </a:p>
+          <a:p>
+            <a:pPr marL="270000" indent="-230000" lvl="0">
+              <a:lnSpc>
+                <a:spcPct val="100000"/>
+              </a:lnSpc>
+              <a:spcBef>
+                <a:spcPts val="655"/>
+              </a:spcBef>
+              <a:buClr>
+                <a:srgbClr val="8A4B2A"/>
+              </a:buClr>
+              <a:buFont typeface="Arial"/>
+              <a:buChar char="●"/>
+            </a:pPr>
+            <a:r>
+              <a:rPr lang="zh-CN" sz="2340" dirty="0">
+                <a:solidFill>
+                  <a:srgbClr val="1A1A18"/>
+                </a:solidFill>
+                <a:latin typeface="Segoe UI"/>
+                <a:ea typeface="Noto Sans CJK SC"/>
+                <a:cs typeface="Segoe UI"/>
+              </a:rPr>
+              <a:t>数据结构分三层：</a:t>
+            </a:r>
+            <a:r>
+              <a:rPr lang="zh-CN" sz="2340" dirty="0" b="1">
+                <a:solidFill>
+                  <a:srgbClr val="8A4B2A"/>
+                </a:solidFill>
+                <a:latin typeface="Segoe UI"/>
+                <a:ea typeface="Noto Sans CJK SC"/>
+                <a:cs typeface="Segoe UI"/>
+              </a:rPr>
+              <a:t>逻辑结构、存储结构、运算</a:t>
+            </a:r>
+          </a:p>
+          <a:p>
+            <a:pPr marL="270000" indent="-230000" lvl="0">
+              <a:lnSpc>
+                <a:spcPct val="100000"/>
+              </a:lnSpc>
+              <a:spcBef>
+                <a:spcPts val="655"/>
+              </a:spcBef>
+              <a:buClr>
+                <a:srgbClr val="8A4B2A"/>
+              </a:buClr>
+              <a:buFont typeface="Arial"/>
+              <a:buChar char="●"/>
+            </a:pPr>
+            <a:r>
+              <a:rPr lang="zh-CN" sz="2340" dirty="0">
+                <a:solidFill>
+                  <a:srgbClr val="1A1A18"/>
+                </a:solidFill>
+                <a:latin typeface="Segoe UI"/>
+                <a:ea typeface="Noto Sans CJK SC"/>
+                <a:cs typeface="Segoe UI"/>
+              </a:rPr>
+              <a:t>同一逻辑结构可以有多种存储；选哪种要看</a:t>
+            </a:r>
+            <a:r>
+              <a:rPr lang="zh-CN" sz="2340" dirty="0" b="1">
+                <a:solidFill>
+                  <a:srgbClr val="8A4B2A"/>
+                </a:solidFill>
+                <a:latin typeface="Segoe UI"/>
+                <a:ea typeface="Noto Sans CJK SC"/>
+                <a:cs typeface="Segoe UI"/>
+              </a:rPr>
+              <a:t>在它上面做什么运算</a:t>
+            </a:r>
+          </a:p>
+          <a:p>
+            <a:pPr marL="270000" indent="-230000" lvl="0">
+              <a:lnSpc>
+                <a:spcPct val="100000"/>
+              </a:lnSpc>
+              <a:spcBef>
+                <a:spcPts val="655"/>
+              </a:spcBef>
+              <a:buClr>
+                <a:srgbClr val="8A4B2A"/>
+              </a:buClr>
+              <a:buFont typeface="Arial"/>
+              <a:buChar char="●"/>
+            </a:pPr>
+            <a:r>
+              <a:rPr lang="zh-CN" sz="2340" dirty="0">
+                <a:solidFill>
+                  <a:srgbClr val="1A1A18"/>
+                </a:solidFill>
+                <a:latin typeface="Segoe UI"/>
+                <a:ea typeface="Noto Sans CJK SC"/>
+                <a:cs typeface="Segoe UI"/>
+              </a:rPr>
+              <a:t>ADT 是一组运算，不是一个基类</a:t>
+            </a:r>
+          </a:p>
+          <a:p>
+            <a:pPr marL="270000" indent="-230000" lvl="0">
+              <a:lnSpc>
+                <a:spcPct val="100000"/>
+              </a:lnSpc>
+              <a:spcBef>
+                <a:spcPts val="655"/>
+              </a:spcBef>
+              <a:buClr>
+                <a:srgbClr val="8A4B2A"/>
+              </a:buClr>
+              <a:buFont typeface="Arial"/>
+              <a:buChar char="●"/>
+            </a:pPr>
+            <a:r>
+              <a:rPr lang="zh-CN" sz="2340" dirty="0">
+                <a:solidFill>
+                  <a:srgbClr val="1A1A18"/>
+                </a:solidFill>
+                <a:latin typeface="Segoe UI"/>
+                <a:ea typeface="Noto Sans CJK SC"/>
+                <a:cs typeface="Segoe UI"/>
+              </a:rPr>
+              <a:t>算法分析看</a:t>
+            </a:r>
+            <a:r>
+              <a:rPr lang="zh-CN" sz="2340" dirty="0" b="1">
+                <a:solidFill>
+                  <a:srgbClr val="8A4B2A"/>
+                </a:solidFill>
+                <a:latin typeface="Segoe UI"/>
+                <a:ea typeface="Noto Sans CJK SC"/>
+                <a:cs typeface="Segoe UI"/>
+              </a:rPr>
+              <a:t>增长趋势</a:t>
+            </a:r>
+            <a:r>
+              <a:rPr lang="zh-CN" sz="2340" dirty="0">
+                <a:solidFill>
+                  <a:srgbClr val="1A1A18"/>
+                </a:solidFill>
+                <a:latin typeface="Segoe UI"/>
+                <a:ea typeface="Noto Sans CJK SC"/>
+                <a:cs typeface="Segoe UI"/>
+              </a:rPr>
+              <a:t>；最好/最坏/平均必须分开说</a:t>
+            </a:r>
+          </a:p>
+          <a:p>
+            <a:pPr marL="270000" indent="-230000" lvl="0">
+              <a:lnSpc>
+                <a:spcPct val="100000"/>
+              </a:lnSpc>
+              <a:spcBef>
+                <a:spcPts val="655"/>
+              </a:spcBef>
+              <a:buClr>
+                <a:srgbClr val="8A4B2A"/>
+              </a:buClr>
+              <a:buFont typeface="Arial"/>
+              <a:buChar char="●"/>
+            </a:pPr>
+            <a:r>
+              <a:rPr lang="zh-CN" sz="2340" dirty="0">
+                <a:solidFill>
+                  <a:srgbClr val="1A1A18"/>
+                </a:solidFill>
+                <a:latin typeface="Segoe UI"/>
+                <a:ea typeface="Noto Sans CJK SC"/>
+                <a:cs typeface="Segoe UI"/>
+              </a:rPr>
+              <a:t>时间和空间是可以互换的，没有免费的午餐</a:t>
+            </a:r>
+          </a:p>
+        </p:txBody>
+      </p:sp>
+      <p:sp>
+        <p:nvSpPr>
+          <p:cNvPr id="5" name="页脚"/>
+          <p:cNvSpPr txBox="1"/>
+          <p:nvPr/>
+        </p:nvSpPr>
+        <p:spPr>
+          <a:xfrm>
+            <a:off x="566928" y="6419088"/>
+            <a:ext cx="7740700" cy="274320"/>
+          </a:xfrm>
+          <a:prstGeom prst="rect">
+            <a:avLst/>
+          </a:prstGeom>
+          <a:noFill/>
+        </p:spPr>
+        <p:txBody>
+          <a:bodyPr wrap="square" lIns="0" tIns="0" rIns="0" bIns="0">
+            <a:noAutofit/>
+          </a:bodyPr>
+          <a:lstStyle/>
+          <a:p>
+            <a:pPr marL="0" indent="0" lvl="0">
+              <a:lnSpc>
+                <a:spcPct val="100000"/>
+              </a:lnSpc>
+              <a:buNone/>
+            </a:pPr>
+            <a:r>
+              <a:rPr lang="zh-CN" sz="1000" dirty="0">
+                <a:solidFill>
+                  <a:srgbClr val="6B6B66"/>
+                </a:solidFill>
+                <a:latin typeface="Segoe UI"/>
+                <a:ea typeface="Noto Sans CJK SC"/>
+                <a:cs typeface="Segoe UI"/>
+              </a:rPr>
+              <a:t>第1章 概论</a:t>
+            </a:r>
+          </a:p>
+        </p:txBody>
+      </p:sp>
+      <p:sp>
+        <p:nvSpPr>
+          <p:cNvPr id="6" name="页码"/>
+          <p:cNvSpPr txBox="1"/>
+          <p:nvPr/>
+        </p:nvSpPr>
+        <p:spPr>
+          <a:xfrm>
+            <a:off x="8307628" y="6419088"/>
+            <a:ext cx="3317443" cy="274320"/>
+          </a:xfrm>
+          <a:prstGeom prst="rect">
+            <a:avLst/>
+          </a:prstGeom>
+          <a:noFill/>
+        </p:spPr>
+        <p:txBody>
+          <a:bodyPr wrap="square" lIns="0" tIns="0" rIns="0" bIns="0">
+            <a:noAutofit/>
+          </a:bodyPr>
+          <a:lstStyle/>
+          <a:p>
+            <a:pPr marL="0" indent="0" lvl="0" algn="r">
+              <a:lnSpc>
+                <a:spcPct val="100000"/>
+              </a:lnSpc>
+              <a:buNone/>
+            </a:pPr>
+            <a:r>
+              <a:rPr lang="zh-CN" sz="1000" dirty="0">
+                <a:solidFill>
+                  <a:srgbClr val="6B6B66"/>
+                </a:solidFill>
+                <a:latin typeface="Segoe UI"/>
+                <a:ea typeface="Noto Sans CJK SC"/>
+                <a:cs typeface="Segoe UI"/>
+              </a:rPr>
+              <a:t>28 / 29</a:t>
+            </a:r>
+          </a:p>
+        </p:txBody>
+      </p:sp>
+    </p:spTree>
+  </p:cSld>
+</p:sld>
+</file>
+
+<file path=ppt/slides/slide29.xml><?xml version="1.0" encoding="utf-8"?>
+<p:sld xmlns:a="http://schemas.openxmlformats.org/drawingml/2006/main" xmlns:r="http://schemas.openxmlformats.org/officeDocument/2006/relationships" xmlns:p="http://schemas.openxmlformats.org/presentationml/2006/main">
+  <p:cSld>
+    <p:spTree>
+      <p:nvGrpSpPr>
+        <p:cNvPr id="1" name=""/>
+        <p:cNvGrpSpPr/>
+        <p:nvPr/>
+      </p:nvGrpSpPr>
+      <p:grpSpPr>
+        <a:xfrm>
+          <a:off x="0" y="0"/>
+          <a:ext cx="0" cy="0"/>
+          <a:chOff x="0" y="0"/>
+          <a:chExt cx="0" cy="0"/>
+        </a:xfrm>
+      </p:grpSpPr>
+      <p:sp>
+        <p:nvSpPr>
+          <p:cNvPr id="2" name="标题"/>
+          <p:cNvSpPr txBox="1"/>
+          <p:nvPr/>
+        </p:nvSpPr>
+        <p:spPr>
+          <a:xfrm>
+            <a:off x="566928" y="384048"/>
+            <a:ext cx="11058144" cy="487680"/>
+          </a:xfrm>
+          <a:prstGeom prst="rect">
+            <a:avLst/>
+          </a:prstGeom>
+          <a:noFill/>
+        </p:spPr>
+        <p:txBody>
+          <a:bodyPr wrap="square" lIns="0" tIns="0" rIns="0" bIns="0">
+            <a:noAutofit/>
+          </a:bodyPr>
+          <a:lstStyle/>
+          <a:p>
+            <a:pPr marL="0" indent="0" lvl="0">
+              <a:lnSpc>
+                <a:spcPct val="100000"/>
+              </a:lnSpc>
+              <a:buNone/>
+            </a:pPr>
+            <a:r>
+              <a:rPr lang="zh-CN" sz="3200" dirty="0" b="1">
+                <a:solidFill>
+                  <a:srgbClr val="1A1A18"/>
+                </a:solidFill>
+                <a:latin typeface="Segoe UI"/>
+                <a:ea typeface="Noto Sans CJK SC"/>
+                <a:cs typeface="Segoe UI"/>
+              </a:rPr>
               <a:t>上机</a:t>
             </a:r>
           </a:p>
@@ -12389,7 +13418,7 @@
                 <a:ea typeface="Noto Sans CJK SC"/>
                 <a:cs typeface="Segoe UI"/>
               </a:rPr>
-              <a:t>28 / 28</a:t>
+              <a:t>29 / 29</a:t>
             </a:r>
           </a:p>
         </p:txBody>
@@ -13195,7 +14224,7 @@
                 <a:ea typeface="Noto Sans CJK SC"/>
                 <a:cs typeface="Segoe UI"/>
               </a:rPr>
-              <a:t>3 / 28</a:t>
+              <a:t>3 / 29</a:t>
             </a:r>
           </a:p>
         </p:txBody>
@@ -13683,7 +14712,7 @@
                 <a:ea typeface="Noto Sans CJK SC"/>
                 <a:cs typeface="Segoe UI"/>
               </a:rPr>
-              <a:t>4 / 28</a:t>
+              <a:t>4 / 29</a:t>
             </a:r>
           </a:p>
         </p:txBody>
@@ -14056,7 +15085,7 @@
                 <a:ea typeface="Noto Sans CJK SC"/>
                 <a:cs typeface="Segoe UI"/>
               </a:rPr>
-              <a:t>5 / 28</a:t>
+              <a:t>5 / 29</a:t>
             </a:r>
           </a:p>
         </p:txBody>
@@ -14154,14 +15183,56 @@
       </p:sp>
       <p:sp>
         <p:nvSpPr>
-          <p:cNvPr id="4" name="代码"/>
+          <p:cNvPr id="4" name="正文"/>
           <p:cNvSpPr txBox="1"/>
           <p:nvPr/>
         </p:nvSpPr>
         <p:spPr>
           <a:xfrm>
-            <a:off x="566928" y="1209650"/>
-            <a:ext cx="11058144" cy="4769266"/>
+            <a:off x="566928" y="1270696"/>
+            <a:ext cx="11058144" cy="287944"/>
+          </a:xfrm>
+          <a:prstGeom prst="rect">
+            <a:avLst/>
+          </a:prstGeom>
+          <a:noFill/>
+        </p:spPr>
+        <p:txBody>
+          <a:bodyPr wrap="square" lIns="0" tIns="0" rIns="0" bIns="0">
+            <a:noAutofit/>
+          </a:bodyPr>
+          <a:lstStyle/>
+          <a:p>
+            <a:pPr marL="0" indent="0" lvl="0">
+              <a:lnSpc>
+                <a:spcPct val="100000"/>
+              </a:lnSpc>
+              <a:buNone/>
+            </a:pPr>
+            <a:r>
+              <a:rPr lang="zh-CN" sz="1692" dirty="0">
+                <a:solidFill>
+                  <a:srgbClr val="1A1A18"/>
+                </a:solidFill>
+                <a:latin typeface="Segoe UI"/>
+                <a:ea typeface="Noto Sans CJK SC"/>
+                <a:cs typeface="Segoe UI"/>
+              </a:rPr>
+              <a:t>第一件事：先跑 Floyd，求出每对人之间的最短时间。</a:t>
+            </a:r>
+          </a:p>
+        </p:txBody>
+      </p:sp>
+      <p:sp>
+        <p:nvSpPr>
+          <p:cNvPr id="5" name="代码"/>
+          <p:cNvSpPr txBox="1"/>
+          <p:nvPr/>
+        </p:nvSpPr>
+        <p:spPr>
+          <a:xfrm>
+            <a:off x="566928" y="1654144"/>
+            <a:ext cx="11058144" cy="4487387"/>
           </a:xfrm>
           <a:prstGeom prst="roundRect">
             <a:avLst>
@@ -14190,7 +15261,7 @@
               <a:buNone/>
             </a:pPr>
             <a:r>
-              <a:rPr lang="zh-CN" sz="711" dirty="0">
+              <a:rPr lang="zh-CN" sz="879" dirty="0">
                 <a:solidFill>
                   <a:srgbClr val="6B6B66"/>
                 </a:solidFill>
@@ -14198,7 +15269,7 @@
                 <a:ea typeface="Noto Sans Mono CJK SC"/>
                 <a:cs typeface="Noto Sans Mono CJK SC"/>
               </a:rPr>
-              <a:t>code/ch01/adt/modern.hpp#fn:best_source</a:t>
+              <a:t>code/ch01/adt/modern.hpp#best-source-floyd</a:t>
             </a:r>
           </a:p>
           <a:p>
@@ -14209,51 +15280,59 @@
               <a:buNone/>
             </a:pPr>
             <a:r>
-              <a:rPr lang="zh-CN" sz="912" dirty="0">
-                <a:solidFill>
-                  <a:srgbClr val="1A1A18"/>
+              <a:rPr lang="zh-CN" sz="1128" dirty="0">
+                <a:solidFill>
+                  <a:srgbClr val="8A4B2A"/>
                 </a:solidFill>
                 <a:latin typeface="Noto Sans Mono CJK SC"/>
                 <a:ea typeface="Noto Sans Mono CJK SC"/>
                 <a:cs typeface="Noto Sans Mono CJK SC"/>
               </a:rPr>
-              <a:t>[[nodiscard]] std::optional&lt;std::</a:t>
-            </a:r>
-            <a:r>
-              <a:rPr lang="zh-CN" sz="912" dirty="0">
-                <a:solidFill>
-                  <a:srgbClr val="2C6B57"/>
+              <a:t>const</a:t>
+            </a:r>
+            <a:r>
+              <a:rPr lang="zh-CN" sz="1128" dirty="0">
+                <a:solidFill>
+                  <a:srgbClr val="1A1A18"/>
                 </a:solidFill>
                 <a:latin typeface="Noto Sans Mono CJK SC"/>
                 <a:ea typeface="Noto Sans Mono CJK SC"/>
                 <a:cs typeface="Noto Sans Mono CJK SC"/>
               </a:rPr>
-              <a:t>size_t</a:t>
-            </a:r>
-            <a:r>
-              <a:rPr lang="zh-CN" sz="912" dirty="0">
-                <a:solidFill>
-                  <a:srgbClr val="1A1A18"/>
+              <a:t> std::</a:t>
+            </a:r>
+            <a:r>
+              <a:rPr lang="zh-CN" sz="1128" dirty="0">
+                <a:solidFill>
+                  <a:srgbClr val="2C6B57"/>
                 </a:solidFill>
                 <a:latin typeface="Noto Sans Mono CJK SC"/>
                 <a:ea typeface="Noto Sans Mono CJK SC"/>
                 <a:cs typeface="Noto Sans Mono CJK SC"/>
               </a:rPr>
-              <a:t>&gt; best_source() </a:t>
-            </a:r>
-            <a:r>
-              <a:rPr lang="zh-CN" sz="912" dirty="0">
-                <a:solidFill>
-                  <a:srgbClr val="8A4B2A"/>
+              <a:t>size_t</a:t>
+            </a:r>
+            <a:r>
+              <a:rPr lang="zh-CN" sz="1128" dirty="0">
+                <a:solidFill>
+                  <a:srgbClr val="1A1A18"/>
                 </a:solidFill>
                 <a:latin typeface="Noto Sans Mono CJK SC"/>
                 <a:ea typeface="Noto Sans Mono CJK SC"/>
                 <a:cs typeface="Noto Sans Mono CJK SC"/>
               </a:rPr>
-              <a:t>const</a:t>
-            </a:r>
-            <a:r>
-              <a:rPr lang="zh-CN" sz="912" dirty="0">
+              <a:t> people = distance_.size();</a:t>
+            </a:r>
+          </a:p>
+          <a:p>
+            <a:pPr marL="0" indent="0" lvl="0">
+              <a:lnSpc>
+                <a:spcPct val="104000"/>
+              </a:lnSpc>
+              <a:buNone/>
+            </a:pPr>
+            <a:r>
+              <a:rPr lang="zh-CN" sz="1128" dirty="0">
                 <a:solidFill>
                   <a:srgbClr val="1A1A18"/>
                 </a:solidFill>
@@ -14261,7 +15340,7 @@
                 <a:ea typeface="Noto Sans Mono CJK SC"/>
                 <a:cs typeface="Noto Sans Mono CJK SC"/>
               </a:rPr>
-              <a:t> {</a:t>
+              <a:t>std::vector&lt;std::vector&lt;distance_type&gt;&gt; shortest(</a:t>
             </a:r>
           </a:p>
           <a:p>
@@ -14272,7 +15351,7 @@
               <a:buNone/>
             </a:pPr>
             <a:r>
-              <a:rPr lang="zh-CN" sz="912" dirty="0">
+              <a:rPr lang="zh-CN" sz="1128" dirty="0">
                 <a:solidFill>
                   <a:srgbClr val="1A1A18"/>
                 </a:solidFill>
@@ -14280,10 +15359,18 @@
                 <a:ea typeface="Noto Sans Mono CJK SC"/>
                 <a:cs typeface="Noto Sans Mono CJK SC"/>
               </a:rPr>
-              <a:t>    </a:t>
-            </a:r>
-            <a:r>
-              <a:rPr lang="zh-CN" sz="912" dirty="0">
+              <a:t>    people, std::vector&lt;distance_type&gt;(people, unreachable));</a:t>
+            </a:r>
+          </a:p>
+          <a:p>
+            <a:pPr marL="0" indent="0" lvl="0">
+              <a:lnSpc>
+                <a:spcPct val="104000"/>
+              </a:lnSpc>
+              <a:buNone/>
+            </a:pPr>
+            <a:r>
+              <a:rPr lang="zh-CN" sz="1128" dirty="0">
                 <a:solidFill>
                   <a:srgbClr val="8A4B2A"/>
                 </a:solidFill>
@@ -14291,10 +15378,10 @@
                 <a:ea typeface="Noto Sans Mono CJK SC"/>
                 <a:cs typeface="Noto Sans Mono CJK SC"/>
               </a:rPr>
-              <a:t>auto</a:t>
-            </a:r>
-            <a:r>
-              <a:rPr lang="zh-CN" sz="912" dirty="0">
+              <a:t>for</a:t>
+            </a:r>
+            <a:r>
+              <a:rPr lang="zh-CN" sz="1128" dirty="0">
                 <a:solidFill>
                   <a:srgbClr val="1A1A18"/>
                 </a:solidFill>
@@ -14302,62 +15389,62 @@
                 <a:ea typeface="Noto Sans Mono CJK SC"/>
                 <a:cs typeface="Noto Sans Mono CJK SC"/>
               </a:rPr>
-              <a:t> shortest = distance_;</a:t>
-            </a:r>
-          </a:p>
-          <a:p>
-            <a:pPr marL="0" indent="0" lvl="0">
-              <a:lnSpc>
-                <a:spcPct val="104000"/>
-              </a:lnSpc>
-              <a:buNone/>
-            </a:pPr>
-            <a:r>
-              <a:rPr lang="zh-CN" sz="912" dirty="0">
-                <a:solidFill>
-                  <a:srgbClr val="1A1A18"/>
+              <a:t> (std::</a:t>
+            </a:r>
+            <a:r>
+              <a:rPr lang="zh-CN" sz="1128" dirty="0">
+                <a:solidFill>
+                  <a:srgbClr val="2C6B57"/>
                 </a:solidFill>
                 <a:latin typeface="Noto Sans Mono CJK SC"/>
                 <a:ea typeface="Noto Sans Mono CJK SC"/>
                 <a:cs typeface="Noto Sans Mono CJK SC"/>
               </a:rPr>
-              <a:t>    </a:t>
-            </a:r>
-            <a:r>
-              <a:rPr lang="zh-CN" sz="912" dirty="0">
-                <a:solidFill>
-                  <a:srgbClr val="8A4B2A"/>
+              <a:t>size_t</a:t>
+            </a:r>
+            <a:r>
+              <a:rPr lang="zh-CN" sz="1128" dirty="0">
+                <a:solidFill>
+                  <a:srgbClr val="1A1A18"/>
                 </a:solidFill>
                 <a:latin typeface="Noto Sans Mono CJK SC"/>
                 <a:ea typeface="Noto Sans Mono CJK SC"/>
                 <a:cs typeface="Noto Sans Mono CJK SC"/>
               </a:rPr>
-              <a:t>for</a:t>
-            </a:r>
-            <a:r>
-              <a:rPr lang="zh-CN" sz="912" dirty="0">
-                <a:solidFill>
-                  <a:srgbClr val="1A1A18"/>
+              <a:t> from = </a:t>
+            </a:r>
+            <a:r>
+              <a:rPr lang="zh-CN" sz="1128" dirty="0">
+                <a:solidFill>
+                  <a:srgbClr val="4A5AA8"/>
                 </a:solidFill>
                 <a:latin typeface="Noto Sans Mono CJK SC"/>
                 <a:ea typeface="Noto Sans Mono CJK SC"/>
                 <a:cs typeface="Noto Sans Mono CJK SC"/>
               </a:rPr>
-              <a:t> (std::</a:t>
-            </a:r>
-            <a:r>
-              <a:rPr lang="zh-CN" sz="912" dirty="0">
-                <a:solidFill>
-                  <a:srgbClr val="2C6B57"/>
+              <a:t>0</a:t>
+            </a:r>
+            <a:r>
+              <a:rPr lang="zh-CN" sz="1128" dirty="0">
+                <a:solidFill>
+                  <a:srgbClr val="1A1A18"/>
                 </a:solidFill>
                 <a:latin typeface="Noto Sans Mono CJK SC"/>
                 <a:ea typeface="Noto Sans Mono CJK SC"/>
                 <a:cs typeface="Noto Sans Mono CJK SC"/>
               </a:rPr>
-              <a:t>size_t</a:t>
-            </a:r>
-            <a:r>
-              <a:rPr lang="zh-CN" sz="912" dirty="0">
+              <a:t>; from &lt; people; ++from) {</a:t>
+            </a:r>
+          </a:p>
+          <a:p>
+            <a:pPr marL="0" indent="0" lvl="0">
+              <a:lnSpc>
+                <a:spcPct val="104000"/>
+              </a:lnSpc>
+              <a:buNone/>
+            </a:pPr>
+            <a:r>
+              <a:rPr lang="zh-CN" sz="1128" dirty="0">
                 <a:solidFill>
                   <a:srgbClr val="1A1A18"/>
                 </a:solidFill>
@@ -14365,21 +15452,21 @@
                 <a:ea typeface="Noto Sans Mono CJK SC"/>
                 <a:cs typeface="Noto Sans Mono CJK SC"/>
               </a:rPr>
-              <a:t> via = </a:t>
-            </a:r>
-            <a:r>
-              <a:rPr lang="zh-CN" sz="912" dirty="0">
-                <a:solidFill>
-                  <a:srgbClr val="4A5AA8"/>
+              <a:t>    </a:t>
+            </a:r>
+            <a:r>
+              <a:rPr lang="zh-CN" sz="1128" dirty="0">
+                <a:solidFill>
+                  <a:srgbClr val="8A4B2A"/>
                 </a:solidFill>
                 <a:latin typeface="Noto Sans Mono CJK SC"/>
                 <a:ea typeface="Noto Sans Mono CJK SC"/>
                 <a:cs typeface="Noto Sans Mono CJK SC"/>
               </a:rPr>
-              <a:t>0</a:t>
-            </a:r>
-            <a:r>
-              <a:rPr lang="zh-CN" sz="912" dirty="0">
+              <a:t>for</a:t>
+            </a:r>
+            <a:r>
+              <a:rPr lang="zh-CN" sz="1128" dirty="0">
                 <a:solidFill>
                   <a:srgbClr val="1A1A18"/>
                 </a:solidFill>
@@ -14387,62 +15474,62 @@
                 <a:ea typeface="Noto Sans Mono CJK SC"/>
                 <a:cs typeface="Noto Sans Mono CJK SC"/>
               </a:rPr>
-              <a:t>; via &lt; shortest.size(); ++via) {</a:t>
-            </a:r>
-          </a:p>
-          <a:p>
-            <a:pPr marL="0" indent="0" lvl="0">
-              <a:lnSpc>
-                <a:spcPct val="104000"/>
-              </a:lnSpc>
-              <a:buNone/>
-            </a:pPr>
-            <a:r>
-              <a:rPr lang="zh-CN" sz="912" dirty="0">
-                <a:solidFill>
-                  <a:srgbClr val="1A1A18"/>
+              <a:t> (std::</a:t>
+            </a:r>
+            <a:r>
+              <a:rPr lang="zh-CN" sz="1128" dirty="0">
+                <a:solidFill>
+                  <a:srgbClr val="2C6B57"/>
                 </a:solidFill>
                 <a:latin typeface="Noto Sans Mono CJK SC"/>
                 <a:ea typeface="Noto Sans Mono CJK SC"/>
                 <a:cs typeface="Noto Sans Mono CJK SC"/>
               </a:rPr>
-              <a:t>        </a:t>
-            </a:r>
-            <a:r>
-              <a:rPr lang="zh-CN" sz="912" dirty="0">
-                <a:solidFill>
-                  <a:srgbClr val="8A4B2A"/>
+              <a:t>size_t</a:t>
+            </a:r>
+            <a:r>
+              <a:rPr lang="zh-CN" sz="1128" dirty="0">
+                <a:solidFill>
+                  <a:srgbClr val="1A1A18"/>
                 </a:solidFill>
                 <a:latin typeface="Noto Sans Mono CJK SC"/>
                 <a:ea typeface="Noto Sans Mono CJK SC"/>
                 <a:cs typeface="Noto Sans Mono CJK SC"/>
               </a:rPr>
-              <a:t>for</a:t>
-            </a:r>
-            <a:r>
-              <a:rPr lang="zh-CN" sz="912" dirty="0">
-                <a:solidFill>
-                  <a:srgbClr val="1A1A18"/>
+              <a:t> to = </a:t>
+            </a:r>
+            <a:r>
+              <a:rPr lang="zh-CN" sz="1128" dirty="0">
+                <a:solidFill>
+                  <a:srgbClr val="4A5AA8"/>
                 </a:solidFill>
                 <a:latin typeface="Noto Sans Mono CJK SC"/>
                 <a:ea typeface="Noto Sans Mono CJK SC"/>
                 <a:cs typeface="Noto Sans Mono CJK SC"/>
               </a:rPr>
-              <a:t> (std::</a:t>
-            </a:r>
-            <a:r>
-              <a:rPr lang="zh-CN" sz="912" dirty="0">
-                <a:solidFill>
-                  <a:srgbClr val="2C6B57"/>
+              <a:t>0</a:t>
+            </a:r>
+            <a:r>
+              <a:rPr lang="zh-CN" sz="1128" dirty="0">
+                <a:solidFill>
+                  <a:srgbClr val="1A1A18"/>
                 </a:solidFill>
                 <a:latin typeface="Noto Sans Mono CJK SC"/>
                 <a:ea typeface="Noto Sans Mono CJK SC"/>
                 <a:cs typeface="Noto Sans Mono CJK SC"/>
               </a:rPr>
-              <a:t>size_t</a:t>
-            </a:r>
-            <a:r>
-              <a:rPr lang="zh-CN" sz="912" dirty="0">
+              <a:t>; to &lt; people; ++to) {</a:t>
+            </a:r>
+          </a:p>
+          <a:p>
+            <a:pPr marL="0" indent="0" lvl="0">
+              <a:lnSpc>
+                <a:spcPct val="104000"/>
+              </a:lnSpc>
+              <a:buNone/>
+            </a:pPr>
+            <a:r>
+              <a:rPr lang="zh-CN" sz="1128" dirty="0">
                 <a:solidFill>
                   <a:srgbClr val="1A1A18"/>
                 </a:solidFill>
@@ -14450,21 +15537,21 @@
                 <a:ea typeface="Noto Sans Mono CJK SC"/>
                 <a:cs typeface="Noto Sans Mono CJK SC"/>
               </a:rPr>
-              <a:t> from = </a:t>
-            </a:r>
-            <a:r>
-              <a:rPr lang="zh-CN" sz="912" dirty="0">
-                <a:solidFill>
-                  <a:srgbClr val="4A5AA8"/>
+              <a:t>        </a:t>
+            </a:r>
+            <a:r>
+              <a:rPr lang="zh-CN" sz="1128" dirty="0">
+                <a:solidFill>
+                  <a:srgbClr val="8A4B2A"/>
                 </a:solidFill>
                 <a:latin typeface="Noto Sans Mono CJK SC"/>
                 <a:ea typeface="Noto Sans Mono CJK SC"/>
                 <a:cs typeface="Noto Sans Mono CJK SC"/>
               </a:rPr>
-              <a:t>0</a:t>
-            </a:r>
-            <a:r>
-              <a:rPr lang="zh-CN" sz="912" dirty="0">
+              <a:t>if</a:t>
+            </a:r>
+            <a:r>
+              <a:rPr lang="zh-CN" sz="1128" dirty="0">
                 <a:solidFill>
                   <a:srgbClr val="1A1A18"/>
                 </a:solidFill>
@@ -14472,7 +15559,7 @@
                 <a:ea typeface="Noto Sans Mono CJK SC"/>
                 <a:cs typeface="Noto Sans Mono CJK SC"/>
               </a:rPr>
-              <a:t>; from &lt; shortest.size(); ++from) {</a:t>
+              <a:t> (distance_[from][to] != infinity) {</a:t>
             </a:r>
           </a:p>
           <a:p>
@@ -14483,7 +15570,7 @@
               <a:buNone/>
             </a:pPr>
             <a:r>
-              <a:rPr lang="zh-CN" sz="912" dirty="0">
+              <a:rPr lang="zh-CN" sz="1128" dirty="0">
                 <a:solidFill>
                   <a:srgbClr val="1A1A18"/>
                 </a:solidFill>
@@ -14491,21 +15578,37 @@
                 <a:ea typeface="Noto Sans Mono CJK SC"/>
                 <a:cs typeface="Noto Sans Mono CJK SC"/>
               </a:rPr>
-              <a:t>            </a:t>
-            </a:r>
-            <a:r>
-              <a:rPr lang="zh-CN" sz="912" dirty="0">
-                <a:solidFill>
-                  <a:srgbClr val="8A4B2A"/>
+              <a:t>            shortest[from][to] = distance_[from][to];</a:t>
+            </a:r>
+          </a:p>
+          <a:p>
+            <a:pPr marL="0" indent="0" lvl="0">
+              <a:lnSpc>
+                <a:spcPct val="104000"/>
+              </a:lnSpc>
+              <a:buNone/>
+            </a:pPr>
+            <a:r>
+              <a:rPr lang="zh-CN" sz="1128" dirty="0">
+                <a:solidFill>
+                  <a:srgbClr val="1A1A18"/>
                 </a:solidFill>
                 <a:latin typeface="Noto Sans Mono CJK SC"/>
                 <a:ea typeface="Noto Sans Mono CJK SC"/>
                 <a:cs typeface="Noto Sans Mono CJK SC"/>
               </a:rPr>
-              <a:t>for</a:t>
-            </a:r>
-            <a:r>
-              <a:rPr lang="zh-CN" sz="912" dirty="0">
+              <a:t>        }</a:t>
+            </a:r>
+          </a:p>
+          <a:p>
+            <a:pPr marL="0" indent="0" lvl="0">
+              <a:lnSpc>
+                <a:spcPct val="104000"/>
+              </a:lnSpc>
+              <a:buNone/>
+            </a:pPr>
+            <a:r>
+              <a:rPr lang="zh-CN" sz="1128" dirty="0">
                 <a:solidFill>
                   <a:srgbClr val="1A1A18"/>
                 </a:solidFill>
@@ -14513,62 +15616,70 @@
                 <a:ea typeface="Noto Sans Mono CJK SC"/>
                 <a:cs typeface="Noto Sans Mono CJK SC"/>
               </a:rPr>
-              <a:t> (std::</a:t>
-            </a:r>
-            <a:r>
-              <a:rPr lang="zh-CN" sz="912" dirty="0">
-                <a:solidFill>
-                  <a:srgbClr val="2C6B57"/>
+              <a:t>    }</a:t>
+            </a:r>
+          </a:p>
+          <a:p>
+            <a:pPr marL="0" indent="0" lvl="0">
+              <a:lnSpc>
+                <a:spcPct val="104000"/>
+              </a:lnSpc>
+              <a:buNone/>
+            </a:pPr>
+            <a:r>
+              <a:rPr lang="zh-CN" sz="1128" dirty="0">
+                <a:solidFill>
+                  <a:srgbClr val="1A1A18"/>
                 </a:solidFill>
                 <a:latin typeface="Noto Sans Mono CJK SC"/>
                 <a:ea typeface="Noto Sans Mono CJK SC"/>
                 <a:cs typeface="Noto Sans Mono CJK SC"/>
               </a:rPr>
-              <a:t>size_t</a:t>
-            </a:r>
-            <a:r>
-              <a:rPr lang="zh-CN" sz="912" dirty="0">
-                <a:solidFill>
-                  <a:srgbClr val="1A1A18"/>
+              <a:t>}</a:t>
+            </a:r>
+          </a:p>
+          <a:p>
+            <a:pPr marL="0" indent="0" lvl="0">
+              <a:lnSpc>
+                <a:spcPct val="104000"/>
+              </a:lnSpc>
+              <a:buNone/>
+            </a:pPr>
+            <a:r>
+              <a:rPr lang="zh-CN" sz="1128" dirty="0">
+                <a:solidFill>
+                  <a:srgbClr val="8A4B2A"/>
                 </a:solidFill>
                 <a:latin typeface="Noto Sans Mono CJK SC"/>
                 <a:ea typeface="Noto Sans Mono CJK SC"/>
                 <a:cs typeface="Noto Sans Mono CJK SC"/>
               </a:rPr>
-              <a:t> to = </a:t>
-            </a:r>
-            <a:r>
-              <a:rPr lang="zh-CN" sz="912" dirty="0">
-                <a:solidFill>
-                  <a:srgbClr val="4A5AA8"/>
+              <a:t>for</a:t>
+            </a:r>
+            <a:r>
+              <a:rPr lang="zh-CN" sz="1128" dirty="0">
+                <a:solidFill>
+                  <a:srgbClr val="1A1A18"/>
                 </a:solidFill>
                 <a:latin typeface="Noto Sans Mono CJK SC"/>
                 <a:ea typeface="Noto Sans Mono CJK SC"/>
                 <a:cs typeface="Noto Sans Mono CJK SC"/>
               </a:rPr>
-              <a:t>0</a:t>
-            </a:r>
-            <a:r>
-              <a:rPr lang="zh-CN" sz="912" dirty="0">
-                <a:solidFill>
-                  <a:srgbClr val="1A1A18"/>
+              <a:t> (std::</a:t>
+            </a:r>
+            <a:r>
+              <a:rPr lang="zh-CN" sz="1128" dirty="0">
+                <a:solidFill>
+                  <a:srgbClr val="2C6B57"/>
                 </a:solidFill>
                 <a:latin typeface="Noto Sans Mono CJK SC"/>
                 <a:ea typeface="Noto Sans Mono CJK SC"/>
                 <a:cs typeface="Noto Sans Mono CJK SC"/>
               </a:rPr>
-              <a:t>; to &lt; shortest.size(); ++to) {</a:t>
-            </a:r>
-          </a:p>
-          <a:p>
-            <a:pPr marL="0" indent="0" lvl="0">
-              <a:lnSpc>
-                <a:spcPct val="104000"/>
-              </a:lnSpc>
-              <a:buNone/>
-            </a:pPr>
-            <a:r>
-              <a:rPr lang="zh-CN" sz="912" dirty="0">
+              <a:t>size_t</a:t>
+            </a:r>
+            <a:r>
+              <a:rPr lang="zh-CN" sz="1128" dirty="0">
                 <a:solidFill>
                   <a:srgbClr val="1A1A18"/>
                 </a:solidFill>
@@ -14576,21 +15687,21 @@
                 <a:ea typeface="Noto Sans Mono CJK SC"/>
                 <a:cs typeface="Noto Sans Mono CJK SC"/>
               </a:rPr>
-              <a:t>                </a:t>
-            </a:r>
-            <a:r>
-              <a:rPr lang="zh-CN" sz="912" dirty="0">
-                <a:solidFill>
-                  <a:srgbClr val="8A4B2A"/>
+              <a:t> via = </a:t>
+            </a:r>
+            <a:r>
+              <a:rPr lang="zh-CN" sz="1128" dirty="0">
+                <a:solidFill>
+                  <a:srgbClr val="4A5AA8"/>
                 </a:solidFill>
                 <a:latin typeface="Noto Sans Mono CJK SC"/>
                 <a:ea typeface="Noto Sans Mono CJK SC"/>
                 <a:cs typeface="Noto Sans Mono CJK SC"/>
               </a:rPr>
-              <a:t>if</a:t>
-            </a:r>
-            <a:r>
-              <a:rPr lang="zh-CN" sz="912" dirty="0">
+              <a:t>0</a:t>
+            </a:r>
+            <a:r>
+              <a:rPr lang="zh-CN" sz="1128" dirty="0">
                 <a:solidFill>
                   <a:srgbClr val="1A1A18"/>
                 </a:solidFill>
@@ -14598,7 +15709,7 @@
                 <a:ea typeface="Noto Sans Mono CJK SC"/>
                 <a:cs typeface="Noto Sans Mono CJK SC"/>
               </a:rPr>
-              <a:t> (shortest[from][via] != infinity &amp;&amp;</a:t>
+              <a:t>; via &lt; people; ++via) {</a:t>
             </a:r>
           </a:p>
           <a:p>
@@ -14609,7 +15720,7 @@
               <a:buNone/>
             </a:pPr>
             <a:r>
-              <a:rPr lang="zh-CN" sz="912" dirty="0">
+              <a:rPr lang="zh-CN" sz="1128" dirty="0">
                 <a:solidFill>
                   <a:srgbClr val="1A1A18"/>
                 </a:solidFill>
@@ -14617,37 +15728,21 @@
                 <a:ea typeface="Noto Sans Mono CJK SC"/>
                 <a:cs typeface="Noto Sans Mono CJK SC"/>
               </a:rPr>
-              <a:t>                    shortest[via][to] != infinity &amp;&amp;</a:t>
-            </a:r>
-          </a:p>
-          <a:p>
-            <a:pPr marL="0" indent="0" lvl="0">
-              <a:lnSpc>
-                <a:spcPct val="104000"/>
-              </a:lnSpc>
-              <a:buNone/>
-            </a:pPr>
-            <a:r>
-              <a:rPr lang="zh-CN" sz="912" dirty="0">
-                <a:solidFill>
-                  <a:srgbClr val="1A1A18"/>
+              <a:t>    </a:t>
+            </a:r>
+            <a:r>
+              <a:rPr lang="zh-CN" sz="1128" dirty="0">
+                <a:solidFill>
+                  <a:srgbClr val="8A4B2A"/>
                 </a:solidFill>
                 <a:latin typeface="Noto Sans Mono CJK SC"/>
                 <a:ea typeface="Noto Sans Mono CJK SC"/>
                 <a:cs typeface="Noto Sans Mono CJK SC"/>
               </a:rPr>
-              <a:t>                    shortest[from][to] &gt; shortest[from][via] + shortest[via][to]) {</a:t>
-            </a:r>
-          </a:p>
-          <a:p>
-            <a:pPr marL="0" indent="0" lvl="0">
-              <a:lnSpc>
-                <a:spcPct val="104000"/>
-              </a:lnSpc>
-              <a:buNone/>
-            </a:pPr>
-            <a:r>
-              <a:rPr lang="zh-CN" sz="912" dirty="0">
+              <a:t>for</a:t>
+            </a:r>
+            <a:r>
+              <a:rPr lang="zh-CN" sz="1128" dirty="0">
                 <a:solidFill>
                   <a:srgbClr val="1A1A18"/>
                 </a:solidFill>
@@ -14655,37 +15750,21 @@
                 <a:ea typeface="Noto Sans Mono CJK SC"/>
                 <a:cs typeface="Noto Sans Mono CJK SC"/>
               </a:rPr>
-              <a:t>                    shortest[from][to] = shortest[from][via] + shortest[via][to];</a:t>
-            </a:r>
-          </a:p>
-          <a:p>
-            <a:pPr marL="0" indent="0" lvl="0">
-              <a:lnSpc>
-                <a:spcPct val="104000"/>
-              </a:lnSpc>
-              <a:buNone/>
-            </a:pPr>
-            <a:r>
-              <a:rPr lang="zh-CN" sz="912" dirty="0">
-                <a:solidFill>
-                  <a:srgbClr val="1A1A18"/>
+              <a:t> (std::</a:t>
+            </a:r>
+            <a:r>
+              <a:rPr lang="zh-CN" sz="1128" dirty="0">
+                <a:solidFill>
+                  <a:srgbClr val="2C6B57"/>
                 </a:solidFill>
                 <a:latin typeface="Noto Sans Mono CJK SC"/>
                 <a:ea typeface="Noto Sans Mono CJK SC"/>
                 <a:cs typeface="Noto Sans Mono CJK SC"/>
               </a:rPr>
-              <a:t>                }</a:t>
-            </a:r>
-          </a:p>
-          <a:p>
-            <a:pPr marL="0" indent="0" lvl="0">
-              <a:lnSpc>
-                <a:spcPct val="104000"/>
-              </a:lnSpc>
-              <a:buNone/>
-            </a:pPr>
-            <a:r>
-              <a:rPr lang="zh-CN" sz="912" dirty="0">
+              <a:t>size_t</a:t>
+            </a:r>
+            <a:r>
+              <a:rPr lang="zh-CN" sz="1128" dirty="0">
                 <a:solidFill>
                   <a:srgbClr val="1A1A18"/>
                 </a:solidFill>
@@ -14693,37 +15772,21 @@
                 <a:ea typeface="Noto Sans Mono CJK SC"/>
                 <a:cs typeface="Noto Sans Mono CJK SC"/>
               </a:rPr>
-              <a:t>            }</a:t>
-            </a:r>
-          </a:p>
-          <a:p>
-            <a:pPr marL="0" indent="0" lvl="0">
-              <a:lnSpc>
-                <a:spcPct val="104000"/>
-              </a:lnSpc>
-              <a:buNone/>
-            </a:pPr>
-            <a:r>
-              <a:rPr lang="zh-CN" sz="912" dirty="0">
-                <a:solidFill>
-                  <a:srgbClr val="1A1A18"/>
+              <a:t> from = </a:t>
+            </a:r>
+            <a:r>
+              <a:rPr lang="zh-CN" sz="1128" dirty="0">
+                <a:solidFill>
+                  <a:srgbClr val="4A5AA8"/>
                 </a:solidFill>
                 <a:latin typeface="Noto Sans Mono CJK SC"/>
                 <a:ea typeface="Noto Sans Mono CJK SC"/>
                 <a:cs typeface="Noto Sans Mono CJK SC"/>
               </a:rPr>
-              <a:t>        }</a:t>
-            </a:r>
-          </a:p>
-          <a:p>
-            <a:pPr marL="0" indent="0" lvl="0">
-              <a:lnSpc>
-                <a:spcPct val="104000"/>
-              </a:lnSpc>
-              <a:buNone/>
-            </a:pPr>
-            <a:r>
-              <a:rPr lang="zh-CN" sz="912" dirty="0">
+              <a:t>0</a:t>
+            </a:r>
+            <a:r>
+              <a:rPr lang="zh-CN" sz="1128" dirty="0">
                 <a:solidFill>
                   <a:srgbClr val="1A1A18"/>
                 </a:solidFill>
@@ -14731,7 +15794,7 @@
                 <a:ea typeface="Noto Sans Mono CJK SC"/>
                 <a:cs typeface="Noto Sans Mono CJK SC"/>
               </a:rPr>
-              <a:t>    }</a:t>
+              <a:t>; from &lt; people; ++from) {</a:t>
             </a:r>
           </a:p>
           <a:p>
@@ -14742,7 +15805,7 @@
               <a:buNone/>
             </a:pPr>
             <a:r>
-              <a:rPr lang="zh-CN" sz="912" dirty="0">
+              <a:rPr lang="zh-CN" sz="1128" dirty="0">
                 <a:solidFill>
                   <a:srgbClr val="1A1A18"/>
                 </a:solidFill>
@@ -14750,59 +15813,43 @@
                 <a:ea typeface="Noto Sans Mono CJK SC"/>
                 <a:cs typeface="Noto Sans Mono CJK SC"/>
               </a:rPr>
-              <a:t> </a:t>
-            </a:r>
-          </a:p>
-          <a:p>
-            <a:pPr marL="0" indent="0" lvl="0">
-              <a:lnSpc>
-                <a:spcPct val="104000"/>
-              </a:lnSpc>
-              <a:buNone/>
-            </a:pPr>
-            <a:r>
-              <a:rPr lang="zh-CN" sz="912" dirty="0">
-                <a:solidFill>
-                  <a:srgbClr val="1A1A18"/>
+              <a:t>        </a:t>
+            </a:r>
+            <a:r>
+              <a:rPr lang="zh-CN" sz="1128" dirty="0">
+                <a:solidFill>
+                  <a:srgbClr val="8A4B2A"/>
                 </a:solidFill>
                 <a:latin typeface="Noto Sans Mono CJK SC"/>
                 <a:ea typeface="Noto Sans Mono CJK SC"/>
                 <a:cs typeface="Noto Sans Mono CJK SC"/>
               </a:rPr>
-              <a:t>    std::optional&lt;std::</a:t>
-            </a:r>
-            <a:r>
-              <a:rPr lang="zh-CN" sz="912" dirty="0">
-                <a:solidFill>
-                  <a:srgbClr val="2C6B57"/>
+              <a:t>for</a:t>
+            </a:r>
+            <a:r>
+              <a:rPr lang="zh-CN" sz="1128" dirty="0">
+                <a:solidFill>
+                  <a:srgbClr val="1A1A18"/>
                 </a:solidFill>
                 <a:latin typeface="Noto Sans Mono CJK SC"/>
                 <a:ea typeface="Noto Sans Mono CJK SC"/>
                 <a:cs typeface="Noto Sans Mono CJK SC"/>
               </a:rPr>
-              <a:t>size_t</a:t>
-            </a:r>
-            <a:r>
-              <a:rPr lang="zh-CN" sz="912" dirty="0">
-                <a:solidFill>
-                  <a:srgbClr val="1A1A18"/>
+              <a:t> (std::</a:t>
+            </a:r>
+            <a:r>
+              <a:rPr lang="zh-CN" sz="1128" dirty="0">
+                <a:solidFill>
+                  <a:srgbClr val="2C6B57"/>
                 </a:solidFill>
                 <a:latin typeface="Noto Sans Mono CJK SC"/>
                 <a:ea typeface="Noto Sans Mono CJK SC"/>
                 <a:cs typeface="Noto Sans Mono CJK SC"/>
               </a:rPr>
-              <a:t>&gt; result;</a:t>
-            </a:r>
-          </a:p>
-          <a:p>
-            <a:pPr marL="0" indent="0" lvl="0">
-              <a:lnSpc>
-                <a:spcPct val="104000"/>
-              </a:lnSpc>
-              <a:buNone/>
-            </a:pPr>
-            <a:r>
-              <a:rPr lang="zh-CN" sz="912" dirty="0">
+              <a:t>size_t</a:t>
+            </a:r>
+            <a:r>
+              <a:rPr lang="zh-CN" sz="1128" dirty="0">
                 <a:solidFill>
                   <a:srgbClr val="1A1A18"/>
                 </a:solidFill>
@@ -14810,21 +15857,21 @@
                 <a:ea typeface="Noto Sans Mono CJK SC"/>
                 <a:cs typeface="Noto Sans Mono CJK SC"/>
               </a:rPr>
-              <a:t>    </a:t>
-            </a:r>
-            <a:r>
-              <a:rPr lang="zh-CN" sz="912" dirty="0">
-                <a:solidFill>
-                  <a:srgbClr val="2C6B57"/>
+              <a:t> to = </a:t>
+            </a:r>
+            <a:r>
+              <a:rPr lang="zh-CN" sz="1128" dirty="0">
+                <a:solidFill>
+                  <a:srgbClr val="4A5AA8"/>
                 </a:solidFill>
                 <a:latin typeface="Noto Sans Mono CJK SC"/>
                 <a:ea typeface="Noto Sans Mono CJK SC"/>
                 <a:cs typeface="Noto Sans Mono CJK SC"/>
               </a:rPr>
-              <a:t>int</a:t>
-            </a:r>
-            <a:r>
-              <a:rPr lang="zh-CN" sz="912" dirty="0">
+              <a:t>0</a:t>
+            </a:r>
+            <a:r>
+              <a:rPr lang="zh-CN" sz="1128" dirty="0">
                 <a:solidFill>
                   <a:srgbClr val="1A1A18"/>
                 </a:solidFill>
@@ -14832,7 +15879,7 @@
                 <a:ea typeface="Noto Sans Mono CJK SC"/>
                 <a:cs typeface="Noto Sans Mono CJK SC"/>
               </a:rPr>
-              <a:t> smallest_eccentricity = infinity;</a:t>
+              <a:t>; to &lt; people; ++to) {</a:t>
             </a:r>
           </a:p>
           <a:p>
@@ -14843,7 +15890,7 @@
               <a:buNone/>
             </a:pPr>
             <a:r>
-              <a:rPr lang="zh-CN" sz="912" dirty="0">
+              <a:rPr lang="zh-CN" sz="1128" dirty="0">
                 <a:solidFill>
                   <a:srgbClr val="1A1A18"/>
                 </a:solidFill>
@@ -14851,10 +15898,10 @@
                 <a:ea typeface="Noto Sans Mono CJK SC"/>
                 <a:cs typeface="Noto Sans Mono CJK SC"/>
               </a:rPr>
-              <a:t>    </a:t>
-            </a:r>
-            <a:r>
-              <a:rPr lang="zh-CN" sz="912" dirty="0">
+              <a:t>            </a:t>
+            </a:r>
+            <a:r>
+              <a:rPr lang="zh-CN" sz="1128" dirty="0">
                 <a:solidFill>
                   <a:srgbClr val="8A4B2A"/>
                 </a:solidFill>
@@ -14862,10 +15909,10 @@
                 <a:ea typeface="Noto Sans Mono CJK SC"/>
                 <a:cs typeface="Noto Sans Mono CJK SC"/>
               </a:rPr>
-              <a:t>for</a:t>
-            </a:r>
-            <a:r>
-              <a:rPr lang="zh-CN" sz="912" dirty="0">
+              <a:t>if</a:t>
+            </a:r>
+            <a:r>
+              <a:rPr lang="zh-CN" sz="1128" dirty="0">
                 <a:solidFill>
                   <a:srgbClr val="1A1A18"/>
                 </a:solidFill>
@@ -14873,21 +15920,37 @@
                 <a:ea typeface="Noto Sans Mono CJK SC"/>
                 <a:cs typeface="Noto Sans Mono CJK SC"/>
               </a:rPr>
-              <a:t> (std::</a:t>
-            </a:r>
-            <a:r>
-              <a:rPr lang="zh-CN" sz="912" dirty="0">
-                <a:solidFill>
-                  <a:srgbClr val="2C6B57"/>
+              <a:t> (shortest[from][via] != unreachable &amp;&amp;</a:t>
+            </a:r>
+          </a:p>
+          <a:p>
+            <a:pPr marL="0" indent="0" lvl="0">
+              <a:lnSpc>
+                <a:spcPct val="104000"/>
+              </a:lnSpc>
+              <a:buNone/>
+            </a:pPr>
+            <a:r>
+              <a:rPr lang="zh-CN" sz="1128" dirty="0">
+                <a:solidFill>
+                  <a:srgbClr val="1A1A18"/>
                 </a:solidFill>
                 <a:latin typeface="Noto Sans Mono CJK SC"/>
                 <a:ea typeface="Noto Sans Mono CJK SC"/>
                 <a:cs typeface="Noto Sans Mono CJK SC"/>
               </a:rPr>
-              <a:t>size_t</a:t>
-            </a:r>
-            <a:r>
-              <a:rPr lang="zh-CN" sz="912" dirty="0">
+              <a:t>                shortest[via][to] != unreachable &amp;&amp;</a:t>
+            </a:r>
+          </a:p>
+          <a:p>
+            <a:pPr marL="0" indent="0" lvl="0">
+              <a:lnSpc>
+                <a:spcPct val="104000"/>
+              </a:lnSpc>
+              <a:buNone/>
+            </a:pPr>
+            <a:r>
+              <a:rPr lang="zh-CN" sz="1128" dirty="0">
                 <a:solidFill>
                   <a:srgbClr val="1A1A18"/>
                 </a:solidFill>
@@ -14895,21 +15958,37 @@
                 <a:ea typeface="Noto Sans Mono CJK SC"/>
                 <a:cs typeface="Noto Sans Mono CJK SC"/>
               </a:rPr>
-              <a:t> from = </a:t>
-            </a:r>
-            <a:r>
-              <a:rPr lang="zh-CN" sz="912" dirty="0">
-                <a:solidFill>
-                  <a:srgbClr val="4A5AA8"/>
+              <a:t>                shortest[from][to] &gt; shortest[from][via] + shortest[via][to]) {</a:t>
+            </a:r>
+          </a:p>
+          <a:p>
+            <a:pPr marL="0" indent="0" lvl="0">
+              <a:lnSpc>
+                <a:spcPct val="104000"/>
+              </a:lnSpc>
+              <a:buNone/>
+            </a:pPr>
+            <a:r>
+              <a:rPr lang="zh-CN" sz="1128" dirty="0">
+                <a:solidFill>
+                  <a:srgbClr val="1A1A18"/>
                 </a:solidFill>
                 <a:latin typeface="Noto Sans Mono CJK SC"/>
                 <a:ea typeface="Noto Sans Mono CJK SC"/>
                 <a:cs typeface="Noto Sans Mono CJK SC"/>
               </a:rPr>
-              <a:t>0</a:t>
-            </a:r>
-            <a:r>
-              <a:rPr lang="zh-CN" sz="912" dirty="0">
+              <a:t>                shortest[from][to] = shortest[from][via] + shortest[via][to];</a:t>
+            </a:r>
+          </a:p>
+          <a:p>
+            <a:pPr marL="0" indent="0" lvl="0">
+              <a:lnSpc>
+                <a:spcPct val="104000"/>
+              </a:lnSpc>
+              <a:buNone/>
+            </a:pPr>
+            <a:r>
+              <a:rPr lang="zh-CN" sz="1128" dirty="0">
                 <a:solidFill>
                   <a:srgbClr val="1A1A18"/>
                 </a:solidFill>
@@ -14917,7 +15996,7 @@
                 <a:ea typeface="Noto Sans Mono CJK SC"/>
                 <a:cs typeface="Noto Sans Mono CJK SC"/>
               </a:rPr>
-              <a:t>; from &lt; shortest.size(); ++from) {</a:t>
+              <a:t>            }</a:t>
             </a:r>
           </a:p>
           <a:p>
@@ -14928,7 +16007,7 @@
               <a:buNone/>
             </a:pPr>
             <a:r>
-              <a:rPr lang="zh-CN" sz="912" dirty="0">
+              <a:rPr lang="zh-CN" sz="1128" dirty="0">
                 <a:solidFill>
                   <a:srgbClr val="1A1A18"/>
                 </a:solidFill>
@@ -14936,21 +16015,37 @@
                 <a:ea typeface="Noto Sans Mono CJK SC"/>
                 <a:cs typeface="Noto Sans Mono CJK SC"/>
               </a:rPr>
-              <a:t>        </a:t>
-            </a:r>
-            <a:r>
-              <a:rPr lang="zh-CN" sz="912" dirty="0">
-                <a:solidFill>
-                  <a:srgbClr val="2C6B57"/>
+              <a:t>        }</a:t>
+            </a:r>
+          </a:p>
+          <a:p>
+            <a:pPr marL="0" indent="0" lvl="0">
+              <a:lnSpc>
+                <a:spcPct val="104000"/>
+              </a:lnSpc>
+              <a:buNone/>
+            </a:pPr>
+            <a:r>
+              <a:rPr lang="zh-CN" sz="1128" dirty="0">
+                <a:solidFill>
+                  <a:srgbClr val="1A1A18"/>
                 </a:solidFill>
                 <a:latin typeface="Noto Sans Mono CJK SC"/>
                 <a:ea typeface="Noto Sans Mono CJK SC"/>
                 <a:cs typeface="Noto Sans Mono CJK SC"/>
               </a:rPr>
-              <a:t>int</a:t>
-            </a:r>
-            <a:r>
-              <a:rPr lang="zh-CN" sz="912" dirty="0">
+              <a:t>    }</a:t>
+            </a:r>
+          </a:p>
+          <a:p>
+            <a:pPr marL="0" indent="0" lvl="0">
+              <a:lnSpc>
+                <a:spcPct val="104000"/>
+              </a:lnSpc>
+              <a:buNone/>
+            </a:pPr>
+            <a:r>
+              <a:rPr lang="zh-CN" sz="1128" dirty="0">
                 <a:solidFill>
                   <a:srgbClr val="1A1A18"/>
                 </a:solidFill>
@@ -14958,306 +16053,6 @@
                 <a:ea typeface="Noto Sans Mono CJK SC"/>
                 <a:cs typeface="Noto Sans Mono CJK SC"/>
               </a:rPr>
-              <a:t> largest_distance = </a:t>
-            </a:r>
-            <a:r>
-              <a:rPr lang="zh-CN" sz="912" dirty="0">
-                <a:solidFill>
-                  <a:srgbClr val="4A5AA8"/>
-                </a:solidFill>
-                <a:latin typeface="Noto Sans Mono CJK SC"/>
-                <a:ea typeface="Noto Sans Mono CJK SC"/>
-                <a:cs typeface="Noto Sans Mono CJK SC"/>
-              </a:rPr>
-              <a:t>0</a:t>
-            </a:r>
-            <a:r>
-              <a:rPr lang="zh-CN" sz="912" dirty="0">
-                <a:solidFill>
-                  <a:srgbClr val="1A1A18"/>
-                </a:solidFill>
-                <a:latin typeface="Noto Sans Mono CJK SC"/>
-                <a:ea typeface="Noto Sans Mono CJK SC"/>
-                <a:cs typeface="Noto Sans Mono CJK SC"/>
-              </a:rPr>
-              <a:t>;</a:t>
-            </a:r>
-          </a:p>
-          <a:p>
-            <a:pPr marL="0" indent="0" lvl="0">
-              <a:lnSpc>
-                <a:spcPct val="104000"/>
-              </a:lnSpc>
-              <a:buNone/>
-            </a:pPr>
-            <a:r>
-              <a:rPr lang="zh-CN" sz="912" dirty="0">
-                <a:solidFill>
-                  <a:srgbClr val="1A1A18"/>
-                </a:solidFill>
-                <a:latin typeface="Noto Sans Mono CJK SC"/>
-                <a:ea typeface="Noto Sans Mono CJK SC"/>
-                <a:cs typeface="Noto Sans Mono CJK SC"/>
-              </a:rPr>
-              <a:t>        </a:t>
-            </a:r>
-            <a:r>
-              <a:rPr lang="zh-CN" sz="912" dirty="0">
-                <a:solidFill>
-                  <a:srgbClr val="8A4B2A"/>
-                </a:solidFill>
-                <a:latin typeface="Noto Sans Mono CJK SC"/>
-                <a:ea typeface="Noto Sans Mono CJK SC"/>
-                <a:cs typeface="Noto Sans Mono CJK SC"/>
-              </a:rPr>
-              <a:t>for</a:t>
-            </a:r>
-            <a:r>
-              <a:rPr lang="zh-CN" sz="912" dirty="0">
-                <a:solidFill>
-                  <a:srgbClr val="1A1A18"/>
-                </a:solidFill>
-                <a:latin typeface="Noto Sans Mono CJK SC"/>
-                <a:ea typeface="Noto Sans Mono CJK SC"/>
-                <a:cs typeface="Noto Sans Mono CJK SC"/>
-              </a:rPr>
-              <a:t> (</a:t>
-            </a:r>
-            <a:r>
-              <a:rPr lang="zh-CN" sz="912" dirty="0">
-                <a:solidFill>
-                  <a:srgbClr val="2C6B57"/>
-                </a:solidFill>
-                <a:latin typeface="Noto Sans Mono CJK SC"/>
-                <a:ea typeface="Noto Sans Mono CJK SC"/>
-                <a:cs typeface="Noto Sans Mono CJK SC"/>
-              </a:rPr>
-              <a:t>int</a:t>
-            </a:r>
-            <a:r>
-              <a:rPr lang="zh-CN" sz="912" dirty="0">
-                <a:solidFill>
-                  <a:srgbClr val="1A1A18"/>
-                </a:solidFill>
-                <a:latin typeface="Noto Sans Mono CJK SC"/>
-                <a:ea typeface="Noto Sans Mono CJK SC"/>
-                <a:cs typeface="Noto Sans Mono CJK SC"/>
-              </a:rPr>
-              <a:t> distance : shortest[from]) {</a:t>
-            </a:r>
-          </a:p>
-          <a:p>
-            <a:pPr marL="0" indent="0" lvl="0">
-              <a:lnSpc>
-                <a:spcPct val="104000"/>
-              </a:lnSpc>
-              <a:buNone/>
-            </a:pPr>
-            <a:r>
-              <a:rPr lang="zh-CN" sz="912" dirty="0">
-                <a:solidFill>
-                  <a:srgbClr val="1A1A18"/>
-                </a:solidFill>
-                <a:latin typeface="Noto Sans Mono CJK SC"/>
-                <a:ea typeface="Noto Sans Mono CJK SC"/>
-                <a:cs typeface="Noto Sans Mono CJK SC"/>
-              </a:rPr>
-              <a:t>            largest_distance = distance &gt; largest_distance ? distance : largest_distance;</a:t>
-            </a:r>
-          </a:p>
-          <a:p>
-            <a:pPr marL="0" indent="0" lvl="0">
-              <a:lnSpc>
-                <a:spcPct val="104000"/>
-              </a:lnSpc>
-              <a:buNone/>
-            </a:pPr>
-            <a:r>
-              <a:rPr lang="zh-CN" sz="912" dirty="0">
-                <a:solidFill>
-                  <a:srgbClr val="1A1A18"/>
-                </a:solidFill>
-                <a:latin typeface="Noto Sans Mono CJK SC"/>
-                <a:ea typeface="Noto Sans Mono CJK SC"/>
-                <a:cs typeface="Noto Sans Mono CJK SC"/>
-              </a:rPr>
-              <a:t>        }</a:t>
-            </a:r>
-          </a:p>
-          <a:p>
-            <a:pPr marL="0" indent="0" lvl="0">
-              <a:lnSpc>
-                <a:spcPct val="104000"/>
-              </a:lnSpc>
-              <a:buNone/>
-            </a:pPr>
-            <a:r>
-              <a:rPr lang="zh-CN" sz="912" dirty="0">
-                <a:solidFill>
-                  <a:srgbClr val="1A1A18"/>
-                </a:solidFill>
-                <a:latin typeface="Noto Sans Mono CJK SC"/>
-                <a:ea typeface="Noto Sans Mono CJK SC"/>
-                <a:cs typeface="Noto Sans Mono CJK SC"/>
-              </a:rPr>
-              <a:t>        </a:t>
-            </a:r>
-            <a:r>
-              <a:rPr lang="zh-CN" sz="912" dirty="0">
-                <a:solidFill>
-                  <a:srgbClr val="8A4B2A"/>
-                </a:solidFill>
-                <a:latin typeface="Noto Sans Mono CJK SC"/>
-                <a:ea typeface="Noto Sans Mono CJK SC"/>
-                <a:cs typeface="Noto Sans Mono CJK SC"/>
-              </a:rPr>
-              <a:t>if</a:t>
-            </a:r>
-            <a:r>
-              <a:rPr lang="zh-CN" sz="912" dirty="0">
-                <a:solidFill>
-                  <a:srgbClr val="1A1A18"/>
-                </a:solidFill>
-                <a:latin typeface="Noto Sans Mono CJK SC"/>
-                <a:ea typeface="Noto Sans Mono CJK SC"/>
-                <a:cs typeface="Noto Sans Mono CJK SC"/>
-              </a:rPr>
-              <a:t> (largest_distance &lt; smallest_eccentricity) {</a:t>
-            </a:r>
-          </a:p>
-          <a:p>
-            <a:pPr marL="0" indent="0" lvl="0">
-              <a:lnSpc>
-                <a:spcPct val="104000"/>
-              </a:lnSpc>
-              <a:buNone/>
-            </a:pPr>
-            <a:r>
-              <a:rPr lang="zh-CN" sz="912" dirty="0">
-                <a:solidFill>
-                  <a:srgbClr val="1A1A18"/>
-                </a:solidFill>
-                <a:latin typeface="Noto Sans Mono CJK SC"/>
-                <a:ea typeface="Noto Sans Mono CJK SC"/>
-                <a:cs typeface="Noto Sans Mono CJK SC"/>
-              </a:rPr>
-              <a:t>            smallest_eccentricity = largest_distance;</a:t>
-            </a:r>
-          </a:p>
-          <a:p>
-            <a:pPr marL="0" indent="0" lvl="0">
-              <a:lnSpc>
-                <a:spcPct val="104000"/>
-              </a:lnSpc>
-              <a:buNone/>
-            </a:pPr>
-            <a:r>
-              <a:rPr lang="zh-CN" sz="912" dirty="0">
-                <a:solidFill>
-                  <a:srgbClr val="1A1A18"/>
-                </a:solidFill>
-                <a:latin typeface="Noto Sans Mono CJK SC"/>
-                <a:ea typeface="Noto Sans Mono CJK SC"/>
-                <a:cs typeface="Noto Sans Mono CJK SC"/>
-              </a:rPr>
-              <a:t>            result = from;</a:t>
-            </a:r>
-          </a:p>
-          <a:p>
-            <a:pPr marL="0" indent="0" lvl="0">
-              <a:lnSpc>
-                <a:spcPct val="104000"/>
-              </a:lnSpc>
-              <a:buNone/>
-            </a:pPr>
-            <a:r>
-              <a:rPr lang="zh-CN" sz="912" dirty="0">
-                <a:solidFill>
-                  <a:srgbClr val="1A1A18"/>
-                </a:solidFill>
-                <a:latin typeface="Noto Sans Mono CJK SC"/>
-                <a:ea typeface="Noto Sans Mono CJK SC"/>
-                <a:cs typeface="Noto Sans Mono CJK SC"/>
-              </a:rPr>
-              <a:t>        }</a:t>
-            </a:r>
-          </a:p>
-          <a:p>
-            <a:pPr marL="0" indent="0" lvl="0">
-              <a:lnSpc>
-                <a:spcPct val="104000"/>
-              </a:lnSpc>
-              <a:buNone/>
-            </a:pPr>
-            <a:r>
-              <a:rPr lang="zh-CN" sz="912" dirty="0">
-                <a:solidFill>
-                  <a:srgbClr val="1A1A18"/>
-                </a:solidFill>
-                <a:latin typeface="Noto Sans Mono CJK SC"/>
-                <a:ea typeface="Noto Sans Mono CJK SC"/>
-                <a:cs typeface="Noto Sans Mono CJK SC"/>
-              </a:rPr>
-              <a:t>    }</a:t>
-            </a:r>
-          </a:p>
-          <a:p>
-            <a:pPr marL="0" indent="0" lvl="0">
-              <a:lnSpc>
-                <a:spcPct val="104000"/>
-              </a:lnSpc>
-              <a:buNone/>
-            </a:pPr>
-            <a:r>
-              <a:rPr lang="zh-CN" sz="912" dirty="0">
-                <a:solidFill>
-                  <a:srgbClr val="1A1A18"/>
-                </a:solidFill>
-                <a:latin typeface="Noto Sans Mono CJK SC"/>
-                <a:ea typeface="Noto Sans Mono CJK SC"/>
-                <a:cs typeface="Noto Sans Mono CJK SC"/>
-              </a:rPr>
-              <a:t>    </a:t>
-            </a:r>
-            <a:r>
-              <a:rPr lang="zh-CN" sz="912" dirty="0">
-                <a:solidFill>
-                  <a:srgbClr val="8A4B2A"/>
-                </a:solidFill>
-                <a:latin typeface="Noto Sans Mono CJK SC"/>
-                <a:ea typeface="Noto Sans Mono CJK SC"/>
-                <a:cs typeface="Noto Sans Mono CJK SC"/>
-              </a:rPr>
-              <a:t>return</a:t>
-            </a:r>
-            <a:r>
-              <a:rPr lang="zh-CN" sz="912" dirty="0">
-                <a:solidFill>
-                  <a:srgbClr val="1A1A18"/>
-                </a:solidFill>
-                <a:latin typeface="Noto Sans Mono CJK SC"/>
-                <a:ea typeface="Noto Sans Mono CJK SC"/>
-                <a:cs typeface="Noto Sans Mono CJK SC"/>
-              </a:rPr>
-              <a:t> result;</a:t>
-            </a:r>
-          </a:p>
-          <a:p>
-            <a:pPr marL="0" indent="0" lvl="0">
-              <a:lnSpc>
-                <a:spcPct val="104000"/>
-              </a:lnSpc>
-              <a:buNone/>
-            </a:pPr>
-            <a:r>
-              <a:rPr lang="zh-CN" sz="912" dirty="0">
-                <a:solidFill>
-                  <a:srgbClr val="1A1A18"/>
-                </a:solidFill>
-                <a:latin typeface="Noto Sans Mono CJK SC"/>
-                <a:ea typeface="Noto Sans Mono CJK SC"/>
-                <a:cs typeface="Noto Sans Mono CJK SC"/>
-              </a:rPr>
               <a:t>}</a:t>
             </a:r>
           </a:p>
@@ -15265,14 +16060,14 @@
       </p:sp>
       <p:sp>
         <p:nvSpPr>
-          <p:cNvPr id="5" name="正文"/>
+          <p:cNvPr id="6" name="页脚"/>
           <p:cNvSpPr txBox="1"/>
           <p:nvPr/>
         </p:nvSpPr>
         <p:spPr>
           <a:xfrm>
-            <a:off x="566928" y="6017524"/>
-            <a:ext cx="11058144" cy="232806"/>
+            <a:off x="566928" y="6419088"/>
+            <a:ext cx="7740700" cy="274320"/>
           </a:xfrm>
           <a:prstGeom prst="rect">
             <a:avLst/>
@@ -15292,51 +16087,29 @@
               <a:buNone/>
             </a:pPr>
             <a:r>
-              <a:rPr lang="zh-CN" sz="1368" dirty="0">
-                <a:solidFill>
-                  <a:srgbClr val="1A1A18"/>
-                </a:solidFill>
-                <a:latin typeface="Segoe UI"/>
-                <a:ea typeface="Noto Sans CJK SC"/>
-                <a:cs typeface="Segoe UI"/>
-              </a:rPr>
-              <a:t>先跑 Floyd，再对每个起点取</a:t>
-            </a:r>
-            <a:r>
-              <a:rPr lang="zh-CN" sz="1368" dirty="0" b="1">
-                <a:solidFill>
-                  <a:srgbClr val="8A4B2A"/>
-                </a:solidFill>
-                <a:latin typeface="Segoe UI"/>
-                <a:ea typeface="Noto Sans CJK SC"/>
-                <a:cs typeface="Segoe UI"/>
-              </a:rPr>
-              <a:t>这一行的最大值</a:t>
-            </a:r>
-            <a:r>
-              <a:rPr lang="zh-CN" sz="1368" dirty="0">
-                <a:solidFill>
-                  <a:srgbClr val="1A1A18"/>
-                </a:solidFill>
-                <a:latin typeface="Segoe UI"/>
-                <a:ea typeface="Noto Sans CJK SC"/>
-                <a:cs typeface="Segoe UI"/>
-              </a:rPr>
-              <a:t>，最后在所有起点里取最小。</a:t>
-            </a:r>
-          </a:p>
-        </p:txBody>
-      </p:sp>
-      <p:sp>
-        <p:nvSpPr>
-          <p:cNvPr id="6" name="页脚"/>
+              <a:rPr lang="zh-CN" sz="1000" dirty="0">
+                <a:solidFill>
+                  <a:srgbClr val="6B6B66"/>
+                </a:solidFill>
+                <a:latin typeface="Segoe UI"/>
+                <a:ea typeface="Noto Sans CJK SC"/>
+                <a:cs typeface="Segoe UI"/>
+              </a:rPr>
+              <a:t>第1章 概论</a:t>
+            </a:r>
+          </a:p>
+        </p:txBody>
+      </p:sp>
+      <p:sp>
+        <p:nvSpPr>
+          <p:cNvPr id="7" name="页码"/>
           <p:cNvSpPr txBox="1"/>
           <p:nvPr/>
         </p:nvSpPr>
         <p:spPr>
           <a:xfrm>
-            <a:off x="566928" y="6419088"/>
-            <a:ext cx="7740700" cy="274320"/>
+            <a:off x="8307628" y="6419088"/>
+            <a:ext cx="3317443" cy="274320"/>
           </a:xfrm>
           <a:prstGeom prst="rect">
             <a:avLst/>
@@ -15349,7 +16122,7 @@
           </a:bodyPr>
           <a:lstStyle/>
           <a:p>
-            <a:pPr marL="0" indent="0" lvl="0">
+            <a:pPr marL="0" indent="0" lvl="0" algn="r">
               <a:lnSpc>
                 <a:spcPct val="100000"/>
               </a:lnSpc>
@@ -15364,49 +16137,7 @@
                 <a:ea typeface="Noto Sans CJK SC"/>
                 <a:cs typeface="Segoe UI"/>
               </a:rPr>
-              <a:t>第1章 概论</a:t>
-            </a:r>
-          </a:p>
-        </p:txBody>
-      </p:sp>
-      <p:sp>
-        <p:nvSpPr>
-          <p:cNvPr id="7" name="页码"/>
-          <p:cNvSpPr txBox="1"/>
-          <p:nvPr/>
-        </p:nvSpPr>
-        <p:spPr>
-          <a:xfrm>
-            <a:off x="8307628" y="6419088"/>
-            <a:ext cx="3317443" cy="274320"/>
-          </a:xfrm>
-          <a:prstGeom prst="rect">
-            <a:avLst/>
-          </a:prstGeom>
-          <a:noFill/>
-        </p:spPr>
-        <p:txBody>
-          <a:bodyPr wrap="square" lIns="0" tIns="0" rIns="0" bIns="0">
-            <a:noAutofit/>
-          </a:bodyPr>
-          <a:lstStyle/>
-          <a:p>
-            <a:pPr marL="0" indent="0" lvl="0" algn="r">
-              <a:lnSpc>
-                <a:spcPct val="100000"/>
-              </a:lnSpc>
-              <a:buNone/>
-            </a:pPr>
-            <a:r>
-              <a:rPr lang="zh-CN" sz="1000" dirty="0">
-                <a:solidFill>
-                  <a:srgbClr val="6B6B66"/>
-                </a:solidFill>
-                <a:latin typeface="Segoe UI"/>
-                <a:ea typeface="Noto Sans CJK SC"/>
-                <a:cs typeface="Segoe UI"/>
-              </a:rPr>
-              <a:t>6 / 28</a:t>
+              <a:t>6 / 29</a:t>
             </a:r>
           </a:p>
         </p:txBody>
@@ -15417,6 +16148,697 @@
 </file>
 
 <file path=ppt/slides/slide7.xml><?xml version="1.0" encoding="utf-8"?>
+<p:sld xmlns:a="http://schemas.openxmlformats.org/drawingml/2006/main" xmlns:r="http://schemas.openxmlformats.org/officeDocument/2006/relationships" xmlns:p="http://schemas.openxmlformats.org/presentationml/2006/main">
+  <p:cSld>
+    <p:spTree>
+      <p:nvGrpSpPr>
+        <p:cNvPr id="1" name=""/>
+        <p:cNvGrpSpPr/>
+        <p:nvPr/>
+      </p:nvGrpSpPr>
+      <p:grpSpPr>
+        <a:xfrm>
+          <a:off x="0" y="0"/>
+          <a:ext cx="0" cy="0"/>
+          <a:chOff x="0" y="0"/>
+          <a:chExt cx="0" cy="0"/>
+        </a:xfrm>
+      </p:grpSpPr>
+      <p:sp>
+        <p:nvSpPr>
+          <p:cNvPr id="2" name="标题"/>
+          <p:cNvSpPr txBox="1"/>
+          <p:nvPr/>
+        </p:nvSpPr>
+        <p:spPr>
+          <a:xfrm>
+            <a:off x="566928" y="384048"/>
+            <a:ext cx="11058144" cy="487680"/>
+          </a:xfrm>
+          <a:prstGeom prst="rect">
+            <a:avLst/>
+          </a:prstGeom>
+          <a:noFill/>
+        </p:spPr>
+        <p:txBody>
+          <a:bodyPr wrap="square" lIns="0" tIns="0" rIns="0" bIns="0">
+            <a:noAutofit/>
+          </a:bodyPr>
+          <a:lstStyle/>
+          <a:p>
+            <a:pPr marL="0" indent="0" lvl="0">
+              <a:lnSpc>
+                <a:spcPct val="100000"/>
+              </a:lnSpc>
+              <a:buNone/>
+            </a:pPr>
+            <a:r>
+              <a:rPr lang="zh-CN" sz="3200" dirty="0" b="1">
+                <a:solidFill>
+                  <a:srgbClr val="1A1A18"/>
+                </a:solidFill>
+                <a:latin typeface="Segoe UI"/>
+                <a:ea typeface="Noto Sans CJK SC"/>
+                <a:cs typeface="Segoe UI"/>
+              </a:rPr>
+              <a:t>实现（续）：每行取最大，再在所有起点里取最小</a:t>
+            </a:r>
+          </a:p>
+        </p:txBody>
+      </p:sp>
+      <p:sp>
+        <p:nvSpPr>
+          <p:cNvPr id="3" name="标题线"/>
+          <p:cNvSpPr/>
+          <p:nvPr/>
+        </p:nvSpPr>
+        <p:spPr>
+          <a:xfrm>
+            <a:off x="566928" y="935736"/>
+            <a:ext cx="11058144" cy="32004"/>
+          </a:xfrm>
+          <a:prstGeom prst="rect">
+            <a:avLst/>
+          </a:prstGeom>
+          <a:solidFill>
+            <a:srgbClr val="8A4B2A"/>
+          </a:solidFill>
+          <a:ln>
+            <a:noFill/>
+          </a:ln>
+        </p:spPr>
+        <p:txBody>
+          <a:bodyPr/>
+          <a:lstStyle/>
+          <a:p/>
+        </p:txBody>
+      </p:sp>
+      <p:sp>
+        <p:nvSpPr>
+          <p:cNvPr id="4" name="代码"/>
+          <p:cNvSpPr txBox="1"/>
+          <p:nvPr/>
+        </p:nvSpPr>
+        <p:spPr>
+          <a:xfrm>
+            <a:off x="566928" y="1312063"/>
+            <a:ext cx="11058144" cy="3973372"/>
+          </a:xfrm>
+          <a:prstGeom prst="roundRect">
+            <a:avLst>
+              <a:gd name="adj" fmla="val 6000"/>
+            </a:avLst>
+          </a:prstGeom>
+          <a:solidFill>
+            <a:srgbClr val="F5F4F0"/>
+          </a:solidFill>
+          <a:ln w="9525">
+            <a:solidFill>
+              <a:srgbClr val="DCDCD6"/>
+            </a:solidFill>
+          </a:ln>
+        </p:spPr>
+        <p:txBody>
+          <a:bodyPr wrap="square" lIns="100584" tIns="100584" rIns="100584" bIns="100584">
+            <a:noAutofit/>
+          </a:bodyPr>
+          <a:lstStyle/>
+          <a:p>
+            <a:pPr marL="0" indent="0" lvl="0">
+              <a:lnSpc>
+                <a:spcPct val="100000"/>
+              </a:lnSpc>
+              <a:buNone/>
+            </a:pPr>
+            <a:r>
+              <a:rPr lang="zh-CN" sz="1216" dirty="0">
+                <a:solidFill>
+                  <a:srgbClr val="6B6B66"/>
+                </a:solidFill>
+                <a:latin typeface="Noto Sans Mono CJK SC"/>
+                <a:ea typeface="Noto Sans Mono CJK SC"/>
+                <a:cs typeface="Noto Sans Mono CJK SC"/>
+              </a:rPr>
+              <a:t>code/ch01/adt/modern.hpp#best-source-pick</a:t>
+            </a:r>
+          </a:p>
+          <a:p>
+            <a:pPr marL="0" indent="0" lvl="0">
+              <a:lnSpc>
+                <a:spcPct val="104000"/>
+              </a:lnSpc>
+              <a:buNone/>
+            </a:pPr>
+            <a:r>
+              <a:rPr lang="zh-CN" sz="1560" dirty="0">
+                <a:solidFill>
+                  <a:srgbClr val="1A1A18"/>
+                </a:solidFill>
+                <a:latin typeface="Noto Sans Mono CJK SC"/>
+                <a:ea typeface="Noto Sans Mono CJK SC"/>
+                <a:cs typeface="Noto Sans Mono CJK SC"/>
+              </a:rPr>
+              <a:t>std::optional&lt;std::</a:t>
+            </a:r>
+            <a:r>
+              <a:rPr lang="zh-CN" sz="1560" dirty="0">
+                <a:solidFill>
+                  <a:srgbClr val="2C6B57"/>
+                </a:solidFill>
+                <a:latin typeface="Noto Sans Mono CJK SC"/>
+                <a:ea typeface="Noto Sans Mono CJK SC"/>
+                <a:cs typeface="Noto Sans Mono CJK SC"/>
+              </a:rPr>
+              <a:t>size_t</a:t>
+            </a:r>
+            <a:r>
+              <a:rPr lang="zh-CN" sz="1560" dirty="0">
+                <a:solidFill>
+                  <a:srgbClr val="1A1A18"/>
+                </a:solidFill>
+                <a:latin typeface="Noto Sans Mono CJK SC"/>
+                <a:ea typeface="Noto Sans Mono CJK SC"/>
+                <a:cs typeface="Noto Sans Mono CJK SC"/>
+              </a:rPr>
+              <a:t>&gt; result;</a:t>
+            </a:r>
+          </a:p>
+          <a:p>
+            <a:pPr marL="0" indent="0" lvl="0">
+              <a:lnSpc>
+                <a:spcPct val="104000"/>
+              </a:lnSpc>
+              <a:buNone/>
+            </a:pPr>
+            <a:r>
+              <a:rPr lang="zh-CN" sz="1560" dirty="0">
+                <a:solidFill>
+                  <a:srgbClr val="1A1A18"/>
+                </a:solidFill>
+                <a:latin typeface="Noto Sans Mono CJK SC"/>
+                <a:ea typeface="Noto Sans Mono CJK SC"/>
+                <a:cs typeface="Noto Sans Mono CJK SC"/>
+              </a:rPr>
+              <a:t>distance_type smallest_eccentricity = unreachable;</a:t>
+            </a:r>
+          </a:p>
+          <a:p>
+            <a:pPr marL="0" indent="0" lvl="0">
+              <a:lnSpc>
+                <a:spcPct val="104000"/>
+              </a:lnSpc>
+              <a:buNone/>
+            </a:pPr>
+            <a:r>
+              <a:rPr lang="zh-CN" sz="1560" dirty="0">
+                <a:solidFill>
+                  <a:srgbClr val="8A4B2A"/>
+                </a:solidFill>
+                <a:latin typeface="Noto Sans Mono CJK SC"/>
+                <a:ea typeface="Noto Sans Mono CJK SC"/>
+                <a:cs typeface="Noto Sans Mono CJK SC"/>
+              </a:rPr>
+              <a:t>for</a:t>
+            </a:r>
+            <a:r>
+              <a:rPr lang="zh-CN" sz="1560" dirty="0">
+                <a:solidFill>
+                  <a:srgbClr val="1A1A18"/>
+                </a:solidFill>
+                <a:latin typeface="Noto Sans Mono CJK SC"/>
+                <a:ea typeface="Noto Sans Mono CJK SC"/>
+                <a:cs typeface="Noto Sans Mono CJK SC"/>
+              </a:rPr>
+              <a:t> (std::</a:t>
+            </a:r>
+            <a:r>
+              <a:rPr lang="zh-CN" sz="1560" dirty="0">
+                <a:solidFill>
+                  <a:srgbClr val="2C6B57"/>
+                </a:solidFill>
+                <a:latin typeface="Noto Sans Mono CJK SC"/>
+                <a:ea typeface="Noto Sans Mono CJK SC"/>
+                <a:cs typeface="Noto Sans Mono CJK SC"/>
+              </a:rPr>
+              <a:t>size_t</a:t>
+            </a:r>
+            <a:r>
+              <a:rPr lang="zh-CN" sz="1560" dirty="0">
+                <a:solidFill>
+                  <a:srgbClr val="1A1A18"/>
+                </a:solidFill>
+                <a:latin typeface="Noto Sans Mono CJK SC"/>
+                <a:ea typeface="Noto Sans Mono CJK SC"/>
+                <a:cs typeface="Noto Sans Mono CJK SC"/>
+              </a:rPr>
+              <a:t> from = </a:t>
+            </a:r>
+            <a:r>
+              <a:rPr lang="zh-CN" sz="1560" dirty="0">
+                <a:solidFill>
+                  <a:srgbClr val="4A5AA8"/>
+                </a:solidFill>
+                <a:latin typeface="Noto Sans Mono CJK SC"/>
+                <a:ea typeface="Noto Sans Mono CJK SC"/>
+                <a:cs typeface="Noto Sans Mono CJK SC"/>
+              </a:rPr>
+              <a:t>0</a:t>
+            </a:r>
+            <a:r>
+              <a:rPr lang="zh-CN" sz="1560" dirty="0">
+                <a:solidFill>
+                  <a:srgbClr val="1A1A18"/>
+                </a:solidFill>
+                <a:latin typeface="Noto Sans Mono CJK SC"/>
+                <a:ea typeface="Noto Sans Mono CJK SC"/>
+                <a:cs typeface="Noto Sans Mono CJK SC"/>
+              </a:rPr>
+              <a:t>; from &lt; people; ++from) {</a:t>
+            </a:r>
+          </a:p>
+          <a:p>
+            <a:pPr marL="0" indent="0" lvl="0">
+              <a:lnSpc>
+                <a:spcPct val="104000"/>
+              </a:lnSpc>
+              <a:buNone/>
+            </a:pPr>
+            <a:r>
+              <a:rPr lang="zh-CN" sz="1560" dirty="0">
+                <a:solidFill>
+                  <a:srgbClr val="1A1A18"/>
+                </a:solidFill>
+                <a:latin typeface="Noto Sans Mono CJK SC"/>
+                <a:ea typeface="Noto Sans Mono CJK SC"/>
+                <a:cs typeface="Noto Sans Mono CJK SC"/>
+              </a:rPr>
+              <a:t>    distance_type largest_distance = </a:t>
+            </a:r>
+            <a:r>
+              <a:rPr lang="zh-CN" sz="1560" dirty="0">
+                <a:solidFill>
+                  <a:srgbClr val="4A5AA8"/>
+                </a:solidFill>
+                <a:latin typeface="Noto Sans Mono CJK SC"/>
+                <a:ea typeface="Noto Sans Mono CJK SC"/>
+                <a:cs typeface="Noto Sans Mono CJK SC"/>
+              </a:rPr>
+              <a:t>0</a:t>
+            </a:r>
+            <a:r>
+              <a:rPr lang="zh-CN" sz="1560" dirty="0">
+                <a:solidFill>
+                  <a:srgbClr val="1A1A18"/>
+                </a:solidFill>
+                <a:latin typeface="Noto Sans Mono CJK SC"/>
+                <a:ea typeface="Noto Sans Mono CJK SC"/>
+                <a:cs typeface="Noto Sans Mono CJK SC"/>
+              </a:rPr>
+              <a:t>;</a:t>
+            </a:r>
+          </a:p>
+          <a:p>
+            <a:pPr marL="0" indent="0" lvl="0">
+              <a:lnSpc>
+                <a:spcPct val="104000"/>
+              </a:lnSpc>
+              <a:buNone/>
+            </a:pPr>
+            <a:r>
+              <a:rPr lang="zh-CN" sz="1560" dirty="0">
+                <a:solidFill>
+                  <a:srgbClr val="1A1A18"/>
+                </a:solidFill>
+                <a:latin typeface="Noto Sans Mono CJK SC"/>
+                <a:ea typeface="Noto Sans Mono CJK SC"/>
+                <a:cs typeface="Noto Sans Mono CJK SC"/>
+              </a:rPr>
+              <a:t>    </a:t>
+            </a:r>
+            <a:r>
+              <a:rPr lang="zh-CN" sz="1560" dirty="0">
+                <a:solidFill>
+                  <a:srgbClr val="8A4B2A"/>
+                </a:solidFill>
+                <a:latin typeface="Noto Sans Mono CJK SC"/>
+                <a:ea typeface="Noto Sans Mono CJK SC"/>
+                <a:cs typeface="Noto Sans Mono CJK SC"/>
+              </a:rPr>
+              <a:t>for</a:t>
+            </a:r>
+            <a:r>
+              <a:rPr lang="zh-CN" sz="1560" dirty="0">
+                <a:solidFill>
+                  <a:srgbClr val="1A1A18"/>
+                </a:solidFill>
+                <a:latin typeface="Noto Sans Mono CJK SC"/>
+                <a:ea typeface="Noto Sans Mono CJK SC"/>
+                <a:cs typeface="Noto Sans Mono CJK SC"/>
+              </a:rPr>
+              <a:t> (distance_type distance : shortest[from]) {</a:t>
+            </a:r>
+          </a:p>
+          <a:p>
+            <a:pPr marL="0" indent="0" lvl="0">
+              <a:lnSpc>
+                <a:spcPct val="104000"/>
+              </a:lnSpc>
+              <a:buNone/>
+            </a:pPr>
+            <a:r>
+              <a:rPr lang="zh-CN" sz="1560" dirty="0">
+                <a:solidFill>
+                  <a:srgbClr val="1A1A18"/>
+                </a:solidFill>
+                <a:latin typeface="Noto Sans Mono CJK SC"/>
+                <a:ea typeface="Noto Sans Mono CJK SC"/>
+                <a:cs typeface="Noto Sans Mono CJK SC"/>
+              </a:rPr>
+              <a:t>        largest_distance = distance &gt; largest_distance ? distance : largest_distance;</a:t>
+            </a:r>
+          </a:p>
+          <a:p>
+            <a:pPr marL="0" indent="0" lvl="0">
+              <a:lnSpc>
+                <a:spcPct val="104000"/>
+              </a:lnSpc>
+              <a:buNone/>
+            </a:pPr>
+            <a:r>
+              <a:rPr lang="zh-CN" sz="1560" dirty="0">
+                <a:solidFill>
+                  <a:srgbClr val="1A1A18"/>
+                </a:solidFill>
+                <a:latin typeface="Noto Sans Mono CJK SC"/>
+                <a:ea typeface="Noto Sans Mono CJK SC"/>
+                <a:cs typeface="Noto Sans Mono CJK SC"/>
+              </a:rPr>
+              <a:t>    }</a:t>
+            </a:r>
+          </a:p>
+          <a:p>
+            <a:pPr marL="0" indent="0" lvl="0">
+              <a:lnSpc>
+                <a:spcPct val="104000"/>
+              </a:lnSpc>
+              <a:buNone/>
+            </a:pPr>
+            <a:r>
+              <a:rPr lang="zh-CN" sz="1560" dirty="0">
+                <a:solidFill>
+                  <a:srgbClr val="1A1A18"/>
+                </a:solidFill>
+                <a:latin typeface="Noto Sans Mono CJK SC"/>
+                <a:ea typeface="Noto Sans Mono CJK SC"/>
+                <a:cs typeface="Noto Sans Mono CJK SC"/>
+              </a:rPr>
+              <a:t>    </a:t>
+            </a:r>
+            <a:r>
+              <a:rPr lang="zh-CN" sz="1560" dirty="0">
+                <a:solidFill>
+                  <a:srgbClr val="8A4B2A"/>
+                </a:solidFill>
+                <a:latin typeface="Noto Sans Mono CJK SC"/>
+                <a:ea typeface="Noto Sans Mono CJK SC"/>
+                <a:cs typeface="Noto Sans Mono CJK SC"/>
+              </a:rPr>
+              <a:t>if</a:t>
+            </a:r>
+            <a:r>
+              <a:rPr lang="zh-CN" sz="1560" dirty="0">
+                <a:solidFill>
+                  <a:srgbClr val="1A1A18"/>
+                </a:solidFill>
+                <a:latin typeface="Noto Sans Mono CJK SC"/>
+                <a:ea typeface="Noto Sans Mono CJK SC"/>
+                <a:cs typeface="Noto Sans Mono CJK SC"/>
+              </a:rPr>
+              <a:t> (largest_distance &lt; smallest_eccentricity) {</a:t>
+            </a:r>
+          </a:p>
+          <a:p>
+            <a:pPr marL="0" indent="0" lvl="0">
+              <a:lnSpc>
+                <a:spcPct val="104000"/>
+              </a:lnSpc>
+              <a:buNone/>
+            </a:pPr>
+            <a:r>
+              <a:rPr lang="zh-CN" sz="1560" dirty="0">
+                <a:solidFill>
+                  <a:srgbClr val="1A1A18"/>
+                </a:solidFill>
+                <a:latin typeface="Noto Sans Mono CJK SC"/>
+                <a:ea typeface="Noto Sans Mono CJK SC"/>
+                <a:cs typeface="Noto Sans Mono CJK SC"/>
+              </a:rPr>
+              <a:t>        smallest_eccentricity = largest_distance;</a:t>
+            </a:r>
+          </a:p>
+          <a:p>
+            <a:pPr marL="0" indent="0" lvl="0">
+              <a:lnSpc>
+                <a:spcPct val="104000"/>
+              </a:lnSpc>
+              <a:buNone/>
+            </a:pPr>
+            <a:r>
+              <a:rPr lang="zh-CN" sz="1560" dirty="0">
+                <a:solidFill>
+                  <a:srgbClr val="1A1A18"/>
+                </a:solidFill>
+                <a:latin typeface="Noto Sans Mono CJK SC"/>
+                <a:ea typeface="Noto Sans Mono CJK SC"/>
+                <a:cs typeface="Noto Sans Mono CJK SC"/>
+              </a:rPr>
+              <a:t>        result = from;</a:t>
+            </a:r>
+          </a:p>
+          <a:p>
+            <a:pPr marL="0" indent="0" lvl="0">
+              <a:lnSpc>
+                <a:spcPct val="104000"/>
+              </a:lnSpc>
+              <a:buNone/>
+            </a:pPr>
+            <a:r>
+              <a:rPr lang="zh-CN" sz="1560" dirty="0">
+                <a:solidFill>
+                  <a:srgbClr val="1A1A18"/>
+                </a:solidFill>
+                <a:latin typeface="Noto Sans Mono CJK SC"/>
+                <a:ea typeface="Noto Sans Mono CJK SC"/>
+                <a:cs typeface="Noto Sans Mono CJK SC"/>
+              </a:rPr>
+              <a:t>    }</a:t>
+            </a:r>
+          </a:p>
+          <a:p>
+            <a:pPr marL="0" indent="0" lvl="0">
+              <a:lnSpc>
+                <a:spcPct val="104000"/>
+              </a:lnSpc>
+              <a:buNone/>
+            </a:pPr>
+            <a:r>
+              <a:rPr lang="zh-CN" sz="1560" dirty="0">
+                <a:solidFill>
+                  <a:srgbClr val="1A1A18"/>
+                </a:solidFill>
+                <a:latin typeface="Noto Sans Mono CJK SC"/>
+                <a:ea typeface="Noto Sans Mono CJK SC"/>
+                <a:cs typeface="Noto Sans Mono CJK SC"/>
+              </a:rPr>
+              <a:t>}</a:t>
+            </a:r>
+          </a:p>
+          <a:p>
+            <a:pPr marL="0" indent="0" lvl="0">
+              <a:lnSpc>
+                <a:spcPct val="104000"/>
+              </a:lnSpc>
+              <a:buNone/>
+            </a:pPr>
+            <a:r>
+              <a:rPr lang="zh-CN" sz="1560" dirty="0">
+                <a:solidFill>
+                  <a:srgbClr val="8A4B2A"/>
+                </a:solidFill>
+                <a:latin typeface="Noto Sans Mono CJK SC"/>
+                <a:ea typeface="Noto Sans Mono CJK SC"/>
+                <a:cs typeface="Noto Sans Mono CJK SC"/>
+              </a:rPr>
+              <a:t>return</a:t>
+            </a:r>
+            <a:r>
+              <a:rPr lang="zh-CN" sz="1560" dirty="0">
+                <a:solidFill>
+                  <a:srgbClr val="1A1A18"/>
+                </a:solidFill>
+                <a:latin typeface="Noto Sans Mono CJK SC"/>
+                <a:ea typeface="Noto Sans Mono CJK SC"/>
+                <a:cs typeface="Noto Sans Mono CJK SC"/>
+              </a:rPr>
+              <a:t> result;</a:t>
+            </a:r>
+          </a:p>
+        </p:txBody>
+      </p:sp>
+      <p:sp>
+        <p:nvSpPr>
+          <p:cNvPr id="5" name="正文"/>
+          <p:cNvSpPr txBox="1"/>
+          <p:nvPr/>
+        </p:nvSpPr>
+        <p:spPr>
+          <a:xfrm>
+            <a:off x="566928" y="5351475"/>
+            <a:ext cx="11058144" cy="796442"/>
+          </a:xfrm>
+          <a:prstGeom prst="rect">
+            <a:avLst/>
+          </a:prstGeom>
+          <a:noFill/>
+        </p:spPr>
+        <p:txBody>
+          <a:bodyPr wrap="square" lIns="0" tIns="0" rIns="0" bIns="0">
+            <a:noAutofit/>
+          </a:bodyPr>
+          <a:lstStyle/>
+          <a:p>
+            <a:pPr marL="0" indent="0" lvl="0">
+              <a:lnSpc>
+                <a:spcPct val="100000"/>
+              </a:lnSpc>
+              <a:buNone/>
+            </a:pPr>
+            <a:r>
+              <a:rPr lang="zh-CN" sz="2340" dirty="0">
+                <a:solidFill>
+                  <a:srgbClr val="1A1A18"/>
+                </a:solidFill>
+                <a:latin typeface="Segoe UI"/>
+                <a:ea typeface="Noto Sans CJK SC"/>
+                <a:cs typeface="Segoe UI"/>
+              </a:rPr>
+              <a:t>第二件事：对每个起点取</a:t>
+            </a:r>
+            <a:r>
+              <a:rPr lang="zh-CN" sz="2340" dirty="0" b="1">
+                <a:solidFill>
+                  <a:srgbClr val="8A4B2A"/>
+                </a:solidFill>
+                <a:latin typeface="Segoe UI"/>
+                <a:ea typeface="Noto Sans CJK SC"/>
+                <a:cs typeface="Segoe UI"/>
+              </a:rPr>
+              <a:t>这一行的最大值</a:t>
+            </a:r>
+            <a:r>
+              <a:rPr lang="zh-CN" sz="2340" dirty="0">
+                <a:solidFill>
+                  <a:srgbClr val="1A1A18"/>
+                </a:solidFill>
+                <a:latin typeface="Segoe UI"/>
+                <a:ea typeface="Noto Sans CJK SC"/>
+                <a:cs typeface="Segoe UI"/>
+              </a:rPr>
+              <a:t>（它的完成时间），最后在所有起点里取最小。</a:t>
+            </a:r>
+          </a:p>
+        </p:txBody>
+      </p:sp>
+      <p:sp>
+        <p:nvSpPr>
+          <p:cNvPr id="6" name="页脚"/>
+          <p:cNvSpPr txBox="1"/>
+          <p:nvPr/>
+        </p:nvSpPr>
+        <p:spPr>
+          <a:xfrm>
+            <a:off x="566928" y="6419088"/>
+            <a:ext cx="7740700" cy="274320"/>
+          </a:xfrm>
+          <a:prstGeom prst="rect">
+            <a:avLst/>
+          </a:prstGeom>
+          <a:noFill/>
+        </p:spPr>
+        <p:txBody>
+          <a:bodyPr wrap="square" lIns="0" tIns="0" rIns="0" bIns="0">
+            <a:noAutofit/>
+          </a:bodyPr>
+          <a:lstStyle/>
+          <a:p>
+            <a:pPr marL="0" indent="0" lvl="0">
+              <a:lnSpc>
+                <a:spcPct val="100000"/>
+              </a:lnSpc>
+              <a:buNone/>
+            </a:pPr>
+            <a:r>
+              <a:rPr lang="zh-CN" sz="1000" dirty="0">
+                <a:solidFill>
+                  <a:srgbClr val="6B6B66"/>
+                </a:solidFill>
+                <a:latin typeface="Segoe UI"/>
+                <a:ea typeface="Noto Sans CJK SC"/>
+                <a:cs typeface="Segoe UI"/>
+              </a:rPr>
+              <a:t>第1章 概论</a:t>
+            </a:r>
+          </a:p>
+        </p:txBody>
+      </p:sp>
+      <p:sp>
+        <p:nvSpPr>
+          <p:cNvPr id="7" name="页码"/>
+          <p:cNvSpPr txBox="1"/>
+          <p:nvPr/>
+        </p:nvSpPr>
+        <p:spPr>
+          <a:xfrm>
+            <a:off x="8307628" y="6419088"/>
+            <a:ext cx="3317443" cy="274320"/>
+          </a:xfrm>
+          <a:prstGeom prst="rect">
+            <a:avLst/>
+          </a:prstGeom>
+          <a:noFill/>
+        </p:spPr>
+        <p:txBody>
+          <a:bodyPr wrap="square" lIns="0" tIns="0" rIns="0" bIns="0">
+            <a:noAutofit/>
+          </a:bodyPr>
+          <a:lstStyle/>
+          <a:p>
+            <a:pPr marL="0" indent="0" lvl="0" algn="r">
+              <a:lnSpc>
+                <a:spcPct val="100000"/>
+              </a:lnSpc>
+              <a:buNone/>
+            </a:pPr>
+            <a:r>
+              <a:rPr lang="zh-CN" sz="1000" dirty="0">
+                <a:solidFill>
+                  <a:srgbClr val="6B6B66"/>
+                </a:solidFill>
+                <a:latin typeface="Segoe UI"/>
+                <a:ea typeface="Noto Sans CJK SC"/>
+                <a:cs typeface="Segoe UI"/>
+              </a:rPr>
+              <a:t>7 / 29</a:t>
+            </a:r>
+          </a:p>
+        </p:txBody>
+      </p:sp>
+    </p:spTree>
+  </p:cSld>
+</p:sld>
+</file>
+
+<file path=ppt/slides/slide8.xml><?xml version="1.0" encoding="utf-8"?>
 <p:sld xmlns:a="http://schemas.openxmlformats.org/drawingml/2006/main" xmlns:r="http://schemas.openxmlformats.org/officeDocument/2006/relationships" xmlns:p="http://schemas.openxmlformats.org/presentationml/2006/main">
   <p:cSld>
     <p:spTree>
@@ -16267,455 +17689,7 @@
                 <a:ea typeface="Noto Sans CJK SC"/>
                 <a:cs typeface="Segoe UI"/>
               </a:rPr>
-              <a:t>7 / 28</a:t>
-            </a:r>
-          </a:p>
-        </p:txBody>
-      </p:sp>
-    </p:spTree>
-  </p:cSld>
-</p:sld>
-</file>
-
-<file path=ppt/slides/slide8.xml><?xml version="1.0" encoding="utf-8"?>
-<p:sld xmlns:a="http://schemas.openxmlformats.org/drawingml/2006/main" xmlns:r="http://schemas.openxmlformats.org/officeDocument/2006/relationships" xmlns:p="http://schemas.openxmlformats.org/presentationml/2006/main">
-  <p:cSld>
-    <p:spTree>
-      <p:nvGrpSpPr>
-        <p:cNvPr id="1" name=""/>
-        <p:cNvGrpSpPr/>
-        <p:nvPr/>
-      </p:nvGrpSpPr>
-      <p:grpSpPr>
-        <a:xfrm>
-          <a:off x="0" y="0"/>
-          <a:ext cx="0" cy="0"/>
-          <a:chOff x="0" y="0"/>
-          <a:chExt cx="0" cy="0"/>
-        </a:xfrm>
-      </p:grpSpPr>
-      <p:sp>
-        <p:nvSpPr>
-          <p:cNvPr id="2" name="标题"/>
-          <p:cNvSpPr txBox="1"/>
-          <p:nvPr/>
-        </p:nvSpPr>
-        <p:spPr>
-          <a:xfrm>
-            <a:off x="566928" y="384048"/>
-            <a:ext cx="11058144" cy="487680"/>
-          </a:xfrm>
-          <a:prstGeom prst="rect">
-            <a:avLst/>
-          </a:prstGeom>
-          <a:noFill/>
-        </p:spPr>
-        <p:txBody>
-          <a:bodyPr wrap="square" lIns="0" tIns="0" rIns="0" bIns="0">
-            <a:noAutofit/>
-          </a:bodyPr>
-          <a:lstStyle/>
-          <a:p>
-            <a:pPr marL="0" indent="0" lvl="0">
-              <a:lnSpc>
-                <a:spcPct val="100000"/>
-              </a:lnSpc>
-              <a:buNone/>
-            </a:pPr>
-            <a:r>
-              <a:rPr lang="zh-CN" sz="3200" dirty="0" b="1">
-                <a:solidFill>
-                  <a:srgbClr val="1A1A18"/>
-                </a:solidFill>
-                <a:latin typeface="Segoe UI"/>
-                <a:ea typeface="Noto Sans CJK SC"/>
-                <a:cs typeface="Segoe UI"/>
-              </a:rPr>
-              <a:t>逻辑结构的三分</a:t>
-            </a:r>
-          </a:p>
-        </p:txBody>
-      </p:sp>
-      <p:sp>
-        <p:nvSpPr>
-          <p:cNvPr id="3" name="标题线"/>
-          <p:cNvSpPr/>
-          <p:nvPr/>
-        </p:nvSpPr>
-        <p:spPr>
-          <a:xfrm>
-            <a:off x="566928" y="935736"/>
-            <a:ext cx="11058144" cy="32004"/>
-          </a:xfrm>
-          <a:prstGeom prst="rect">
-            <a:avLst/>
-          </a:prstGeom>
-          <a:solidFill>
-            <a:srgbClr val="8A4B2A"/>
-          </a:solidFill>
-          <a:ln>
-            <a:noFill/>
-          </a:ln>
-        </p:spPr>
-        <p:txBody>
-          <a:bodyPr/>
-          <a:lstStyle/>
-          <a:p/>
-        </p:txBody>
-      </p:sp>
-      <p:sp>
-        <p:nvSpPr>
-          <p:cNvPr id="4" name="要点"/>
-          <p:cNvSpPr txBox="1"/>
-          <p:nvPr/>
-        </p:nvSpPr>
-        <p:spPr>
-          <a:xfrm>
-            <a:off x="566928" y="1995678"/>
-            <a:ext cx="11058144" cy="1444293"/>
-          </a:xfrm>
-          <a:prstGeom prst="rect">
-            <a:avLst/>
-          </a:prstGeom>
-          <a:noFill/>
-        </p:spPr>
-        <p:txBody>
-          <a:bodyPr wrap="square" lIns="0" tIns="0" rIns="0" bIns="0">
-            <a:noAutofit/>
-          </a:bodyPr>
-          <a:lstStyle/>
-          <a:p>
-            <a:pPr marL="270000" indent="-230000" lvl="0">
-              <a:lnSpc>
-                <a:spcPct val="100000"/>
-              </a:lnSpc>
-              <a:spcBef>
-                <a:spcPts val="655"/>
-              </a:spcBef>
-              <a:buClr>
-                <a:srgbClr val="8A4B2A"/>
-              </a:buClr>
-              <a:buFont typeface="Arial"/>
-              <a:buChar char="●"/>
-            </a:pPr>
-            <a:r>
-              <a:rPr lang="zh-CN" sz="2340" dirty="0" b="1">
-                <a:solidFill>
-                  <a:srgbClr val="8A4B2A"/>
-                </a:solidFill>
-                <a:latin typeface="Segoe UI"/>
-                <a:ea typeface="Noto Sans CJK SC"/>
-                <a:cs typeface="Segoe UI"/>
-              </a:rPr>
-              <a:t>线性</a:t>
-            </a:r>
-            <a:r>
-              <a:rPr lang="zh-CN" sz="2340" dirty="0">
-                <a:solidFill>
-                  <a:srgbClr val="1A1A18"/>
-                </a:solidFill>
-                <a:latin typeface="Segoe UI"/>
-                <a:ea typeface="Noto Sans CJK SC"/>
-                <a:cs typeface="Segoe UI"/>
-              </a:rPr>
-              <a:t>：每个结点至多一个前驱、至多一个后继</a:t>
-            </a:r>
-          </a:p>
-          <a:p>
-            <a:pPr marL="270000" indent="-230000" lvl="0">
-              <a:lnSpc>
-                <a:spcPct val="100000"/>
-              </a:lnSpc>
-              <a:spcBef>
-                <a:spcPts val="655"/>
-              </a:spcBef>
-              <a:buClr>
-                <a:srgbClr val="8A4B2A"/>
-              </a:buClr>
-              <a:buFont typeface="Arial"/>
-              <a:buChar char="●"/>
-            </a:pPr>
-            <a:r>
-              <a:rPr lang="zh-CN" sz="2340" dirty="0" b="1">
-                <a:solidFill>
-                  <a:srgbClr val="8A4B2A"/>
-                </a:solidFill>
-                <a:latin typeface="Segoe UI"/>
-                <a:ea typeface="Noto Sans CJK SC"/>
-                <a:cs typeface="Segoe UI"/>
-              </a:rPr>
-              <a:t>树形</a:t>
-            </a:r>
-            <a:r>
-              <a:rPr lang="zh-CN" sz="2340" dirty="0">
-                <a:solidFill>
-                  <a:srgbClr val="1A1A18"/>
-                </a:solidFill>
-                <a:latin typeface="Segoe UI"/>
-                <a:ea typeface="Noto Sans CJK SC"/>
-                <a:cs typeface="Segoe UI"/>
-              </a:rPr>
-              <a:t>：至多一个前驱，可以有多个后继</a:t>
-            </a:r>
-          </a:p>
-          <a:p>
-            <a:pPr marL="270000" indent="-230000" lvl="0">
-              <a:lnSpc>
-                <a:spcPct val="100000"/>
-              </a:lnSpc>
-              <a:spcBef>
-                <a:spcPts val="655"/>
-              </a:spcBef>
-              <a:buClr>
-                <a:srgbClr val="8A4B2A"/>
-              </a:buClr>
-              <a:buFont typeface="Arial"/>
-              <a:buChar char="●"/>
-            </a:pPr>
-            <a:r>
-              <a:rPr lang="zh-CN" sz="2340" dirty="0" b="1">
-                <a:solidFill>
-                  <a:srgbClr val="8A4B2A"/>
-                </a:solidFill>
-                <a:latin typeface="Segoe UI"/>
-                <a:ea typeface="Noto Sans CJK SC"/>
-                <a:cs typeface="Segoe UI"/>
-              </a:rPr>
-              <a:t>图</a:t>
-            </a:r>
-            <a:r>
-              <a:rPr lang="zh-CN" sz="2340" dirty="0">
-                <a:solidFill>
-                  <a:srgbClr val="1A1A18"/>
-                </a:solidFill>
-                <a:latin typeface="Segoe UI"/>
-                <a:ea typeface="Noto Sans CJK SC"/>
-                <a:cs typeface="Segoe UI"/>
-              </a:rPr>
-              <a:t>：前驱后继都可以有多个</a:t>
-            </a:r>
-          </a:p>
-        </p:txBody>
-      </p:sp>
-      <p:sp>
-        <p:nvSpPr>
-          <p:cNvPr id="5" name="正文"/>
-          <p:cNvSpPr txBox="1"/>
-          <p:nvPr/>
-        </p:nvSpPr>
-        <p:spPr>
-          <a:xfrm>
-            <a:off x="566928" y="3506011"/>
-            <a:ext cx="11058144" cy="398221"/>
-          </a:xfrm>
-          <a:prstGeom prst="rect">
-            <a:avLst/>
-          </a:prstGeom>
-          <a:noFill/>
-        </p:spPr>
-        <p:txBody>
-          <a:bodyPr wrap="square" lIns="0" tIns="0" rIns="0" bIns="0">
-            <a:noAutofit/>
-          </a:bodyPr>
-          <a:lstStyle/>
-          <a:p>
-            <a:pPr marL="0" indent="0" lvl="0">
-              <a:lnSpc>
-                <a:spcPct val="100000"/>
-              </a:lnSpc>
-              <a:buNone/>
-            </a:pPr>
-            <a:r>
-              <a:rPr lang="zh-CN" sz="2340" dirty="0">
-                <a:solidFill>
-                  <a:srgbClr val="1A1A18"/>
-                </a:solidFill>
-                <a:latin typeface="Segoe UI"/>
-                <a:ea typeface="Noto Sans CJK SC"/>
-                <a:cs typeface="Segoe UI"/>
-              </a:rPr>
-              <a:t>两条分界线：</a:t>
-            </a:r>
-          </a:p>
-        </p:txBody>
-      </p:sp>
-      <p:sp>
-        <p:nvSpPr>
-          <p:cNvPr id="6" name="要点"/>
-          <p:cNvSpPr txBox="1"/>
-          <p:nvPr/>
-        </p:nvSpPr>
-        <p:spPr>
-          <a:xfrm>
-            <a:off x="566928" y="4019802"/>
-            <a:ext cx="11058144" cy="962862"/>
-          </a:xfrm>
-          <a:prstGeom prst="rect">
-            <a:avLst/>
-          </a:prstGeom>
-          <a:noFill/>
-        </p:spPr>
-        <p:txBody>
-          <a:bodyPr wrap="square" lIns="0" tIns="0" rIns="0" bIns="0">
-            <a:noAutofit/>
-          </a:bodyPr>
-          <a:lstStyle/>
-          <a:p>
-            <a:pPr marL="270000" indent="-230000" lvl="0">
-              <a:lnSpc>
-                <a:spcPct val="100000"/>
-              </a:lnSpc>
-              <a:spcBef>
-                <a:spcPts val="655"/>
-              </a:spcBef>
-              <a:buClr>
-                <a:srgbClr val="8A4B2A"/>
-              </a:buClr>
-              <a:buFont typeface="Arial"/>
-              <a:buChar char="●"/>
-            </a:pPr>
-            <a:r>
-              <a:rPr lang="zh-CN" sz="2340" dirty="0">
-                <a:solidFill>
-                  <a:srgbClr val="1A1A18"/>
-                </a:solidFill>
-                <a:latin typeface="Segoe UI"/>
-                <a:ea typeface="Noto Sans CJK SC"/>
-                <a:cs typeface="Segoe UI"/>
-              </a:rPr>
-              <a:t>树和图的分界：</a:t>
-            </a:r>
-            <a:r>
-              <a:rPr lang="zh-CN" sz="2340" dirty="0" b="1">
-                <a:solidFill>
-                  <a:srgbClr val="8A4B2A"/>
-                </a:solidFill>
-                <a:latin typeface="Segoe UI"/>
-                <a:ea typeface="Noto Sans CJK SC"/>
-                <a:cs typeface="Segoe UI"/>
-              </a:rPr>
-              <a:t>每个结点是否至多一个直接前驱</a:t>
-            </a:r>
-          </a:p>
-          <a:p>
-            <a:pPr marL="270000" indent="-230000" lvl="0">
-              <a:lnSpc>
-                <a:spcPct val="100000"/>
-              </a:lnSpc>
-              <a:spcBef>
-                <a:spcPts val="655"/>
-              </a:spcBef>
-              <a:buClr>
-                <a:srgbClr val="8A4B2A"/>
-              </a:buClr>
-              <a:buFont typeface="Arial"/>
-              <a:buChar char="●"/>
-            </a:pPr>
-            <a:r>
-              <a:rPr lang="zh-CN" sz="2340" dirty="0">
-                <a:solidFill>
-                  <a:srgbClr val="1A1A18"/>
-                </a:solidFill>
-                <a:latin typeface="Segoe UI"/>
-                <a:ea typeface="Noto Sans CJK SC"/>
-                <a:cs typeface="Segoe UI"/>
-              </a:rPr>
-              <a:t>线和树的分界：</a:t>
-            </a:r>
-            <a:r>
-              <a:rPr lang="zh-CN" sz="2340" dirty="0" b="1">
-                <a:solidFill>
-                  <a:srgbClr val="8A4B2A"/>
-                </a:solidFill>
-                <a:latin typeface="Segoe UI"/>
-                <a:ea typeface="Noto Sans CJK SC"/>
-                <a:cs typeface="Segoe UI"/>
-              </a:rPr>
-              <a:t>每个结点是否至多一个直接后继</a:t>
-            </a:r>
-          </a:p>
-        </p:txBody>
-      </p:sp>
-      <p:sp>
-        <p:nvSpPr>
-          <p:cNvPr id="7" name="页脚"/>
-          <p:cNvSpPr txBox="1"/>
-          <p:nvPr/>
-        </p:nvSpPr>
-        <p:spPr>
-          <a:xfrm>
-            <a:off x="566928" y="6419088"/>
-            <a:ext cx="7740700" cy="274320"/>
-          </a:xfrm>
-          <a:prstGeom prst="rect">
-            <a:avLst/>
-          </a:prstGeom>
-          <a:noFill/>
-        </p:spPr>
-        <p:txBody>
-          <a:bodyPr wrap="square" lIns="0" tIns="0" rIns="0" bIns="0">
-            <a:noAutofit/>
-          </a:bodyPr>
-          <a:lstStyle/>
-          <a:p>
-            <a:pPr marL="0" indent="0" lvl="0">
-              <a:lnSpc>
-                <a:spcPct val="100000"/>
-              </a:lnSpc>
-              <a:buNone/>
-            </a:pPr>
-            <a:r>
-              <a:rPr lang="zh-CN" sz="1000" dirty="0">
-                <a:solidFill>
-                  <a:srgbClr val="6B6B66"/>
-                </a:solidFill>
-                <a:latin typeface="Segoe UI"/>
-                <a:ea typeface="Noto Sans CJK SC"/>
-                <a:cs typeface="Segoe UI"/>
-              </a:rPr>
-              <a:t>第1章 概论</a:t>
-            </a:r>
-          </a:p>
-        </p:txBody>
-      </p:sp>
-      <p:sp>
-        <p:nvSpPr>
-          <p:cNvPr id="8" name="页码"/>
-          <p:cNvSpPr txBox="1"/>
-          <p:nvPr/>
-        </p:nvSpPr>
-        <p:spPr>
-          <a:xfrm>
-            <a:off x="8307628" y="6419088"/>
-            <a:ext cx="3317443" cy="274320"/>
-          </a:xfrm>
-          <a:prstGeom prst="rect">
-            <a:avLst/>
-          </a:prstGeom>
-          <a:noFill/>
-        </p:spPr>
-        <p:txBody>
-          <a:bodyPr wrap="square" lIns="0" tIns="0" rIns="0" bIns="0">
-            <a:noAutofit/>
-          </a:bodyPr>
-          <a:lstStyle/>
-          <a:p>
-            <a:pPr marL="0" indent="0" lvl="0" algn="r">
-              <a:lnSpc>
-                <a:spcPct val="100000"/>
-              </a:lnSpc>
-              <a:buNone/>
-            </a:pPr>
-            <a:r>
-              <a:rPr lang="zh-CN" sz="1000" dirty="0">
-                <a:solidFill>
-                  <a:srgbClr val="6B6B66"/>
-                </a:solidFill>
-                <a:latin typeface="Segoe UI"/>
-                <a:ea typeface="Noto Sans CJK SC"/>
-                <a:cs typeface="Segoe UI"/>
-              </a:rPr>
-              <a:t>8 / 28</a:t>
+              <a:t>8 / 29</a:t>
             </a:r>
           </a:p>
         </p:txBody>
@@ -16779,7 +17753,7 @@
                 <a:ea typeface="Noto Sans CJK SC"/>
                 <a:cs typeface="Segoe UI"/>
               </a:rPr>
-              <a:t>四种存储方法</a:t>
+              <a:t>逻辑结构的三分</a:t>
             </a:r>
           </a:p>
         </p:txBody>
@@ -16811,823 +17785,16 @@
           <a:p/>
         </p:txBody>
       </p:sp>
-      <p:graphicFrame>
-        <p:nvGraphicFramePr>
-          <p:cNvPr id="4" name="表"/>
-          <p:cNvGraphicFramePr>
-            <a:graphicFrameLocks noGrp="1"/>
-          </p:cNvGraphicFramePr>
-          <p:nvPr/>
-        </p:nvGraphicFramePr>
-        <p:xfrm>
-          <a:off x="566928" y="2012188"/>
-          <a:ext cx="11058144" cy="1902520"/>
-        </p:xfrm>
-        <a:graphic>
-          <a:graphicData uri="http://schemas.openxmlformats.org/drawingml/2006/table">
-            <a:tbl>
-              <a:tblPr firstRow="1"/>
-              <a:tblGrid>
-                <a:gridCol w="1361840"/>
-                <a:gridCol w="4085521"/>
-                <a:gridCol w="5610783"/>
-              </a:tblGrid>
-              <a:tr h="380504">
-                <a:tc>
-                  <a:txBody>
-                    <a:bodyPr/>
-                    <a:lstStyle/>
-                    <a:p>
-                      <a:pPr marL="0" indent="0" lvl="0">
-                        <a:lnSpc>
-                          <a:spcPct val="100000"/>
-                        </a:lnSpc>
-                        <a:buNone/>
-                      </a:pPr>
-                      <a:r>
-                        <a:rPr lang="zh-CN" sz="1755" dirty="0" b="1">
-                          <a:solidFill>
-                            <a:srgbClr val="1A1A18"/>
-                          </a:solidFill>
-                          <a:latin typeface="Segoe UI"/>
-                          <a:ea typeface="Noto Sans CJK SC"/>
-                          <a:cs typeface="Segoe UI"/>
-                        </a:rPr>
-                        <a:t>方法</a:t>
-                      </a:r>
-                    </a:p>
-                  </a:txBody>
-                  <a:tcPr marL="45720" marR="45720" marT="27432" marB="27432" anchor="ctr">
-                    <a:lnL w="9525">
-                      <a:solidFill>
-                        <a:srgbClr val="DCDCD6"/>
-                      </a:solidFill>
-                    </a:lnL>
-                    <a:lnR w="9525">
-                      <a:solidFill>
-                        <a:srgbClr val="DCDCD6"/>
-                      </a:solidFill>
-                    </a:lnR>
-                    <a:lnT w="9525">
-                      <a:solidFill>
-                        <a:srgbClr val="DCDCD6"/>
-                      </a:solidFill>
-                    </a:lnT>
-                    <a:lnB w="9525">
-                      <a:solidFill>
-                        <a:srgbClr val="DCDCD6"/>
-                      </a:solidFill>
-                    </a:lnB>
-                    <a:solidFill>
-                      <a:srgbClr val="F5F4F0"/>
-                    </a:solidFill>
-                  </a:tcPr>
-                </a:tc>
-                <a:tc>
-                  <a:txBody>
-                    <a:bodyPr/>
-                    <a:lstStyle/>
-                    <a:p>
-                      <a:pPr marL="0" indent="0" lvl="0">
-                        <a:lnSpc>
-                          <a:spcPct val="100000"/>
-                        </a:lnSpc>
-                        <a:buNone/>
-                      </a:pPr>
-                      <a:r>
-                        <a:rPr lang="zh-CN" sz="1755" dirty="0" b="1">
-                          <a:solidFill>
-                            <a:srgbClr val="1A1A18"/>
-                          </a:solidFill>
-                          <a:latin typeface="Segoe UI"/>
-                          <a:ea typeface="Noto Sans CJK SC"/>
-                          <a:cs typeface="Segoe UI"/>
-                        </a:rPr>
-                        <a:t>怎么表示「相邻」</a:t>
-                      </a:r>
-                    </a:p>
-                  </a:txBody>
-                  <a:tcPr marL="45720" marR="45720" marT="27432" marB="27432" anchor="ctr">
-                    <a:lnL w="9525">
-                      <a:solidFill>
-                        <a:srgbClr val="DCDCD6"/>
-                      </a:solidFill>
-                    </a:lnL>
-                    <a:lnR w="9525">
-                      <a:solidFill>
-                        <a:srgbClr val="DCDCD6"/>
-                      </a:solidFill>
-                    </a:lnR>
-                    <a:lnT w="9525">
-                      <a:solidFill>
-                        <a:srgbClr val="DCDCD6"/>
-                      </a:solidFill>
-                    </a:lnT>
-                    <a:lnB w="9525">
-                      <a:solidFill>
-                        <a:srgbClr val="DCDCD6"/>
-                      </a:solidFill>
-                    </a:lnB>
-                    <a:solidFill>
-                      <a:srgbClr val="F5F4F0"/>
-                    </a:solidFill>
-                  </a:tcPr>
-                </a:tc>
-                <a:tc>
-                  <a:txBody>
-                    <a:bodyPr/>
-                    <a:lstStyle/>
-                    <a:p>
-                      <a:pPr marL="0" indent="0" lvl="0">
-                        <a:lnSpc>
-                          <a:spcPct val="100000"/>
-                        </a:lnSpc>
-                        <a:buNone/>
-                      </a:pPr>
-                      <a:r>
-                        <a:rPr lang="zh-CN" sz="1755" dirty="0" b="1">
-                          <a:solidFill>
-                            <a:srgbClr val="1A1A18"/>
-                          </a:solidFill>
-                          <a:latin typeface="Segoe UI"/>
-                          <a:ea typeface="Noto Sans CJK SC"/>
-                          <a:cs typeface="Segoe UI"/>
-                        </a:rPr>
-                        <a:t>代价</a:t>
-                      </a:r>
-                    </a:p>
-                  </a:txBody>
-                  <a:tcPr marL="45720" marR="45720" marT="27432" marB="27432" anchor="ctr">
-                    <a:lnL w="9525">
-                      <a:solidFill>
-                        <a:srgbClr val="DCDCD6"/>
-                      </a:solidFill>
-                    </a:lnL>
-                    <a:lnR w="9525">
-                      <a:solidFill>
-                        <a:srgbClr val="DCDCD6"/>
-                      </a:solidFill>
-                    </a:lnR>
-                    <a:lnT w="9525">
-                      <a:solidFill>
-                        <a:srgbClr val="DCDCD6"/>
-                      </a:solidFill>
-                    </a:lnT>
-                    <a:lnB w="9525">
-                      <a:solidFill>
-                        <a:srgbClr val="DCDCD6"/>
-                      </a:solidFill>
-                    </a:lnB>
-                    <a:solidFill>
-                      <a:srgbClr val="F5F4F0"/>
-                    </a:solidFill>
-                  </a:tcPr>
-                </a:tc>
-              </a:tr>
-              <a:tr h="380504">
-                <a:tc>
-                  <a:txBody>
-                    <a:bodyPr/>
-                    <a:lstStyle/>
-                    <a:p>
-                      <a:pPr marL="0" indent="0" lvl="0">
-                        <a:lnSpc>
-                          <a:spcPct val="100000"/>
-                        </a:lnSpc>
-                        <a:buNone/>
-                      </a:pPr>
-                      <a:r>
-                        <a:rPr lang="zh-CN" sz="1755" dirty="0" b="1">
-                          <a:solidFill>
-                            <a:srgbClr val="8A4B2A"/>
-                          </a:solidFill>
-                          <a:latin typeface="Segoe UI"/>
-                          <a:ea typeface="Noto Sans CJK SC"/>
-                          <a:cs typeface="Segoe UI"/>
-                        </a:rPr>
-                        <a:t>顺序</a:t>
-                      </a:r>
-                    </a:p>
-                  </a:txBody>
-                  <a:tcPr marL="45720" marR="45720" marT="27432" marB="27432" anchor="ctr">
-                    <a:lnL w="9525">
-                      <a:solidFill>
-                        <a:srgbClr val="DCDCD6"/>
-                      </a:solidFill>
-                    </a:lnL>
-                    <a:lnR w="9525">
-                      <a:solidFill>
-                        <a:srgbClr val="DCDCD6"/>
-                      </a:solidFill>
-                    </a:lnR>
-                    <a:lnT w="9525">
-                      <a:solidFill>
-                        <a:srgbClr val="DCDCD6"/>
-                      </a:solidFill>
-                    </a:lnT>
-                    <a:lnB w="9525">
-                      <a:solidFill>
-                        <a:srgbClr val="DCDCD6"/>
-                      </a:solidFill>
-                    </a:lnB>
-                    <a:solidFill>
-                      <a:srgbClr val="FFFFFF"/>
-                    </a:solidFill>
-                  </a:tcPr>
-                </a:tc>
-                <a:tc>
-                  <a:txBody>
-                    <a:bodyPr/>
-                    <a:lstStyle/>
-                    <a:p>
-                      <a:pPr marL="0" indent="0" lvl="0">
-                        <a:lnSpc>
-                          <a:spcPct val="100000"/>
-                        </a:lnSpc>
-                        <a:buNone/>
-                      </a:pPr>
-                      <a:r>
-                        <a:rPr lang="zh-CN" sz="1755" dirty="0">
-                          <a:solidFill>
-                            <a:srgbClr val="1A1A18"/>
-                          </a:solidFill>
-                          <a:latin typeface="Segoe UI"/>
-                          <a:ea typeface="Noto Sans CJK SC"/>
-                          <a:cs typeface="Segoe UI"/>
-                        </a:rPr>
-                        <a:t>地址相邻</a:t>
-                      </a:r>
-                    </a:p>
-                  </a:txBody>
-                  <a:tcPr marL="45720" marR="45720" marT="27432" marB="27432" anchor="ctr">
-                    <a:lnL w="9525">
-                      <a:solidFill>
-                        <a:srgbClr val="DCDCD6"/>
-                      </a:solidFill>
-                    </a:lnL>
-                    <a:lnR w="9525">
-                      <a:solidFill>
-                        <a:srgbClr val="DCDCD6"/>
-                      </a:solidFill>
-                    </a:lnR>
-                    <a:lnT w="9525">
-                      <a:solidFill>
-                        <a:srgbClr val="DCDCD6"/>
-                      </a:solidFill>
-                    </a:lnT>
-                    <a:lnB w="9525">
-                      <a:solidFill>
-                        <a:srgbClr val="DCDCD6"/>
-                      </a:solidFill>
-                    </a:lnB>
-                    <a:solidFill>
-                      <a:srgbClr val="FFFFFF"/>
-                    </a:solidFill>
-                  </a:tcPr>
-                </a:tc>
-                <a:tc>
-                  <a:txBody>
-                    <a:bodyPr/>
-                    <a:lstStyle/>
-                    <a:p>
-                      <a:pPr marL="0" indent="0" lvl="0">
-                        <a:lnSpc>
-                          <a:spcPct val="100000"/>
-                        </a:lnSpc>
-                        <a:buNone/>
-                      </a:pPr>
-                      <a:r>
-                        <a:rPr lang="zh-CN" sz="1755" dirty="0">
-                          <a:solidFill>
-                            <a:srgbClr val="1A1A18"/>
-                          </a:solidFill>
-                          <a:latin typeface="Segoe UI"/>
-                          <a:ea typeface="Noto Sans CJK SC"/>
-                          <a:cs typeface="Segoe UI"/>
-                        </a:rPr>
-                        <a:t>按下标 O(1)；插删要搬</a:t>
-                      </a:r>
-                    </a:p>
-                  </a:txBody>
-                  <a:tcPr marL="45720" marR="45720" marT="27432" marB="27432" anchor="ctr">
-                    <a:lnL w="9525">
-                      <a:solidFill>
-                        <a:srgbClr val="DCDCD6"/>
-                      </a:solidFill>
-                    </a:lnL>
-                    <a:lnR w="9525">
-                      <a:solidFill>
-                        <a:srgbClr val="DCDCD6"/>
-                      </a:solidFill>
-                    </a:lnR>
-                    <a:lnT w="9525">
-                      <a:solidFill>
-                        <a:srgbClr val="DCDCD6"/>
-                      </a:solidFill>
-                    </a:lnT>
-                    <a:lnB w="9525">
-                      <a:solidFill>
-                        <a:srgbClr val="DCDCD6"/>
-                      </a:solidFill>
-                    </a:lnB>
-                    <a:solidFill>
-                      <a:srgbClr val="FFFFFF"/>
-                    </a:solidFill>
-                  </a:tcPr>
-                </a:tc>
-              </a:tr>
-              <a:tr h="380504">
-                <a:tc>
-                  <a:txBody>
-                    <a:bodyPr/>
-                    <a:lstStyle/>
-                    <a:p>
-                      <a:pPr marL="0" indent="0" lvl="0">
-                        <a:lnSpc>
-                          <a:spcPct val="100000"/>
-                        </a:lnSpc>
-                        <a:buNone/>
-                      </a:pPr>
-                      <a:r>
-                        <a:rPr lang="zh-CN" sz="1755" dirty="0" b="1">
-                          <a:solidFill>
-                            <a:srgbClr val="8A4B2A"/>
-                          </a:solidFill>
-                          <a:latin typeface="Segoe UI"/>
-                          <a:ea typeface="Noto Sans CJK SC"/>
-                          <a:cs typeface="Segoe UI"/>
-                        </a:rPr>
-                        <a:t>链接</a:t>
-                      </a:r>
-                    </a:p>
-                  </a:txBody>
-                  <a:tcPr marL="45720" marR="45720" marT="27432" marB="27432" anchor="ctr">
-                    <a:lnL w="9525">
-                      <a:solidFill>
-                        <a:srgbClr val="DCDCD6"/>
-                      </a:solidFill>
-                    </a:lnL>
-                    <a:lnR w="9525">
-                      <a:solidFill>
-                        <a:srgbClr val="DCDCD6"/>
-                      </a:solidFill>
-                    </a:lnR>
-                    <a:lnT w="9525">
-                      <a:solidFill>
-                        <a:srgbClr val="DCDCD6"/>
-                      </a:solidFill>
-                    </a:lnT>
-                    <a:lnB w="9525">
-                      <a:solidFill>
-                        <a:srgbClr val="DCDCD6"/>
-                      </a:solidFill>
-                    </a:lnB>
-                    <a:solidFill>
-                      <a:srgbClr val="FFFFFF"/>
-                    </a:solidFill>
-                  </a:tcPr>
-                </a:tc>
-                <a:tc>
-                  <a:txBody>
-                    <a:bodyPr/>
-                    <a:lstStyle/>
-                    <a:p>
-                      <a:pPr marL="0" indent="0" lvl="0">
-                        <a:lnSpc>
-                          <a:spcPct val="100000"/>
-                        </a:lnSpc>
-                        <a:buNone/>
-                      </a:pPr>
-                      <a:r>
-                        <a:rPr lang="zh-CN" sz="1755" dirty="0">
-                          <a:solidFill>
-                            <a:srgbClr val="1A1A18"/>
-                          </a:solidFill>
-                          <a:latin typeface="Segoe UI"/>
-                          <a:ea typeface="Noto Sans CJK SC"/>
-                          <a:cs typeface="Segoe UI"/>
-                        </a:rPr>
-                        <a:t>指针相指</a:t>
-                      </a:r>
-                    </a:p>
-                  </a:txBody>
-                  <a:tcPr marL="45720" marR="45720" marT="27432" marB="27432" anchor="ctr">
-                    <a:lnL w="9525">
-                      <a:solidFill>
-                        <a:srgbClr val="DCDCD6"/>
-                      </a:solidFill>
-                    </a:lnL>
-                    <a:lnR w="9525">
-                      <a:solidFill>
-                        <a:srgbClr val="DCDCD6"/>
-                      </a:solidFill>
-                    </a:lnR>
-                    <a:lnT w="9525">
-                      <a:solidFill>
-                        <a:srgbClr val="DCDCD6"/>
-                      </a:solidFill>
-                    </a:lnT>
-                    <a:lnB w="9525">
-                      <a:solidFill>
-                        <a:srgbClr val="DCDCD6"/>
-                      </a:solidFill>
-                    </a:lnB>
-                    <a:solidFill>
-                      <a:srgbClr val="FFFFFF"/>
-                    </a:solidFill>
-                  </a:tcPr>
-                </a:tc>
-                <a:tc>
-                  <a:txBody>
-                    <a:bodyPr/>
-                    <a:lstStyle/>
-                    <a:p>
-                      <a:pPr marL="0" indent="0" lvl="0">
-                        <a:lnSpc>
-                          <a:spcPct val="100000"/>
-                        </a:lnSpc>
-                        <a:buNone/>
-                      </a:pPr>
-                      <a:r>
-                        <a:rPr lang="zh-CN" sz="1755" dirty="0">
-                          <a:solidFill>
-                            <a:srgbClr val="1A1A18"/>
-                          </a:solidFill>
-                          <a:latin typeface="Segoe UI"/>
-                          <a:ea typeface="Noto Sans CJK SC"/>
-                          <a:cs typeface="Segoe UI"/>
-                        </a:rPr>
-                        <a:t>插删只改指针；按位置要走</a:t>
-                      </a:r>
-                    </a:p>
-                  </a:txBody>
-                  <a:tcPr marL="45720" marR="45720" marT="27432" marB="27432" anchor="ctr">
-                    <a:lnL w="9525">
-                      <a:solidFill>
-                        <a:srgbClr val="DCDCD6"/>
-                      </a:solidFill>
-                    </a:lnL>
-                    <a:lnR w="9525">
-                      <a:solidFill>
-                        <a:srgbClr val="DCDCD6"/>
-                      </a:solidFill>
-                    </a:lnR>
-                    <a:lnT w="9525">
-                      <a:solidFill>
-                        <a:srgbClr val="DCDCD6"/>
-                      </a:solidFill>
-                    </a:lnT>
-                    <a:lnB w="9525">
-                      <a:solidFill>
-                        <a:srgbClr val="DCDCD6"/>
-                      </a:solidFill>
-                    </a:lnB>
-                    <a:solidFill>
-                      <a:srgbClr val="FFFFFF"/>
-                    </a:solidFill>
-                  </a:tcPr>
-                </a:tc>
-              </a:tr>
-              <a:tr h="380504">
-                <a:tc>
-                  <a:txBody>
-                    <a:bodyPr/>
-                    <a:lstStyle/>
-                    <a:p>
-                      <a:pPr marL="0" indent="0" lvl="0">
-                        <a:lnSpc>
-                          <a:spcPct val="100000"/>
-                        </a:lnSpc>
-                        <a:buNone/>
-                      </a:pPr>
-                      <a:r>
-                        <a:rPr lang="zh-CN" sz="1755" dirty="0" b="1">
-                          <a:solidFill>
-                            <a:srgbClr val="8A4B2A"/>
-                          </a:solidFill>
-                          <a:latin typeface="Segoe UI"/>
-                          <a:ea typeface="Noto Sans CJK SC"/>
-                          <a:cs typeface="Segoe UI"/>
-                        </a:rPr>
-                        <a:t>索引</a:t>
-                      </a:r>
-                    </a:p>
-                  </a:txBody>
-                  <a:tcPr marL="45720" marR="45720" marT="27432" marB="27432" anchor="ctr">
-                    <a:lnL w="9525">
-                      <a:solidFill>
-                        <a:srgbClr val="DCDCD6"/>
-                      </a:solidFill>
-                    </a:lnL>
-                    <a:lnR w="9525">
-                      <a:solidFill>
-                        <a:srgbClr val="DCDCD6"/>
-                      </a:solidFill>
-                    </a:lnR>
-                    <a:lnT w="9525">
-                      <a:solidFill>
-                        <a:srgbClr val="DCDCD6"/>
-                      </a:solidFill>
-                    </a:lnT>
-                    <a:lnB w="9525">
-                      <a:solidFill>
-                        <a:srgbClr val="DCDCD6"/>
-                      </a:solidFill>
-                    </a:lnB>
-                    <a:solidFill>
-                      <a:srgbClr val="FFFFFF"/>
-                    </a:solidFill>
-                  </a:tcPr>
-                </a:tc>
-                <a:tc>
-                  <a:txBody>
-                    <a:bodyPr/>
-                    <a:lstStyle/>
-                    <a:p>
-                      <a:pPr marL="0" indent="0" lvl="0">
-                        <a:lnSpc>
-                          <a:spcPct val="100000"/>
-                        </a:lnSpc>
-                        <a:buNone/>
-                      </a:pPr>
-                      <a:r>
-                        <a:rPr lang="zh-CN" sz="1755" dirty="0">
-                          <a:solidFill>
-                            <a:srgbClr val="1A1A18"/>
-                          </a:solidFill>
-                          <a:latin typeface="Segoe UI"/>
-                          <a:ea typeface="Noto Sans CJK SC"/>
-                          <a:cs typeface="Segoe UI"/>
-                        </a:rPr>
-                        <a:t>另造一张表，存地址</a:t>
-                      </a:r>
-                    </a:p>
-                  </a:txBody>
-                  <a:tcPr marL="45720" marR="45720" marT="27432" marB="27432" anchor="ctr">
-                    <a:lnL w="9525">
-                      <a:solidFill>
-                        <a:srgbClr val="DCDCD6"/>
-                      </a:solidFill>
-                    </a:lnL>
-                    <a:lnR w="9525">
-                      <a:solidFill>
-                        <a:srgbClr val="DCDCD6"/>
-                      </a:solidFill>
-                    </a:lnR>
-                    <a:lnT w="9525">
-                      <a:solidFill>
-                        <a:srgbClr val="DCDCD6"/>
-                      </a:solidFill>
-                    </a:lnT>
-                    <a:lnB w="9525">
-                      <a:solidFill>
-                        <a:srgbClr val="DCDCD6"/>
-                      </a:solidFill>
-                    </a:lnB>
-                    <a:solidFill>
-                      <a:srgbClr val="FFFFFF"/>
-                    </a:solidFill>
-                  </a:tcPr>
-                </a:tc>
-                <a:tc>
-                  <a:txBody>
-                    <a:bodyPr/>
-                    <a:lstStyle/>
-                    <a:p>
-                      <a:pPr marL="0" indent="0" lvl="0">
-                        <a:lnSpc>
-                          <a:spcPct val="100000"/>
-                        </a:lnSpc>
-                        <a:buNone/>
-                      </a:pPr>
-                      <a:r>
-                        <a:rPr lang="zh-CN" sz="1755" dirty="0">
-                          <a:solidFill>
-                            <a:srgbClr val="1A1A18"/>
-                          </a:solidFill>
-                          <a:latin typeface="Segoe UI"/>
-                          <a:ea typeface="Noto Sans CJK SC"/>
-                          <a:cs typeface="Segoe UI"/>
-                        </a:rPr>
-                        <a:t>多一份空间；换来快速定位</a:t>
-                      </a:r>
-                    </a:p>
-                  </a:txBody>
-                  <a:tcPr marL="45720" marR="45720" marT="27432" marB="27432" anchor="ctr">
-                    <a:lnL w="9525">
-                      <a:solidFill>
-                        <a:srgbClr val="DCDCD6"/>
-                      </a:solidFill>
-                    </a:lnL>
-                    <a:lnR w="9525">
-                      <a:solidFill>
-                        <a:srgbClr val="DCDCD6"/>
-                      </a:solidFill>
-                    </a:lnR>
-                    <a:lnT w="9525">
-                      <a:solidFill>
-                        <a:srgbClr val="DCDCD6"/>
-                      </a:solidFill>
-                    </a:lnT>
-                    <a:lnB w="9525">
-                      <a:solidFill>
-                        <a:srgbClr val="DCDCD6"/>
-                      </a:solidFill>
-                    </a:lnB>
-                    <a:solidFill>
-                      <a:srgbClr val="FFFFFF"/>
-                    </a:solidFill>
-                  </a:tcPr>
-                </a:tc>
-              </a:tr>
-              <a:tr h="380504">
-                <a:tc>
-                  <a:txBody>
-                    <a:bodyPr/>
-                    <a:lstStyle/>
-                    <a:p>
-                      <a:pPr marL="0" indent="0" lvl="0">
-                        <a:lnSpc>
-                          <a:spcPct val="100000"/>
-                        </a:lnSpc>
-                        <a:buNone/>
-                      </a:pPr>
-                      <a:r>
-                        <a:rPr lang="zh-CN" sz="1755" dirty="0" b="1">
-                          <a:solidFill>
-                            <a:srgbClr val="8A4B2A"/>
-                          </a:solidFill>
-                          <a:latin typeface="Segoe UI"/>
-                          <a:ea typeface="Noto Sans CJK SC"/>
-                          <a:cs typeface="Segoe UI"/>
-                        </a:rPr>
-                        <a:t>散列</a:t>
-                      </a:r>
-                    </a:p>
-                  </a:txBody>
-                  <a:tcPr marL="45720" marR="45720" marT="27432" marB="27432" anchor="ctr">
-                    <a:lnL w="9525">
-                      <a:solidFill>
-                        <a:srgbClr val="DCDCD6"/>
-                      </a:solidFill>
-                    </a:lnL>
-                    <a:lnR w="9525">
-                      <a:solidFill>
-                        <a:srgbClr val="DCDCD6"/>
-                      </a:solidFill>
-                    </a:lnR>
-                    <a:lnT w="9525">
-                      <a:solidFill>
-                        <a:srgbClr val="DCDCD6"/>
-                      </a:solidFill>
-                    </a:lnT>
-                    <a:lnB w="9525">
-                      <a:solidFill>
-                        <a:srgbClr val="DCDCD6"/>
-                      </a:solidFill>
-                    </a:lnB>
-                    <a:solidFill>
-                      <a:srgbClr val="FFFFFF"/>
-                    </a:solidFill>
-                  </a:tcPr>
-                </a:tc>
-                <a:tc>
-                  <a:txBody>
-                    <a:bodyPr/>
-                    <a:lstStyle/>
-                    <a:p>
-                      <a:pPr marL="0" indent="0" lvl="0">
-                        <a:lnSpc>
-                          <a:spcPct val="100000"/>
-                        </a:lnSpc>
-                        <a:buNone/>
-                      </a:pPr>
-                      <a:r>
-                        <a:rPr lang="zh-CN" sz="1755" dirty="0">
-                          <a:solidFill>
-                            <a:srgbClr val="1A1A18"/>
-                          </a:solidFill>
-                          <a:latin typeface="Segoe UI"/>
-                          <a:ea typeface="Noto Sans CJK SC"/>
-                          <a:cs typeface="Segoe UI"/>
-                        </a:rPr>
-                        <a:t>由关键码</a:t>
-                      </a:r>
-                      <a:r>
-                        <a:rPr lang="zh-CN" sz="1755" dirty="0" b="1">
-                          <a:solidFill>
-                            <a:srgbClr val="8A4B2A"/>
-                          </a:solidFill>
-                          <a:latin typeface="Segoe UI"/>
-                          <a:ea typeface="Noto Sans CJK SC"/>
-                          <a:cs typeface="Segoe UI"/>
-                        </a:rPr>
-                        <a:t>算</a:t>
-                      </a:r>
-                      <a:r>
-                        <a:rPr lang="zh-CN" sz="1755" dirty="0">
-                          <a:solidFill>
-                            <a:srgbClr val="1A1A18"/>
-                          </a:solidFill>
-                          <a:latin typeface="Segoe UI"/>
-                          <a:ea typeface="Noto Sans CJK SC"/>
-                          <a:cs typeface="Segoe UI"/>
-                        </a:rPr>
-                        <a:t>出地址</a:t>
-                      </a:r>
-                    </a:p>
-                  </a:txBody>
-                  <a:tcPr marL="45720" marR="45720" marT="27432" marB="27432" anchor="ctr">
-                    <a:lnL w="9525">
-                      <a:solidFill>
-                        <a:srgbClr val="DCDCD6"/>
-                      </a:solidFill>
-                    </a:lnL>
-                    <a:lnR w="9525">
-                      <a:solidFill>
-                        <a:srgbClr val="DCDCD6"/>
-                      </a:solidFill>
-                    </a:lnR>
-                    <a:lnT w="9525">
-                      <a:solidFill>
-                        <a:srgbClr val="DCDCD6"/>
-                      </a:solidFill>
-                    </a:lnT>
-                    <a:lnB w="9525">
-                      <a:solidFill>
-                        <a:srgbClr val="DCDCD6"/>
-                      </a:solidFill>
-                    </a:lnB>
-                    <a:solidFill>
-                      <a:srgbClr val="FFFFFF"/>
-                    </a:solidFill>
-                  </a:tcPr>
-                </a:tc>
-                <a:tc>
-                  <a:txBody>
-                    <a:bodyPr/>
-                    <a:lstStyle/>
-                    <a:p>
-                      <a:pPr marL="0" indent="0" lvl="0">
-                        <a:lnSpc>
-                          <a:spcPct val="100000"/>
-                        </a:lnSpc>
-                        <a:buNone/>
-                      </a:pPr>
-                      <a:r>
-                        <a:rPr lang="zh-CN" sz="1755" dirty="0">
-                          <a:solidFill>
-                            <a:srgbClr val="1A1A18"/>
-                          </a:solidFill>
-                          <a:latin typeface="Segoe UI"/>
-                          <a:ea typeface="Noto Sans CJK SC"/>
-                          <a:cs typeface="Segoe UI"/>
-                        </a:rPr>
-                        <a:t>期望 O(1)；不保序，会冲突</a:t>
-                      </a:r>
-                    </a:p>
-                  </a:txBody>
-                  <a:tcPr marL="45720" marR="45720" marT="27432" marB="27432" anchor="ctr">
-                    <a:lnL w="9525">
-                      <a:solidFill>
-                        <a:srgbClr val="DCDCD6"/>
-                      </a:solidFill>
-                    </a:lnL>
-                    <a:lnR w="9525">
-                      <a:solidFill>
-                        <a:srgbClr val="DCDCD6"/>
-                      </a:solidFill>
-                    </a:lnR>
-                    <a:lnT w="9525">
-                      <a:solidFill>
-                        <a:srgbClr val="DCDCD6"/>
-                      </a:solidFill>
-                    </a:lnT>
-                    <a:lnB w="9525">
-                      <a:solidFill>
-                        <a:srgbClr val="DCDCD6"/>
-                      </a:solidFill>
-                    </a:lnB>
-                    <a:solidFill>
-                      <a:srgbClr val="FFFFFF"/>
-                    </a:solidFill>
-                  </a:tcPr>
-                </a:tc>
-              </a:tr>
-            </a:tbl>
-          </a:graphicData>
-        </a:graphic>
-      </p:graphicFrame>
-      <p:sp>
-        <p:nvSpPr>
-          <p:cNvPr id="5" name="页脚"/>
+      <p:sp>
+        <p:nvSpPr>
+          <p:cNvPr id="4" name="要点"/>
           <p:cNvSpPr txBox="1"/>
           <p:nvPr/>
         </p:nvSpPr>
         <p:spPr>
           <a:xfrm>
-            <a:off x="566928" y="6419088"/>
-            <a:ext cx="7740700" cy="274320"/>
+            <a:off x="566928" y="1995678"/>
+            <a:ext cx="11058144" cy="1444293"/>
           </a:xfrm>
           <a:prstGeom prst="rect">
             <a:avLst/>
@@ -17640,36 +17807,128 @@
           </a:bodyPr>
           <a:lstStyle/>
           <a:p>
-            <a:pPr marL="0" indent="0" lvl="0">
-              <a:lnSpc>
-                <a:spcPct val="100000"/>
-              </a:lnSpc>
-              <a:buNone/>
-            </a:pPr>
-            <a:r>
-              <a:rPr lang="zh-CN" sz="1000" dirty="0">
-                <a:solidFill>
-                  <a:srgbClr val="6B6B66"/>
-                </a:solidFill>
-                <a:latin typeface="Segoe UI"/>
-                <a:ea typeface="Noto Sans CJK SC"/>
-                <a:cs typeface="Segoe UI"/>
-              </a:rPr>
-              <a:t>第1章 概论</a:t>
-            </a:r>
-          </a:p>
-        </p:txBody>
-      </p:sp>
-      <p:sp>
-        <p:nvSpPr>
-          <p:cNvPr id="6" name="页码"/>
+            <a:pPr marL="270000" indent="-230000" lvl="0">
+              <a:lnSpc>
+                <a:spcPct val="100000"/>
+              </a:lnSpc>
+              <a:spcBef>
+                <a:spcPts val="655"/>
+              </a:spcBef>
+              <a:buClr>
+                <a:srgbClr val="8A4B2A"/>
+              </a:buClr>
+              <a:buFont typeface="Arial"/>
+              <a:buChar char="●"/>
+            </a:pPr>
+            <a:r>
+              <a:rPr lang="zh-CN" sz="2340" dirty="0" b="1">
+                <a:solidFill>
+                  <a:srgbClr val="8A4B2A"/>
+                </a:solidFill>
+                <a:latin typeface="Segoe UI"/>
+                <a:ea typeface="Noto Sans CJK SC"/>
+                <a:cs typeface="Segoe UI"/>
+              </a:rPr>
+              <a:t>线性</a:t>
+            </a:r>
+            <a:r>
+              <a:rPr lang="zh-CN" sz="2340" dirty="0">
+                <a:solidFill>
+                  <a:srgbClr val="1A1A18"/>
+                </a:solidFill>
+                <a:latin typeface="Segoe UI"/>
+                <a:ea typeface="Noto Sans CJK SC"/>
+                <a:cs typeface="Segoe UI"/>
+              </a:rPr>
+              <a:t>：每个结点至多一个前驱、至多一个后继</a:t>
+            </a:r>
+          </a:p>
+          <a:p>
+            <a:pPr marL="270000" indent="-230000" lvl="0">
+              <a:lnSpc>
+                <a:spcPct val="100000"/>
+              </a:lnSpc>
+              <a:spcBef>
+                <a:spcPts val="655"/>
+              </a:spcBef>
+              <a:buClr>
+                <a:srgbClr val="8A4B2A"/>
+              </a:buClr>
+              <a:buFont typeface="Arial"/>
+              <a:buChar char="●"/>
+            </a:pPr>
+            <a:r>
+              <a:rPr lang="zh-CN" sz="2340" dirty="0" b="1">
+                <a:solidFill>
+                  <a:srgbClr val="8A4B2A"/>
+                </a:solidFill>
+                <a:latin typeface="Segoe UI"/>
+                <a:ea typeface="Noto Sans CJK SC"/>
+                <a:cs typeface="Segoe UI"/>
+              </a:rPr>
+              <a:t>树形</a:t>
+            </a:r>
+            <a:r>
+              <a:rPr lang="zh-CN" sz="2340" dirty="0">
+                <a:solidFill>
+                  <a:srgbClr val="1A1A18"/>
+                </a:solidFill>
+                <a:latin typeface="Segoe UI"/>
+                <a:ea typeface="Noto Sans CJK SC"/>
+                <a:cs typeface="Segoe UI"/>
+              </a:rPr>
+              <a:t>：至多一个前驱，可以有多个后继</a:t>
+            </a:r>
+          </a:p>
+          <a:p>
+            <a:pPr marL="270000" indent="-230000" lvl="0">
+              <a:lnSpc>
+                <a:spcPct val="100000"/>
+              </a:lnSpc>
+              <a:spcBef>
+                <a:spcPts val="655"/>
+              </a:spcBef>
+              <a:buClr>
+                <a:srgbClr val="8A4B2A"/>
+              </a:buClr>
+              <a:buFont typeface="Arial"/>
+              <a:buChar char="●"/>
+            </a:pPr>
+            <a:r>
+              <a:rPr lang="zh-CN" sz="2340" dirty="0" b="1">
+                <a:solidFill>
+                  <a:srgbClr val="8A4B2A"/>
+                </a:solidFill>
+                <a:latin typeface="Segoe UI"/>
+                <a:ea typeface="Noto Sans CJK SC"/>
+                <a:cs typeface="Segoe UI"/>
+              </a:rPr>
+              <a:t>图</a:t>
+            </a:r>
+            <a:r>
+              <a:rPr lang="zh-CN" sz="2340" dirty="0">
+                <a:solidFill>
+                  <a:srgbClr val="1A1A18"/>
+                </a:solidFill>
+                <a:latin typeface="Segoe UI"/>
+                <a:ea typeface="Noto Sans CJK SC"/>
+                <a:cs typeface="Segoe UI"/>
+              </a:rPr>
+              <a:t>：前驱后继都可以有多个</a:t>
+            </a:r>
+          </a:p>
+        </p:txBody>
+      </p:sp>
+      <p:sp>
+        <p:nvSpPr>
+          <p:cNvPr id="5" name="正文"/>
           <p:cNvSpPr txBox="1"/>
           <p:nvPr/>
         </p:nvSpPr>
         <p:spPr>
           <a:xfrm>
-            <a:off x="8307628" y="6419088"/>
-            <a:ext cx="3317443" cy="274320"/>
+            <a:off x="566928" y="3506011"/>
+            <a:ext cx="11058144" cy="398221"/>
           </a:xfrm>
           <a:prstGeom prst="rect">
             <a:avLst/>
@@ -17682,6 +17941,187 @@
           </a:bodyPr>
           <a:lstStyle/>
           <a:p>
+            <a:pPr marL="0" indent="0" lvl="0">
+              <a:lnSpc>
+                <a:spcPct val="100000"/>
+              </a:lnSpc>
+              <a:buNone/>
+            </a:pPr>
+            <a:r>
+              <a:rPr lang="zh-CN" sz="2340" dirty="0">
+                <a:solidFill>
+                  <a:srgbClr val="1A1A18"/>
+                </a:solidFill>
+                <a:latin typeface="Segoe UI"/>
+                <a:ea typeface="Noto Sans CJK SC"/>
+                <a:cs typeface="Segoe UI"/>
+              </a:rPr>
+              <a:t>两条分界线：</a:t>
+            </a:r>
+          </a:p>
+        </p:txBody>
+      </p:sp>
+      <p:sp>
+        <p:nvSpPr>
+          <p:cNvPr id="6" name="要点"/>
+          <p:cNvSpPr txBox="1"/>
+          <p:nvPr/>
+        </p:nvSpPr>
+        <p:spPr>
+          <a:xfrm>
+            <a:off x="566928" y="4019802"/>
+            <a:ext cx="11058144" cy="962862"/>
+          </a:xfrm>
+          <a:prstGeom prst="rect">
+            <a:avLst/>
+          </a:prstGeom>
+          <a:noFill/>
+        </p:spPr>
+        <p:txBody>
+          <a:bodyPr wrap="square" lIns="0" tIns="0" rIns="0" bIns="0">
+            <a:noAutofit/>
+          </a:bodyPr>
+          <a:lstStyle/>
+          <a:p>
+            <a:pPr marL="270000" indent="-230000" lvl="0">
+              <a:lnSpc>
+                <a:spcPct val="100000"/>
+              </a:lnSpc>
+              <a:spcBef>
+                <a:spcPts val="655"/>
+              </a:spcBef>
+              <a:buClr>
+                <a:srgbClr val="8A4B2A"/>
+              </a:buClr>
+              <a:buFont typeface="Arial"/>
+              <a:buChar char="●"/>
+            </a:pPr>
+            <a:r>
+              <a:rPr lang="zh-CN" sz="2340" dirty="0">
+                <a:solidFill>
+                  <a:srgbClr val="1A1A18"/>
+                </a:solidFill>
+                <a:latin typeface="Segoe UI"/>
+                <a:ea typeface="Noto Sans CJK SC"/>
+                <a:cs typeface="Segoe UI"/>
+              </a:rPr>
+              <a:t>树和图的分界：</a:t>
+            </a:r>
+            <a:r>
+              <a:rPr lang="zh-CN" sz="2340" dirty="0" b="1">
+                <a:solidFill>
+                  <a:srgbClr val="8A4B2A"/>
+                </a:solidFill>
+                <a:latin typeface="Segoe UI"/>
+                <a:ea typeface="Noto Sans CJK SC"/>
+                <a:cs typeface="Segoe UI"/>
+              </a:rPr>
+              <a:t>每个结点是否至多一个直接前驱</a:t>
+            </a:r>
+          </a:p>
+          <a:p>
+            <a:pPr marL="270000" indent="-230000" lvl="0">
+              <a:lnSpc>
+                <a:spcPct val="100000"/>
+              </a:lnSpc>
+              <a:spcBef>
+                <a:spcPts val="655"/>
+              </a:spcBef>
+              <a:buClr>
+                <a:srgbClr val="8A4B2A"/>
+              </a:buClr>
+              <a:buFont typeface="Arial"/>
+              <a:buChar char="●"/>
+            </a:pPr>
+            <a:r>
+              <a:rPr lang="zh-CN" sz="2340" dirty="0">
+                <a:solidFill>
+                  <a:srgbClr val="1A1A18"/>
+                </a:solidFill>
+                <a:latin typeface="Segoe UI"/>
+                <a:ea typeface="Noto Sans CJK SC"/>
+                <a:cs typeface="Segoe UI"/>
+              </a:rPr>
+              <a:t>线和树的分界：</a:t>
+            </a:r>
+            <a:r>
+              <a:rPr lang="zh-CN" sz="2340" dirty="0" b="1">
+                <a:solidFill>
+                  <a:srgbClr val="8A4B2A"/>
+                </a:solidFill>
+                <a:latin typeface="Segoe UI"/>
+                <a:ea typeface="Noto Sans CJK SC"/>
+                <a:cs typeface="Segoe UI"/>
+              </a:rPr>
+              <a:t>每个结点是否至多一个直接后继</a:t>
+            </a:r>
+          </a:p>
+        </p:txBody>
+      </p:sp>
+      <p:sp>
+        <p:nvSpPr>
+          <p:cNvPr id="7" name="页脚"/>
+          <p:cNvSpPr txBox="1"/>
+          <p:nvPr/>
+        </p:nvSpPr>
+        <p:spPr>
+          <a:xfrm>
+            <a:off x="566928" y="6419088"/>
+            <a:ext cx="7740700" cy="274320"/>
+          </a:xfrm>
+          <a:prstGeom prst="rect">
+            <a:avLst/>
+          </a:prstGeom>
+          <a:noFill/>
+        </p:spPr>
+        <p:txBody>
+          <a:bodyPr wrap="square" lIns="0" tIns="0" rIns="0" bIns="0">
+            <a:noAutofit/>
+          </a:bodyPr>
+          <a:lstStyle/>
+          <a:p>
+            <a:pPr marL="0" indent="0" lvl="0">
+              <a:lnSpc>
+                <a:spcPct val="100000"/>
+              </a:lnSpc>
+              <a:buNone/>
+            </a:pPr>
+            <a:r>
+              <a:rPr lang="zh-CN" sz="1000" dirty="0">
+                <a:solidFill>
+                  <a:srgbClr val="6B6B66"/>
+                </a:solidFill>
+                <a:latin typeface="Segoe UI"/>
+                <a:ea typeface="Noto Sans CJK SC"/>
+                <a:cs typeface="Segoe UI"/>
+              </a:rPr>
+              <a:t>第1章 概论</a:t>
+            </a:r>
+          </a:p>
+        </p:txBody>
+      </p:sp>
+      <p:sp>
+        <p:nvSpPr>
+          <p:cNvPr id="8" name="页码"/>
+          <p:cNvSpPr txBox="1"/>
+          <p:nvPr/>
+        </p:nvSpPr>
+        <p:spPr>
+          <a:xfrm>
+            <a:off x="8307628" y="6419088"/>
+            <a:ext cx="3317443" cy="274320"/>
+          </a:xfrm>
+          <a:prstGeom prst="rect">
+            <a:avLst/>
+          </a:prstGeom>
+          <a:noFill/>
+        </p:spPr>
+        <p:txBody>
+          <a:bodyPr wrap="square" lIns="0" tIns="0" rIns="0" bIns="0">
+            <a:noAutofit/>
+          </a:bodyPr>
+          <a:lstStyle/>
+          <a:p>
             <a:pPr marL="0" indent="0" lvl="0" algn="r">
               <a:lnSpc>
                 <a:spcPct val="100000"/>
@@ -17697,7 +18137,7 @@
                 <a:ea typeface="Noto Sans CJK SC"/>
                 <a:cs typeface="Segoe UI"/>
               </a:rPr>
-              <a:t>9 / 28</a:t>
+              <a:t>9 / 29</a:t>
             </a:r>
           </a:p>
         </p:txBody>

--- a/book/slides/pptx/ch01-adt.pptx
+++ b/book/slides/pptx/ch01-adt.pptx
@@ -18257,4 +18257,116 @@
     </a:fmtScheme>
   </a:themeElements>
 </a:theme>
+</file>
+
+<file path=ppt/theme/theme2.xml><?xml version="1.0" encoding="utf-8"?>
+<a:theme xmlns:a="http://schemas.openxmlformats.org/drawingml/2006/main" name="dsa">
+  <a:themeElements>
+    <a:clrScheme name="dsa">
+      <a:dk1>
+        <a:sysClr val="windowText" lastClr="000000"/>
+      </a:dk1>
+      <a:lt1>
+        <a:sysClr val="window" lastClr="FFFFFF"/>
+      </a:lt1>
+      <a:dk2>
+        <a:srgbClr val="1A1A18"/>
+      </a:dk2>
+      <a:lt2>
+        <a:srgbClr val="FDFDFC"/>
+      </a:lt2>
+      <a:accent1>
+        <a:srgbClr val="8A4B2A"/>
+      </a:accent1>
+      <a:accent2>
+        <a:srgbClr val="2C6B57"/>
+      </a:accent2>
+      <a:accent3>
+        <a:srgbClr val="7A5C1E"/>
+      </a:accent3>
+      <a:accent4>
+        <a:srgbClr val="4A5AA8"/>
+      </a:accent4>
+      <a:accent5>
+        <a:srgbClr val="6B6B66"/>
+      </a:accent5>
+      <a:accent6>
+        <a:srgbClr val="DCDCD6"/>
+      </a:accent6>
+      <a:hlink>
+        <a:srgbClr val="8A4B2A"/>
+      </a:hlink>
+      <a:folHlink>
+        <a:srgbClr val="6B6B66"/>
+      </a:folHlink>
+    </a:clrScheme>
+    <a:fontScheme name="dsa">
+      <a:majorFont>
+        <a:latin typeface="Segoe UI"/>
+        <a:ea typeface="Noto Sans CJK SC"/>
+        <a:cs typeface=""/>
+      </a:majorFont>
+      <a:minorFont>
+        <a:latin typeface="Segoe UI"/>
+        <a:ea typeface="Noto Sans CJK SC"/>
+        <a:cs typeface=""/>
+      </a:minorFont>
+    </a:fontScheme>
+    <a:fmtScheme name="dsa">
+      <a:fillStyleLst>
+        <a:solidFill>
+          <a:schemeClr val="phClr"/>
+        </a:solidFill>
+        <a:solidFill>
+          <a:schemeClr val="phClr"/>
+        </a:solidFill>
+        <a:solidFill>
+          <a:schemeClr val="phClr"/>
+        </a:solidFill>
+      </a:fillStyleLst>
+      <a:lnStyleLst>
+        <a:ln w="6350" cap="flat" cmpd="sng" algn="ctr">
+          <a:solidFill>
+            <a:schemeClr val="phClr"/>
+          </a:solidFill>
+          <a:prstDash val="solid"/>
+        </a:ln>
+        <a:ln w="6350" cap="flat" cmpd="sng" algn="ctr">
+          <a:solidFill>
+            <a:schemeClr val="phClr"/>
+          </a:solidFill>
+          <a:prstDash val="solid"/>
+        </a:ln>
+        <a:ln w="6350" cap="flat" cmpd="sng" algn="ctr">
+          <a:solidFill>
+            <a:schemeClr val="phClr"/>
+          </a:solidFill>
+          <a:prstDash val="solid"/>
+        </a:ln>
+      </a:lnStyleLst>
+      <a:effectStyleLst>
+        <a:effectStyle>
+          <a:effectLst/>
+        </a:effectStyle>
+        <a:effectStyle>
+          <a:effectLst/>
+        </a:effectStyle>
+        <a:effectStyle>
+          <a:effectLst/>
+        </a:effectStyle>
+      </a:effectStyleLst>
+      <a:bgFillStyleLst>
+        <a:solidFill>
+          <a:schemeClr val="phClr"/>
+        </a:solidFill>
+        <a:solidFill>
+          <a:schemeClr val="phClr"/>
+        </a:solidFill>
+        <a:solidFill>
+          <a:schemeClr val="phClr"/>
+        </a:solidFill>
+      </a:bgFillStyleLst>
+    </a:fmtScheme>
+  </a:themeElements>
+</a:theme>
 </file>